--- a/assets/TCS302/Unit-1/Lecture10_Postfix_Evaluation_Recursion_Hanoi.pptx
+++ b/assets/TCS302/Unit-1/Lecture10_Postfix_Evaluation_Recursion_Hanoi.pptx
@@ -4,6 +4,9 @@
   <p:sldMasterIdLst>
     <p:sldMasterId id="2147483648" r:id="rId1"/>
   </p:sldMasterIdLst>
+  <p:notesMasterIdLst>
+    <p:notesMasterId r:id="rId17"/>
+  </p:notesMasterIdLst>
   <p:sldIdLst>
     <p:sldId id="256" r:id="rId2"/>
     <p:sldId id="257" r:id="rId3"/>
@@ -21,10 +24,7 @@
     <p:sldId id="269" r:id="rId15"/>
     <p:sldId id="270" r:id="rId16"/>
   </p:sldIdLst>
-  <p:notesMasterIdLst>
-    <p:notesMasterId r:id="rId17"/>
-  </p:notesMasterIdLst>
-  <p:sldSz cx="9144000" cy="5143500"/>
+  <p:sldSz cx="9144000" cy="5143500" type="screen16x9"/>
   <p:notesSz cx="5143500" cy="9144000"/>
   <p:defaultTextStyle>
     <a:lvl1pPr marL="0" algn="l" defTabSz="914400" rtl="0" eaLnBrk="1" latinLnBrk="0" hangingPunct="1">
@@ -118,7 +118,208 @@
       </a:defRPr>
     </a:lvl9pPr>
   </p:defaultTextStyle>
+  <p:extLst>
+    <p:ext uri="{EFAFB233-063F-42B5-8137-9DF3F51BA10A}">
+      <p15:sldGuideLst xmlns:p15="http://schemas.microsoft.com/office/powerpoint/2012/main"/>
+    </p:ext>
+  </p:extLst>
 </p:presentation>
+</file>
+
+<file path=ppt/revisionInfo.xml><?xml version="1.0" encoding="utf-8"?>
+<p1510:revInfo xmlns:a="http://schemas.openxmlformats.org/drawingml/2006/main" xmlns:r="http://schemas.openxmlformats.org/officeDocument/2006/relationships" xmlns:p1510="http://schemas.microsoft.com/office/powerpoint/2015/10/main">
+  <p1510:revLst>
+    <p1510:client id="{6D95A42B-D61F-473E-B38F-E84170C7A712}" v="2" dt="2026-07-31T04:26:36.654"/>
+  </p1510:revLst>
+</p1510:revInfo>
+</file>
+
+<file path=ppt/changesInfos/changesInfo1.xml><?xml version="1.0" encoding="utf-8"?>
+<pc:chgInfo xmlns:a="http://schemas.openxmlformats.org/drawingml/2006/main" xmlns:r="http://schemas.openxmlformats.org/officeDocument/2006/relationships" xmlns:ac="http://schemas.microsoft.com/office/drawing/2013/main/command" xmlns:pc="http://schemas.microsoft.com/office/powerpoint/2013/main/command">
+  <pc:docChgLst>
+    <pc:chgData name="SC22D012-Manoj Kaushik 2022-PHD-Earth&amp;SpaceScience" userId="78d50035-fc00-4ea2-995b-b881e10649a1" providerId="ADAL" clId="{29B47332-549A-4FC0-A3ED-D31212E60846}"/>
+    <pc:docChg chg="custSel modSld">
+      <pc:chgData name="SC22D012-Manoj Kaushik 2022-PHD-Earth&amp;SpaceScience" userId="78d50035-fc00-4ea2-995b-b881e10649a1" providerId="ADAL" clId="{29B47332-549A-4FC0-A3ED-D31212E60846}" dt="2026-07-31T04:27:23.211" v="36" actId="14100"/>
+      <pc:docMkLst>
+        <pc:docMk/>
+      </pc:docMkLst>
+      <pc:sldChg chg="delSp modSp mod">
+        <pc:chgData name="SC22D012-Manoj Kaushik 2022-PHD-Earth&amp;SpaceScience" userId="78d50035-fc00-4ea2-995b-b881e10649a1" providerId="ADAL" clId="{29B47332-549A-4FC0-A3ED-D31212E60846}" dt="2026-07-31T04:23:20.016" v="25" actId="1076"/>
+        <pc:sldMkLst>
+          <pc:docMk/>
+          <pc:sldMk cId="0" sldId="258"/>
+        </pc:sldMkLst>
+        <pc:spChg chg="del">
+          <ac:chgData name="SC22D012-Manoj Kaushik 2022-PHD-Earth&amp;SpaceScience" userId="78d50035-fc00-4ea2-995b-b881e10649a1" providerId="ADAL" clId="{29B47332-549A-4FC0-A3ED-D31212E60846}" dt="2026-07-31T04:21:48.735" v="5" actId="478"/>
+          <ac:spMkLst>
+            <pc:docMk/>
+            <pc:sldMk cId="0" sldId="258"/>
+            <ac:spMk id="6" creationId="{00000000-0000-0000-0000-000000000000}"/>
+          </ac:spMkLst>
+        </pc:spChg>
+        <pc:spChg chg="mod">
+          <ac:chgData name="SC22D012-Manoj Kaushik 2022-PHD-Earth&amp;SpaceScience" userId="78d50035-fc00-4ea2-995b-b881e10649a1" providerId="ADAL" clId="{29B47332-549A-4FC0-A3ED-D31212E60846}" dt="2026-07-31T04:23:20.016" v="25" actId="1076"/>
+          <ac:spMkLst>
+            <pc:docMk/>
+            <pc:sldMk cId="0" sldId="258"/>
+            <ac:spMk id="8" creationId="{00000000-0000-0000-0000-000000000000}"/>
+          </ac:spMkLst>
+        </pc:spChg>
+        <pc:spChg chg="del">
+          <ac:chgData name="SC22D012-Manoj Kaushik 2022-PHD-Earth&amp;SpaceScience" userId="78d50035-fc00-4ea2-995b-b881e10649a1" providerId="ADAL" clId="{29B47332-549A-4FC0-A3ED-D31212E60846}" dt="2026-07-31T04:21:46.483" v="4" actId="478"/>
+          <ac:spMkLst>
+            <pc:docMk/>
+            <pc:sldMk cId="0" sldId="258"/>
+            <ac:spMk id="9" creationId="{00000000-0000-0000-0000-000000000000}"/>
+          </ac:spMkLst>
+        </pc:spChg>
+        <pc:spChg chg="del">
+          <ac:chgData name="SC22D012-Manoj Kaushik 2022-PHD-Earth&amp;SpaceScience" userId="78d50035-fc00-4ea2-995b-b881e10649a1" providerId="ADAL" clId="{29B47332-549A-4FC0-A3ED-D31212E60846}" dt="2026-07-31T04:21:44.821" v="3" actId="478"/>
+          <ac:spMkLst>
+            <pc:docMk/>
+            <pc:sldMk cId="0" sldId="258"/>
+            <ac:spMk id="10" creationId="{00000000-0000-0000-0000-000000000000}"/>
+          </ac:spMkLst>
+        </pc:spChg>
+        <pc:spChg chg="del">
+          <ac:chgData name="SC22D012-Manoj Kaushik 2022-PHD-Earth&amp;SpaceScience" userId="78d50035-fc00-4ea2-995b-b881e10649a1" providerId="ADAL" clId="{29B47332-549A-4FC0-A3ED-D31212E60846}" dt="2026-07-31T04:21:42.727" v="2" actId="478"/>
+          <ac:spMkLst>
+            <pc:docMk/>
+            <pc:sldMk cId="0" sldId="258"/>
+            <ac:spMk id="11" creationId="{00000000-0000-0000-0000-000000000000}"/>
+          </ac:spMkLst>
+        </pc:spChg>
+        <pc:spChg chg="del">
+          <ac:chgData name="SC22D012-Manoj Kaushik 2022-PHD-Earth&amp;SpaceScience" userId="78d50035-fc00-4ea2-995b-b881e10649a1" providerId="ADAL" clId="{29B47332-549A-4FC0-A3ED-D31212E60846}" dt="2026-07-31T04:21:39.930" v="1" actId="478"/>
+          <ac:spMkLst>
+            <pc:docMk/>
+            <pc:sldMk cId="0" sldId="258"/>
+            <ac:spMk id="12" creationId="{00000000-0000-0000-0000-000000000000}"/>
+          </ac:spMkLst>
+        </pc:spChg>
+        <pc:spChg chg="del">
+          <ac:chgData name="SC22D012-Manoj Kaushik 2022-PHD-Earth&amp;SpaceScience" userId="78d50035-fc00-4ea2-995b-b881e10649a1" providerId="ADAL" clId="{29B47332-549A-4FC0-A3ED-D31212E60846}" dt="2026-07-31T04:21:37.792" v="0" actId="478"/>
+          <ac:spMkLst>
+            <pc:docMk/>
+            <pc:sldMk cId="0" sldId="258"/>
+            <ac:spMk id="14" creationId="{00000000-0000-0000-0000-000000000000}"/>
+          </ac:spMkLst>
+        </pc:spChg>
+        <pc:spChg chg="del">
+          <ac:chgData name="SC22D012-Manoj Kaushik 2022-PHD-Earth&amp;SpaceScience" userId="78d50035-fc00-4ea2-995b-b881e10649a1" providerId="ADAL" clId="{29B47332-549A-4FC0-A3ED-D31212E60846}" dt="2026-07-31T04:22:00.573" v="9" actId="478"/>
+          <ac:spMkLst>
+            <pc:docMk/>
+            <pc:sldMk cId="0" sldId="258"/>
+            <ac:spMk id="15" creationId="{00000000-0000-0000-0000-000000000000}"/>
+          </ac:spMkLst>
+        </pc:spChg>
+        <pc:spChg chg="del">
+          <ac:chgData name="SC22D012-Manoj Kaushik 2022-PHD-Earth&amp;SpaceScience" userId="78d50035-fc00-4ea2-995b-b881e10649a1" providerId="ADAL" clId="{29B47332-549A-4FC0-A3ED-D31212E60846}" dt="2026-07-31T04:22:04.190" v="10" actId="478"/>
+          <ac:spMkLst>
+            <pc:docMk/>
+            <pc:sldMk cId="0" sldId="258"/>
+            <ac:spMk id="16" creationId="{00000000-0000-0000-0000-000000000000}"/>
+          </ac:spMkLst>
+        </pc:spChg>
+      </pc:sldChg>
+      <pc:sldChg chg="delSp modSp mod">
+        <pc:chgData name="SC22D012-Manoj Kaushik 2022-PHD-Earth&amp;SpaceScience" userId="78d50035-fc00-4ea2-995b-b881e10649a1" providerId="ADAL" clId="{29B47332-549A-4FC0-A3ED-D31212E60846}" dt="2026-07-31T04:27:23.211" v="36" actId="14100"/>
+        <pc:sldMkLst>
+          <pc:docMk/>
+          <pc:sldMk cId="0" sldId="266"/>
+        </pc:sldMkLst>
+        <pc:spChg chg="del">
+          <ac:chgData name="SC22D012-Manoj Kaushik 2022-PHD-Earth&amp;SpaceScience" userId="78d50035-fc00-4ea2-995b-b881e10649a1" providerId="ADAL" clId="{29B47332-549A-4FC0-A3ED-D31212E60846}" dt="2026-07-31T04:26:55.264" v="29" actId="478"/>
+          <ac:spMkLst>
+            <pc:docMk/>
+            <pc:sldMk cId="0" sldId="266"/>
+            <ac:spMk id="6" creationId="{00000000-0000-0000-0000-000000000000}"/>
+          </ac:spMkLst>
+        </pc:spChg>
+        <pc:spChg chg="del">
+          <ac:chgData name="SC22D012-Manoj Kaushik 2022-PHD-Earth&amp;SpaceScience" userId="78d50035-fc00-4ea2-995b-b881e10649a1" providerId="ADAL" clId="{29B47332-549A-4FC0-A3ED-D31212E60846}" dt="2026-07-31T04:26:55.264" v="29" actId="478"/>
+          <ac:spMkLst>
+            <pc:docMk/>
+            <pc:sldMk cId="0" sldId="266"/>
+            <ac:spMk id="7" creationId="{00000000-0000-0000-0000-000000000000}"/>
+          </ac:spMkLst>
+        </pc:spChg>
+        <pc:spChg chg="del">
+          <ac:chgData name="SC22D012-Manoj Kaushik 2022-PHD-Earth&amp;SpaceScience" userId="78d50035-fc00-4ea2-995b-b881e10649a1" providerId="ADAL" clId="{29B47332-549A-4FC0-A3ED-D31212E60846}" dt="2026-07-31T04:26:58.381" v="30" actId="478"/>
+          <ac:spMkLst>
+            <pc:docMk/>
+            <pc:sldMk cId="0" sldId="266"/>
+            <ac:spMk id="8" creationId="{00000000-0000-0000-0000-000000000000}"/>
+          </ac:spMkLst>
+        </pc:spChg>
+        <pc:spChg chg="del">
+          <ac:chgData name="SC22D012-Manoj Kaushik 2022-PHD-Earth&amp;SpaceScience" userId="78d50035-fc00-4ea2-995b-b881e10649a1" providerId="ADAL" clId="{29B47332-549A-4FC0-A3ED-D31212E60846}" dt="2026-07-31T04:26:55.264" v="29" actId="478"/>
+          <ac:spMkLst>
+            <pc:docMk/>
+            <pc:sldMk cId="0" sldId="266"/>
+            <ac:spMk id="9" creationId="{00000000-0000-0000-0000-000000000000}"/>
+          </ac:spMkLst>
+        </pc:spChg>
+        <pc:spChg chg="del">
+          <ac:chgData name="SC22D012-Manoj Kaushik 2022-PHD-Earth&amp;SpaceScience" userId="78d50035-fc00-4ea2-995b-b881e10649a1" providerId="ADAL" clId="{29B47332-549A-4FC0-A3ED-D31212E60846}" dt="2026-07-31T04:26:55.264" v="29" actId="478"/>
+          <ac:spMkLst>
+            <pc:docMk/>
+            <pc:sldMk cId="0" sldId="266"/>
+            <ac:spMk id="10" creationId="{00000000-0000-0000-0000-000000000000}"/>
+          </ac:spMkLst>
+        </pc:spChg>
+        <pc:spChg chg="del">
+          <ac:chgData name="SC22D012-Manoj Kaushik 2022-PHD-Earth&amp;SpaceScience" userId="78d50035-fc00-4ea2-995b-b881e10649a1" providerId="ADAL" clId="{29B47332-549A-4FC0-A3ED-D31212E60846}" dt="2026-07-31T04:27:00.437" v="31" actId="478"/>
+          <ac:spMkLst>
+            <pc:docMk/>
+            <pc:sldMk cId="0" sldId="266"/>
+            <ac:spMk id="11" creationId="{00000000-0000-0000-0000-000000000000}"/>
+          </ac:spMkLst>
+        </pc:spChg>
+        <pc:spChg chg="del">
+          <ac:chgData name="SC22D012-Manoj Kaushik 2022-PHD-Earth&amp;SpaceScience" userId="78d50035-fc00-4ea2-995b-b881e10649a1" providerId="ADAL" clId="{29B47332-549A-4FC0-A3ED-D31212E60846}" dt="2026-07-31T04:26:55.264" v="29" actId="478"/>
+          <ac:spMkLst>
+            <pc:docMk/>
+            <pc:sldMk cId="0" sldId="266"/>
+            <ac:spMk id="12" creationId="{00000000-0000-0000-0000-000000000000}"/>
+          </ac:spMkLst>
+        </pc:spChg>
+        <pc:spChg chg="del">
+          <ac:chgData name="SC22D012-Manoj Kaushik 2022-PHD-Earth&amp;SpaceScience" userId="78d50035-fc00-4ea2-995b-b881e10649a1" providerId="ADAL" clId="{29B47332-549A-4FC0-A3ED-D31212E60846}" dt="2026-07-31T04:26:55.264" v="29" actId="478"/>
+          <ac:spMkLst>
+            <pc:docMk/>
+            <pc:sldMk cId="0" sldId="266"/>
+            <ac:spMk id="13" creationId="{00000000-0000-0000-0000-000000000000}"/>
+          </ac:spMkLst>
+        </pc:spChg>
+        <pc:spChg chg="del">
+          <ac:chgData name="SC22D012-Manoj Kaushik 2022-PHD-Earth&amp;SpaceScience" userId="78d50035-fc00-4ea2-995b-b881e10649a1" providerId="ADAL" clId="{29B47332-549A-4FC0-A3ED-D31212E60846}" dt="2026-07-31T04:27:03.557" v="32" actId="478"/>
+          <ac:spMkLst>
+            <pc:docMk/>
+            <pc:sldMk cId="0" sldId="266"/>
+            <ac:spMk id="14" creationId="{00000000-0000-0000-0000-000000000000}"/>
+          </ac:spMkLst>
+        </pc:spChg>
+        <pc:spChg chg="mod">
+          <ac:chgData name="SC22D012-Manoj Kaushik 2022-PHD-Earth&amp;SpaceScience" userId="78d50035-fc00-4ea2-995b-b881e10649a1" providerId="ADAL" clId="{29B47332-549A-4FC0-A3ED-D31212E60846}" dt="2026-07-31T04:27:13.085" v="34" actId="1076"/>
+          <ac:spMkLst>
+            <pc:docMk/>
+            <pc:sldMk cId="0" sldId="266"/>
+            <ac:spMk id="15" creationId="{00000000-0000-0000-0000-000000000000}"/>
+          </ac:spMkLst>
+        </pc:spChg>
+        <pc:spChg chg="mod">
+          <ac:chgData name="SC22D012-Manoj Kaushik 2022-PHD-Earth&amp;SpaceScience" userId="78d50035-fc00-4ea2-995b-b881e10649a1" providerId="ADAL" clId="{29B47332-549A-4FC0-A3ED-D31212E60846}" dt="2026-07-31T04:27:23.211" v="36" actId="14100"/>
+          <ac:spMkLst>
+            <pc:docMk/>
+            <pc:sldMk cId="0" sldId="266"/>
+            <ac:spMk id="16" creationId="{00000000-0000-0000-0000-000000000000}"/>
+          </ac:spMkLst>
+        </pc:spChg>
+      </pc:sldChg>
+    </pc:docChg>
+  </pc:docChgLst>
+</pc:chgInfo>
 </file>
 
 <file path=ppt/notesMasters/notesMaster1.xml><?xml version="1.0" encoding="utf-8"?>
@@ -143,234 +344,10 @@
           <a:chExt cx="0" cy="0"/>
         </a:xfrm>
       </p:grpSpPr>
-      <p:sp>
-        <p:nvSpPr>
-          <p:cNvPr id="2" name="Header Placeholder 1"/>
-          <p:cNvSpPr>
-            <a:spLocks noGrp="1"/>
-          </p:cNvSpPr>
-          <p:nvPr>
-            <p:ph type="hdr" sz="quarter"/>
-          </p:nvPr>
-        </p:nvSpPr>
-        <p:spPr>
-          <a:xfrm>
-            <a:off x="0" y="0"/>
-            <a:ext cx="2971800" cy="458788"/>
-          </a:xfrm>
-          <a:prstGeom prst="rect">
-            <a:avLst/>
-          </a:prstGeom>
-        </p:spPr>
-        <p:txBody>
-          <a:bodyPr vert="horz" lIns="91440" tIns="45720" rIns="91440" bIns="45720" rtlCol="0"/>
-          <a:lstStyle>
-            <a:lvl1pPr algn="l">
-              <a:defRPr sz="1200"/>
-            </a:lvl1pPr>
-          </a:lstStyle>
-          <a:p>
-            <a:endParaRPr lang="en-US"/>
-          </a:p>
-        </p:txBody>
-      </p:sp>
-      <p:sp>
-        <p:nvSpPr>
-          <p:cNvPr id="3" name="Date Placeholder 2"/>
-          <p:cNvSpPr>
-            <a:spLocks noGrp="1"/>
-          </p:cNvSpPr>
-          <p:nvPr>
-            <p:ph type="dt" idx="1"/>
-          </p:nvPr>
-        </p:nvSpPr>
-        <p:spPr>
-          <a:xfrm>
-            <a:off x="3884613" y="0"/>
-            <a:ext cx="2971800" cy="458788"/>
-          </a:xfrm>
-          <a:prstGeom prst="rect">
-            <a:avLst/>
-          </a:prstGeom>
-        </p:spPr>
-        <p:txBody>
-          <a:bodyPr vert="horz" lIns="91440" tIns="45720" rIns="91440" bIns="45720" rtlCol="0"/>
-          <a:lstStyle>
-            <a:lvl1pPr algn="r">
-              <a:defRPr sz="1200"/>
-            </a:lvl1pPr>
-          </a:lstStyle>
-          <a:p>
-            <a:fld id="{5282F153-3F37-0F45-9E97-73ACFA13230C}" type="datetimeFigureOut">
-              <a:rPr lang="en-US"/>
-              <a:t>7/23/19</a:t>
-            </a:fld>
-            <a:endParaRPr lang="en-US"/>
-          </a:p>
-        </p:txBody>
-      </p:sp>
-      <p:sp>
-        <p:nvSpPr>
-          <p:cNvPr id="4" name="Slide Image Placeholder 3"/>
-          <p:cNvSpPr>
-            <a:spLocks noGrp="1" noRot="1" noChangeAspect="1"/>
-          </p:cNvSpPr>
-          <p:nvPr>
-            <p:ph type="sldImg" idx="2"/>
-          </p:nvPr>
-        </p:nvSpPr>
-        <p:spPr>
-          <a:xfrm>
-            <a:off x="685800" y="1143000"/>
-            <a:ext cx="5486400" cy="3086100"/>
-          </a:xfrm>
-          <a:prstGeom prst="rect">
-            <a:avLst/>
-          </a:prstGeom>
-          <a:noFill/>
-          <a:ln w="12700">
-            <a:solidFill>
-              <a:prstClr val="black"/>
-            </a:solidFill>
-          </a:ln>
-        </p:spPr>
-        <p:txBody>
-          <a:bodyPr vert="horz" lIns="91440" tIns="45720" rIns="91440" bIns="45720" rtlCol="0" anchor="ctr"/>
-          <a:lstStyle/>
-          <a:p>
-            <a:endParaRPr lang="en-US"/>
-          </a:p>
-        </p:txBody>
-      </p:sp>
-      <p:sp>
-        <p:nvSpPr>
-          <p:cNvPr id="5" name="Notes Placeholder 4"/>
-          <p:cNvSpPr>
-            <a:spLocks noGrp="1"/>
-          </p:cNvSpPr>
-          <p:nvPr>
-            <p:ph type="body" sz="quarter" idx="3"/>
-          </p:nvPr>
-        </p:nvSpPr>
-        <p:spPr>
-          <a:xfrm>
-            <a:off x="685800" y="4400550"/>
-            <a:ext cx="5486400" cy="3600450"/>
-          </a:xfrm>
-          <a:prstGeom prst="rect">
-            <a:avLst/>
-          </a:prstGeom>
-        </p:spPr>
-        <p:txBody>
-          <a:bodyPr vert="horz" lIns="91440" tIns="45720" rIns="91440" bIns="45720" rtlCol="0"/>
-          <a:lstStyle/>
-          <a:p>
-            <a:pPr lvl="0"/>
-            <a:r>
-              <a:rPr lang="en-US"/>
-              <a:t>Click to edit Master text styles</a:t>
-            </a:r>
-          </a:p>
-          <a:p>
-            <a:pPr lvl="1"/>
-            <a:r>
-              <a:rPr lang="en-US"/>
-              <a:t>Second level</a:t>
-            </a:r>
-          </a:p>
-          <a:p>
-            <a:pPr lvl="2"/>
-            <a:r>
-              <a:rPr lang="en-US"/>
-              <a:t>Third level</a:t>
-            </a:r>
-          </a:p>
-          <a:p>
-            <a:pPr lvl="3"/>
-            <a:r>
-              <a:rPr lang="en-US"/>
-              <a:t>Fourth level</a:t>
-            </a:r>
-          </a:p>
-          <a:p>
-            <a:pPr lvl="4"/>
-            <a:r>
-              <a:rPr lang="en-US"/>
-              <a:t>Fifth level</a:t>
-            </a:r>
-          </a:p>
-        </p:txBody>
-      </p:sp>
-      <p:sp>
-        <p:nvSpPr>
-          <p:cNvPr id="6" name="Footer Placeholder 5"/>
-          <p:cNvSpPr>
-            <a:spLocks noGrp="1"/>
-          </p:cNvSpPr>
-          <p:nvPr>
-            <p:ph type="ftr" sz="quarter" idx="4"/>
-          </p:nvPr>
-        </p:nvSpPr>
-        <p:spPr>
-          <a:xfrm>
-            <a:off x="0" y="8685213"/>
-            <a:ext cx="2971800" cy="458787"/>
-          </a:xfrm>
-          <a:prstGeom prst="rect">
-            <a:avLst/>
-          </a:prstGeom>
-        </p:spPr>
-        <p:txBody>
-          <a:bodyPr vert="horz" lIns="91440" tIns="45720" rIns="91440" bIns="45720" rtlCol="0" anchor="b"/>
-          <a:lstStyle>
-            <a:lvl1pPr algn="l">
-              <a:defRPr sz="1200"/>
-            </a:lvl1pPr>
-          </a:lstStyle>
-          <a:p>
-            <a:endParaRPr lang="en-US"/>
-          </a:p>
-        </p:txBody>
-      </p:sp>
-      <p:sp>
-        <p:nvSpPr>
-          <p:cNvPr id="7" name="Slide Number Placeholder 6"/>
-          <p:cNvSpPr>
-            <a:spLocks noGrp="1"/>
-          </p:cNvSpPr>
-          <p:nvPr>
-            <p:ph type="sldNum" sz="quarter" idx="5"/>
-          </p:nvPr>
-        </p:nvSpPr>
-        <p:spPr>
-          <a:xfrm>
-            <a:off x="3884613" y="8685213"/>
-            <a:ext cx="2971800" cy="458787"/>
-          </a:xfrm>
-          <a:prstGeom prst="rect">
-            <a:avLst/>
-          </a:prstGeom>
-        </p:spPr>
-        <p:txBody>
-          <a:bodyPr vert="horz" lIns="91440" tIns="45720" rIns="91440" bIns="45720" rtlCol="0" anchor="b"/>
-          <a:lstStyle>
-            <a:lvl1pPr algn="r">
-              <a:defRPr sz="1200"/>
-            </a:lvl1pPr>
-          </a:lstStyle>
-          <a:p>
-            <a:fld id="{CE5E9CC1-C706-0F49-92D6-E571CC5EEA8F}" type="slidenum">
-              <a:rPr lang="en-US"/>
-              <a:t>‹#›</a:t>
-            </a:fld>
-            <a:endParaRPr lang="en-US"/>
-          </a:p>
-        </p:txBody>
-      </p:sp>
     </p:spTree>
     <p:extLst>
       <p:ext uri="{BB962C8B-B14F-4D97-AF65-F5344CB8AC3E}">
-        <p14:creationId xmlns:p14="http://schemas.microsoft.com/office/powerpoint/2010/main" val="1024086991"/>
+        <p14:creationId xmlns:p14="http://schemas.microsoft.com/office/powerpoint/2010/main" val="752826906"/>
       </p:ext>
     </p:extLst>
   </p:cSld>
@@ -518,7 +495,6 @@
               <a:rPr lang="en-US" dirty="0"/>
               <a:t>Closing lecture of Unit I. Lecture 9 produced postfix; today a stack consumes it. Then recursion is revealed as stack behaviour too: the call stack. Hanoi is the trace exercise, tail recursion the closing idea.</a:t>
             </a:r>
-            <a:endParaRPr lang="en-US" dirty="0"/>
           </a:p>
         </p:txBody>
       </p:sp>
@@ -606,7 +582,6 @@
               <a:rPr lang="en-US" dirty="0"/>
               <a:t>ASK answer: disk 1 from A to C — because disk 3 must eventually go A→C, which needs the two smaller disks parked on B first, and that sub-task starts by moving disk 1 to C. Let them struggle for two minutes; the struggle sells the recursive insight.</a:t>
             </a:r>
-            <a:endParaRPr lang="en-US" dirty="0"/>
           </a:p>
         </p:txBody>
       </p:sp>
@@ -694,7 +669,6 @@
               <a:rPr lang="en-US" dirty="0"/>
               <a:t>The parameters just relabel the pegs: in step 1 the helper becomes the destination. Nobody plans 7 moves — the recursion discovers them. That is the power being demonstrated.</a:t>
             </a:r>
-            <a:endParaRPr lang="en-US" dirty="0"/>
           </a:p>
         </p:txBody>
       </p:sp>
@@ -782,7 +756,6 @@
               <a:rPr lang="en-US" dirty="0"/>
               <a:t>Draw the three pegs and perform the 7 moves physically as the table is revealed. Move 4 (gold row) is the single printf of the outermost call; moves 1–3 and 5–7 are the two recursive halves.</a:t>
             </a:r>
-            <a:endParaRPr lang="en-US" dirty="0"/>
           </a:p>
         </p:txBody>
       </p:sp>
@@ -870,7 +843,6 @@
               <a:rPr lang="en-US" dirty="0"/>
               <a:t>Trace: (4,1) (3,4) (2,12) (1,24) (0,24) → 24. The answer builds on the way DOWN, not on the way back up. Both versions verified to return 24.</a:t>
             </a:r>
-            <a:endParaRPr lang="en-US" dirty="0"/>
           </a:p>
         </p:txBody>
       </p:sp>
@@ -958,7 +930,6 @@
               <a:rPr lang="en-US" dirty="0"/>
               <a:t>Zoom out before the exit ticket. The unit's arc: build the tool two ways, then watch the machine itself use it. Next lecture opens Unit II with queues — the opposite discipline, FIFO.</a:t>
             </a:r>
-            <a:endParaRPr lang="en-US" dirty="0"/>
           </a:p>
         </p:txBody>
       </p:sp>
@@ -1046,7 +1017,6 @@
               <a:rPr lang="en-US" dirty="0"/>
               <a:t>Exit ticket answers: (a) 5 1 2 + 4 * + 3 − → stack: 5 | 5,1 | 5,1,2 | 5,3 | 5,3,4 | 5,12 | 17 | 17,3 | 14. Answer 14. (b) 2⁴ − 1 = 15 moves; move #8 is the largest disk, disk 4, A → C — the middle move, same pattern as move 4 for n = 3.</a:t>
             </a:r>
-            <a:endParaRPr lang="en-US" dirty="0"/>
           </a:p>
         </p:txBody>
       </p:sp>
@@ -1134,7 +1104,6 @@
               <a:rPr lang="en-US" dirty="0"/>
               <a:t>ASK answer: precedence and parentheses disappear — the order of symbols already encodes the order of work. That is why one simple scan suffices.</a:t>
             </a:r>
-            <a:endParaRPr lang="en-US" dirty="0"/>
           </a:p>
         </p:txBody>
       </p:sp>
@@ -1222,7 +1191,6 @@
               <a:rPr lang="en-US" dirty="0"/>
               <a:t>Contrast with Lecture 9's five conversion rules: evaluation is simpler because postfix already encodes the order. The stack now holds numbers, not operators.</a:t>
             </a:r>
-            <a:endParaRPr lang="en-US" dirty="0"/>
           </a:p>
         </p:txBody>
       </p:sp>
@@ -1310,7 +1278,6 @@
               <a:rPr lang="en-US" dirty="0"/>
               <a:t>Walk this row by row, drawing the stack vertically on the board. The multiplication happens before the addition automatically — not because we checked precedence, but because postfix placed * earlier.</a:t>
             </a:r>
-            <a:endParaRPr lang="en-US" dirty="0"/>
           </a:p>
         </p:txBody>
       </p:sp>
@@ -1398,7 +1365,6 @@
               <a:rPr lang="en-US" dirty="0"/>
               <a:t>ASK answer: overflow check in push (expression with &gt;100 operands) and underflow check in pop (malformed postfix like "+ 2"). Keeping the demo code minimal keeps attention on the algorithm.</a:t>
             </a:r>
-            <a:endParaRPr lang="en-US" dirty="0"/>
           </a:p>
         </p:txBody>
       </p:sp>
@@ -1486,7 +1452,6 @@
               <a:rPr lang="en-US" dirty="0"/>
               <a:t>Verified: "2 3 4 * + 5 -" returns 9. Explain ch - '0' carefully: characters are small numbers (ASCII), and digit characters sit in a row, so subtracting '0' gives the numeric value. Single digits only — a deliberate simplification.</a:t>
             </a:r>
-            <a:endParaRPr lang="en-US" dirty="0"/>
           </a:p>
         </p:txBody>
       </p:sp>
@@ -1574,7 +1539,6 @@
               <a:rPr lang="en-US" dirty="0"/>
               <a:t>Let students predict 6 2 / with the pops swapped before revealing. The commuting operators hiding the bug is why students believe their broken code works — until the first subtraction.</a:t>
             </a:r>
-            <a:endParaRPr lang="en-US" dirty="0"/>
           </a:p>
         </p:txBody>
       </p:sp>
@@ -1662,7 +1626,6 @@
               <a:rPr lang="en-US" dirty="0"/>
               <a:t>Why is recursion in the stack unit? Next slide answers it. Emphasise the two-part anatomy — every recursive function students ever write must show both parts.</a:t>
             </a:r>
-            <a:endParaRPr lang="en-US" dirty="0"/>
           </a:p>
         </p:txBody>
       </p:sp>
@@ -1750,7 +1713,6 @@
               <a:rPr lang="en-US" dirty="0"/>
               <a:t>ASK answer: 5, and n + 1 in general — the space cost of recursion is O(n). The unwind multiplication chain on the board: 1, then 1×1, 2×1, 3×2, 4×6 = 24.</a:t>
             </a:r>
-            <a:endParaRPr lang="en-US" dirty="0"/>
           </a:p>
         </p:txBody>
       </p:sp>
@@ -1823,6 +1785,11 @@
 <file path=ppt/slideMasters/slideMaster1.xml><?xml version="1.0" encoding="utf-8"?>
 <p:sldMaster xmlns:a="http://schemas.openxmlformats.org/drawingml/2006/main" xmlns:r="http://schemas.openxmlformats.org/officeDocument/2006/relationships" xmlns:p="http://schemas.openxmlformats.org/presentationml/2006/main">
   <p:cSld>
+    <p:bg>
+      <p:bgRef idx="1001">
+        <a:schemeClr val="bg1"/>
+      </p:bgRef>
+    </p:bg>
     <p:spTree>
       <p:nvGrpSpPr>
         <p:cNvPr id="1" name=""/>
@@ -2105,6 +2072,7 @@
         <a:solidFill>
           <a:srgbClr val="1E2761"/>
         </a:solidFill>
+        <a:effectLst/>
       </p:bgPr>
     </p:bg>
     <p:spTree>
@@ -2142,11 +2110,11 @@
           <a:bodyPr wrap="square" lIns="0" tIns="0" rIns="0" bIns="0" rtlCol="0" anchor="ctr"/>
           <a:lstStyle/>
           <a:p>
-            <a:pPr indent="0" marL="0">
-              <a:buNone/>
-            </a:pPr>
-            <a:r>
-              <a:rPr lang="en-US" sz="1300" b="1" spc="200" kern="0" dirty="0">
+            <a:pPr marL="0" indent="0">
+              <a:buNone/>
+            </a:pPr>
+            <a:r>
+              <a:rPr lang="en-US" sz="1300" b="1" kern="0" spc="200" dirty="0">
                 <a:solidFill>
                   <a:srgbClr val="D4A017"/>
                 </a:solidFill>
@@ -2181,7 +2149,7 @@
           <a:bodyPr wrap="square" lIns="0" tIns="0" rIns="0" bIns="0" rtlCol="0" anchor="ctr"/>
           <a:lstStyle/>
           <a:p>
-            <a:pPr indent="0" marL="0">
+            <a:pPr marL="0" indent="0">
               <a:buNone/>
             </a:pPr>
             <a:r>
@@ -2220,7 +2188,7 @@
           <a:bodyPr wrap="square" lIns="0" tIns="0" rIns="0" bIns="0" rtlCol="0" anchor="ctr"/>
           <a:lstStyle/>
           <a:p>
-            <a:pPr indent="0" marL="0">
+            <a:pPr marL="0" indent="0">
               <a:buNone/>
             </a:pPr>
             <a:r>
@@ -2259,7 +2227,7 @@
           <a:bodyPr wrap="square" lIns="0" tIns="0" rIns="0" bIns="0" rtlCol="0" anchor="ctr"/>
           <a:lstStyle/>
           <a:p>
-            <a:pPr indent="0" marL="0">
+            <a:pPr marL="0" indent="0">
               <a:buNone/>
             </a:pPr>
             <a:r>
@@ -2298,7 +2266,7 @@
           <a:bodyPr wrap="square" lIns="0" tIns="0" rIns="0" bIns="0" rtlCol="0" anchor="ctr"/>
           <a:lstStyle/>
           <a:p>
-            <a:pPr indent="0" marL="0">
+            <a:pPr marL="0" indent="0">
               <a:buNone/>
             </a:pPr>
             <a:r>
@@ -2340,6 +2308,13 @@
             <a:prstDash val="solid"/>
           </a:ln>
         </p:spPr>
+        <p:txBody>
+          <a:bodyPr/>
+          <a:lstStyle/>
+          <a:p>
+            <a:endParaRPr lang="en-IN"/>
+          </a:p>
+        </p:txBody>
       </p:sp>
       <p:sp>
         <p:nvSpPr>
@@ -2362,7 +2337,7 @@
           <a:bodyPr wrap="square" lIns="0" tIns="0" rIns="0" bIns="0" rtlCol="0" anchor="ctr"/>
           <a:lstStyle/>
           <a:p>
-            <a:pPr algn="ctr" indent="0" marL="0">
+            <a:pPr marL="0" indent="0" algn="ctr">
               <a:buNone/>
             </a:pPr>
             <a:r>
@@ -2404,6 +2379,13 @@
             <a:prstDash val="solid"/>
           </a:ln>
         </p:spPr>
+        <p:txBody>
+          <a:bodyPr/>
+          <a:lstStyle/>
+          <a:p>
+            <a:endParaRPr lang="en-IN"/>
+          </a:p>
+        </p:txBody>
       </p:sp>
       <p:sp>
         <p:nvSpPr>
@@ -2426,7 +2408,7 @@
           <a:bodyPr wrap="square" lIns="0" tIns="0" rIns="0" bIns="0" rtlCol="0" anchor="ctr"/>
           <a:lstStyle/>
           <a:p>
-            <a:pPr algn="ctr" indent="0" marL="0">
+            <a:pPr marL="0" indent="0" algn="ctr">
               <a:buNone/>
             </a:pPr>
             <a:r>
@@ -2468,6 +2450,13 @@
             <a:prstDash val="solid"/>
           </a:ln>
         </p:spPr>
+        <p:txBody>
+          <a:bodyPr/>
+          <a:lstStyle/>
+          <a:p>
+            <a:endParaRPr lang="en-IN"/>
+          </a:p>
+        </p:txBody>
       </p:sp>
       <p:sp>
         <p:nvSpPr>
@@ -2490,7 +2479,7 @@
           <a:bodyPr wrap="square" lIns="0" tIns="0" rIns="0" bIns="0" rtlCol="0" anchor="ctr"/>
           <a:lstStyle/>
           <a:p>
-            <a:pPr algn="ctr" indent="0" marL="0">
+            <a:pPr marL="0" indent="0" algn="ctr">
               <a:buNone/>
             </a:pPr>
             <a:r>
@@ -2554,11 +2543,11 @@
           <a:bodyPr wrap="square" lIns="0" tIns="0" rIns="0" bIns="0" rtlCol="0" anchor="ctr"/>
           <a:lstStyle/>
           <a:p>
-            <a:pPr indent="0" marL="0">
-              <a:buNone/>
-            </a:pPr>
-            <a:r>
-              <a:rPr lang="en-US" sz="1100" b="1" spc="200" kern="0" dirty="0">
+            <a:pPr marL="0" indent="0">
+              <a:buNone/>
+            </a:pPr>
+            <a:r>
+              <a:rPr lang="en-US" sz="1100" b="1" kern="0" spc="200" dirty="0">
                 <a:solidFill>
                   <a:srgbClr val="028090"/>
                 </a:solidFill>
@@ -2593,7 +2582,7 @@
           <a:bodyPr wrap="square" lIns="0" tIns="0" rIns="0" bIns="0" rtlCol="0" anchor="ctr"/>
           <a:lstStyle/>
           <a:p>
-            <a:pPr indent="0" marL="0">
+            <a:pPr marL="0" indent="0">
               <a:buNone/>
             </a:pPr>
             <a:r>
@@ -2632,7 +2621,7 @@
           <a:bodyPr wrap="square" lIns="0" tIns="0" rIns="0" bIns="0" rtlCol="0" anchor="ctr"/>
           <a:lstStyle/>
           <a:p>
-            <a:pPr indent="0" marL="0">
+            <a:pPr marL="0" indent="0">
               <a:buNone/>
             </a:pPr>
             <a:r>
@@ -2671,7 +2660,7 @@
           <a:bodyPr wrap="square" lIns="0" tIns="0" rIns="0" bIns="0" rtlCol="0" anchor="ctr"/>
           <a:lstStyle/>
           <a:p>
-            <a:pPr algn="r" indent="0" marL="0">
+            <a:pPr marL="0" indent="0" algn="r">
               <a:buNone/>
             </a:pPr>
             <a:r>
@@ -2708,6 +2697,13 @@
           </a:solidFill>
           <a:ln/>
         </p:spPr>
+        <p:txBody>
+          <a:bodyPr/>
+          <a:lstStyle/>
+          <a:p>
+            <a:endParaRPr lang="en-IN"/>
+          </a:p>
+        </p:txBody>
       </p:sp>
       <p:sp>
         <p:nvSpPr>
@@ -2728,6 +2724,13 @@
           </a:solidFill>
           <a:ln/>
         </p:spPr>
+        <p:txBody>
+          <a:bodyPr/>
+          <a:lstStyle/>
+          <a:p>
+            <a:endParaRPr lang="en-IN"/>
+          </a:p>
+        </p:txBody>
       </p:sp>
       <p:sp>
         <p:nvSpPr>
@@ -2750,7 +2753,7 @@
           <a:bodyPr wrap="square" lIns="0" tIns="0" rIns="0" bIns="0" rtlCol="0" anchor="ctr"/>
           <a:lstStyle/>
           <a:p>
-            <a:pPr algn="ctr" indent="0" marL="0">
+            <a:pPr marL="0" indent="0" algn="ctr">
               <a:buNone/>
             </a:pPr>
             <a:r>
@@ -2794,6 +2797,13 @@
             <a:prstDash val="solid"/>
           </a:ln>
         </p:spPr>
+        <p:txBody>
+          <a:bodyPr/>
+          <a:lstStyle/>
+          <a:p>
+            <a:endParaRPr lang="en-IN"/>
+          </a:p>
+        </p:txBody>
       </p:sp>
       <p:sp>
         <p:nvSpPr>
@@ -2821,6 +2831,13 @@
             <a:prstDash val="solid"/>
           </a:ln>
         </p:spPr>
+        <p:txBody>
+          <a:bodyPr/>
+          <a:lstStyle/>
+          <a:p>
+            <a:endParaRPr lang="en-IN"/>
+          </a:p>
+        </p:txBody>
       </p:sp>
       <p:sp>
         <p:nvSpPr>
@@ -2848,6 +2865,13 @@
             <a:prstDash val="solid"/>
           </a:ln>
         </p:spPr>
+        <p:txBody>
+          <a:bodyPr/>
+          <a:lstStyle/>
+          <a:p>
+            <a:endParaRPr lang="en-IN"/>
+          </a:p>
+        </p:txBody>
       </p:sp>
       <p:sp>
         <p:nvSpPr>
@@ -2868,6 +2892,13 @@
           </a:solidFill>
           <a:ln/>
         </p:spPr>
+        <p:txBody>
+          <a:bodyPr/>
+          <a:lstStyle/>
+          <a:p>
+            <a:endParaRPr lang="en-IN"/>
+          </a:p>
+        </p:txBody>
       </p:sp>
       <p:sp>
         <p:nvSpPr>
@@ -2888,6 +2919,13 @@
           </a:solidFill>
           <a:ln/>
         </p:spPr>
+        <p:txBody>
+          <a:bodyPr/>
+          <a:lstStyle/>
+          <a:p>
+            <a:endParaRPr lang="en-IN"/>
+          </a:p>
+        </p:txBody>
       </p:sp>
       <p:sp>
         <p:nvSpPr>
@@ -2910,7 +2948,7 @@
           <a:bodyPr wrap="square" lIns="0" tIns="0" rIns="0" bIns="0" rtlCol="0" anchor="ctr"/>
           <a:lstStyle/>
           <a:p>
-            <a:pPr algn="ctr" indent="0" marL="0">
+            <a:pPr marL="0" indent="0" algn="ctr">
               <a:buNone/>
             </a:pPr>
             <a:r>
@@ -2947,6 +2985,13 @@
           </a:solidFill>
           <a:ln/>
         </p:spPr>
+        <p:txBody>
+          <a:bodyPr/>
+          <a:lstStyle/>
+          <a:p>
+            <a:endParaRPr lang="en-IN"/>
+          </a:p>
+        </p:txBody>
       </p:sp>
       <p:sp>
         <p:nvSpPr>
@@ -2967,6 +3012,13 @@
           </a:solidFill>
           <a:ln/>
         </p:spPr>
+        <p:txBody>
+          <a:bodyPr/>
+          <a:lstStyle/>
+          <a:p>
+            <a:endParaRPr lang="en-IN"/>
+          </a:p>
+        </p:txBody>
       </p:sp>
       <p:sp>
         <p:nvSpPr>
@@ -2989,7 +3041,7 @@
           <a:bodyPr wrap="square" lIns="0" tIns="0" rIns="0" bIns="0" rtlCol="0" anchor="ctr"/>
           <a:lstStyle/>
           <a:p>
-            <a:pPr algn="ctr" indent="0" marL="0">
+            <a:pPr marL="0" indent="0" algn="ctr">
               <a:buNone/>
             </a:pPr>
             <a:r>
@@ -3139,6 +3191,13 @@
             <a:prstDash val="solid"/>
           </a:ln>
         </p:spPr>
+        <p:txBody>
+          <a:bodyPr/>
+          <a:lstStyle/>
+          <a:p>
+            <a:endParaRPr lang="en-IN"/>
+          </a:p>
+        </p:txBody>
       </p:sp>
       <p:sp>
         <p:nvSpPr>
@@ -3161,7 +3220,7 @@
           <a:bodyPr wrap="square" lIns="0" tIns="0" rIns="0" bIns="0" rtlCol="0" anchor="ctr"/>
           <a:lstStyle/>
           <a:p>
-            <a:pPr indent="0" marL="0">
+            <a:pPr marL="0" indent="0">
               <a:buNone/>
             </a:pPr>
             <a:r>
@@ -3175,9 +3234,6 @@
               </a:rPr>
               <a:t>ASK   </a:t>
             </a:r>
-            <a:pPr indent="0" marL="0">
-              <a:buNone/>
-            </a:pPr>
             <a:r>
               <a:rPr lang="en-US" sz="1250" i="1" dirty="0">
                 <a:solidFill>
@@ -3239,11 +3295,11 @@
           <a:bodyPr wrap="square" lIns="0" tIns="0" rIns="0" bIns="0" rtlCol="0" anchor="ctr"/>
           <a:lstStyle/>
           <a:p>
-            <a:pPr indent="0" marL="0">
-              <a:buNone/>
-            </a:pPr>
-            <a:r>
-              <a:rPr lang="en-US" sz="1100" b="1" spc="200" kern="0" dirty="0">
+            <a:pPr marL="0" indent="0">
+              <a:buNone/>
+            </a:pPr>
+            <a:r>
+              <a:rPr lang="en-US" sz="1100" b="1" kern="0" spc="200" dirty="0">
                 <a:solidFill>
                   <a:srgbClr val="028090"/>
                 </a:solidFill>
@@ -3278,7 +3334,7 @@
           <a:bodyPr wrap="square" lIns="0" tIns="0" rIns="0" bIns="0" rtlCol="0" anchor="ctr"/>
           <a:lstStyle/>
           <a:p>
-            <a:pPr indent="0" marL="0">
+            <a:pPr marL="0" indent="0">
               <a:buNone/>
             </a:pPr>
             <a:r>
@@ -3317,7 +3373,7 @@
           <a:bodyPr wrap="square" lIns="0" tIns="0" rIns="0" bIns="0" rtlCol="0" anchor="ctr"/>
           <a:lstStyle/>
           <a:p>
-            <a:pPr indent="0" marL="0">
+            <a:pPr marL="0" indent="0">
               <a:buNone/>
             </a:pPr>
             <a:r>
@@ -3356,7 +3412,7 @@
           <a:bodyPr wrap="square" lIns="0" tIns="0" rIns="0" bIns="0" rtlCol="0" anchor="ctr"/>
           <a:lstStyle/>
           <a:p>
-            <a:pPr algn="r" indent="0" marL="0">
+            <a:pPr marL="0" indent="0" algn="r">
               <a:buNone/>
             </a:pPr>
             <a:r>
@@ -3376,323 +3432,14 @@
       </p:sp>
       <p:sp>
         <p:nvSpPr>
-          <p:cNvPr id="6" name="Shape 4"/>
-          <p:cNvSpPr/>
-          <p:nvPr/>
-        </p:nvSpPr>
-        <p:spPr>
-          <a:xfrm>
-            <a:off x="457200" y="1335024"/>
-            <a:ext cx="384048" cy="384048"/>
-          </a:xfrm>
-          <a:prstGeom prst="ellipse">
-            <a:avLst/>
-          </a:prstGeom>
-          <a:solidFill>
-            <a:srgbClr val="028090"/>
-          </a:solidFill>
-          <a:ln w="12700">
-            <a:solidFill>
-              <a:srgbClr val="1E2761"/>
-            </a:solidFill>
-            <a:prstDash val="solid"/>
-          </a:ln>
-        </p:spPr>
-      </p:sp>
-      <p:sp>
-        <p:nvSpPr>
-          <p:cNvPr id="7" name="Text 5"/>
-          <p:cNvSpPr/>
-          <p:nvPr/>
-        </p:nvSpPr>
-        <p:spPr>
-          <a:xfrm>
-            <a:off x="457200" y="1335024"/>
-            <a:ext cx="384048" cy="384048"/>
-          </a:xfrm>
-          <a:prstGeom prst="rect">
-            <a:avLst/>
-          </a:prstGeom>
-          <a:noFill/>
-          <a:ln/>
-        </p:spPr>
-        <p:txBody>
-          <a:bodyPr wrap="square" lIns="0" tIns="0" rIns="0" bIns="0" rtlCol="0" anchor="ctr"/>
-          <a:lstStyle/>
-          <a:p>
-            <a:pPr algn="ctr" indent="0" marL="0">
-              <a:buNone/>
-            </a:pPr>
-            <a:r>
-              <a:rPr lang="en-US" sz="1300" b="1" dirty="0">
-                <a:solidFill>
-                  <a:srgbClr val="FFFFFF"/>
-                </a:solidFill>
-                <a:latin typeface="Calibri" pitchFamily="34" charset="0"/>
-                <a:ea typeface="Calibri" pitchFamily="34" charset="-122"/>
-                <a:cs typeface="Calibri" pitchFamily="34" charset="-120"/>
-              </a:rPr>
-              <a:t>1</a:t>
-            </a:r>
-            <a:endParaRPr lang="en-US" sz="1300" dirty="0"/>
-          </a:p>
-        </p:txBody>
-      </p:sp>
-      <p:sp>
-        <p:nvSpPr>
-          <p:cNvPr id="8" name="Text 6"/>
-          <p:cNvSpPr/>
-          <p:nvPr/>
-        </p:nvSpPr>
-        <p:spPr>
-          <a:xfrm>
-            <a:off x="1005840" y="1280160"/>
-            <a:ext cx="7680960" cy="502920"/>
-          </a:xfrm>
-          <a:prstGeom prst="rect">
-            <a:avLst/>
-          </a:prstGeom>
-          <a:noFill/>
-          <a:ln/>
-        </p:spPr>
-        <p:txBody>
-          <a:bodyPr wrap="square" lIns="0" tIns="0" rIns="0" bIns="0" rtlCol="0" anchor="ctr"/>
-          <a:lstStyle/>
-          <a:p>
-            <a:pPr indent="0" marL="0">
-              <a:buNone/>
-            </a:pPr>
-            <a:r>
-              <a:rPr lang="en-US" sz="1350" dirty="0">
-                <a:solidFill>
-                  <a:srgbClr val="2B2B2B"/>
-                </a:solidFill>
-                <a:latin typeface="Calibri" pitchFamily="34" charset="0"/>
-                <a:ea typeface="Calibri" pitchFamily="34" charset="-122"/>
-                <a:cs typeface="Calibri" pitchFamily="34" charset="-120"/>
-              </a:rPr>
-              <a:t>Move the top n − 1 disks from A to B  (get them out of the way)</a:t>
-            </a:r>
-            <a:endParaRPr lang="en-US" sz="1350" dirty="0"/>
-          </a:p>
-        </p:txBody>
-      </p:sp>
-      <p:sp>
-        <p:nvSpPr>
-          <p:cNvPr id="9" name="Shape 7"/>
-          <p:cNvSpPr/>
-          <p:nvPr/>
-        </p:nvSpPr>
-        <p:spPr>
-          <a:xfrm>
-            <a:off x="457200" y="1901952"/>
-            <a:ext cx="384048" cy="384048"/>
-          </a:xfrm>
-          <a:prstGeom prst="ellipse">
-            <a:avLst/>
-          </a:prstGeom>
-          <a:solidFill>
-            <a:srgbClr val="D4A017"/>
-          </a:solidFill>
-          <a:ln w="12700">
-            <a:solidFill>
-              <a:srgbClr val="1E2761"/>
-            </a:solidFill>
-            <a:prstDash val="solid"/>
-          </a:ln>
-        </p:spPr>
-      </p:sp>
-      <p:sp>
-        <p:nvSpPr>
-          <p:cNvPr id="10" name="Text 8"/>
-          <p:cNvSpPr/>
-          <p:nvPr/>
-        </p:nvSpPr>
-        <p:spPr>
-          <a:xfrm>
-            <a:off x="457200" y="1901952"/>
-            <a:ext cx="384048" cy="384048"/>
-          </a:xfrm>
-          <a:prstGeom prst="rect">
-            <a:avLst/>
-          </a:prstGeom>
-          <a:noFill/>
-          <a:ln/>
-        </p:spPr>
-        <p:txBody>
-          <a:bodyPr wrap="square" lIns="0" tIns="0" rIns="0" bIns="0" rtlCol="0" anchor="ctr"/>
-          <a:lstStyle/>
-          <a:p>
-            <a:pPr algn="ctr" indent="0" marL="0">
-              <a:buNone/>
-            </a:pPr>
-            <a:r>
-              <a:rPr lang="en-US" sz="1300" b="1" dirty="0">
-                <a:solidFill>
-                  <a:srgbClr val="1E2761"/>
-                </a:solidFill>
-                <a:latin typeface="Calibri" pitchFamily="34" charset="0"/>
-                <a:ea typeface="Calibri" pitchFamily="34" charset="-122"/>
-                <a:cs typeface="Calibri" pitchFamily="34" charset="-120"/>
-              </a:rPr>
-              <a:t>2</a:t>
-            </a:r>
-            <a:endParaRPr lang="en-US" sz="1300" dirty="0"/>
-          </a:p>
-        </p:txBody>
-      </p:sp>
-      <p:sp>
-        <p:nvSpPr>
-          <p:cNvPr id="11" name="Text 9"/>
-          <p:cNvSpPr/>
-          <p:nvPr/>
-        </p:nvSpPr>
-        <p:spPr>
-          <a:xfrm>
-            <a:off x="1005840" y="1847088"/>
-            <a:ext cx="7680960" cy="502920"/>
-          </a:xfrm>
-          <a:prstGeom prst="rect">
-            <a:avLst/>
-          </a:prstGeom>
-          <a:noFill/>
-          <a:ln/>
-        </p:spPr>
-        <p:txBody>
-          <a:bodyPr wrap="square" lIns="0" tIns="0" rIns="0" bIns="0" rtlCol="0" anchor="ctr"/>
-          <a:lstStyle/>
-          <a:p>
-            <a:pPr indent="0" marL="0">
-              <a:buNone/>
-            </a:pPr>
-            <a:r>
-              <a:rPr lang="en-US" sz="1350" dirty="0">
-                <a:solidFill>
-                  <a:srgbClr val="2B2B2B"/>
-                </a:solidFill>
-                <a:latin typeface="Calibri" pitchFamily="34" charset="0"/>
-                <a:ea typeface="Calibri" pitchFamily="34" charset="-122"/>
-                <a:cs typeface="Calibri" pitchFamily="34" charset="-120"/>
-              </a:rPr>
-              <a:t>Move the largest disk from A to C  (one simple move)</a:t>
-            </a:r>
-            <a:endParaRPr lang="en-US" sz="1350" dirty="0"/>
-          </a:p>
-        </p:txBody>
-      </p:sp>
-      <p:sp>
-        <p:nvSpPr>
-          <p:cNvPr id="12" name="Shape 10"/>
-          <p:cNvSpPr/>
-          <p:nvPr/>
-        </p:nvSpPr>
-        <p:spPr>
-          <a:xfrm>
-            <a:off x="457200" y="2468880"/>
-            <a:ext cx="384048" cy="384048"/>
-          </a:xfrm>
-          <a:prstGeom prst="ellipse">
-            <a:avLst/>
-          </a:prstGeom>
-          <a:solidFill>
-            <a:srgbClr val="028090"/>
-          </a:solidFill>
-          <a:ln w="12700">
-            <a:solidFill>
-              <a:srgbClr val="1E2761"/>
-            </a:solidFill>
-            <a:prstDash val="solid"/>
-          </a:ln>
-        </p:spPr>
-      </p:sp>
-      <p:sp>
-        <p:nvSpPr>
-          <p:cNvPr id="13" name="Text 11"/>
-          <p:cNvSpPr/>
-          <p:nvPr/>
-        </p:nvSpPr>
-        <p:spPr>
-          <a:xfrm>
-            <a:off x="457200" y="2468880"/>
-            <a:ext cx="384048" cy="384048"/>
-          </a:xfrm>
-          <a:prstGeom prst="rect">
-            <a:avLst/>
-          </a:prstGeom>
-          <a:noFill/>
-          <a:ln/>
-        </p:spPr>
-        <p:txBody>
-          <a:bodyPr wrap="square" lIns="0" tIns="0" rIns="0" bIns="0" rtlCol="0" anchor="ctr"/>
-          <a:lstStyle/>
-          <a:p>
-            <a:pPr algn="ctr" indent="0" marL="0">
-              <a:buNone/>
-            </a:pPr>
-            <a:r>
-              <a:rPr lang="en-US" sz="1300" b="1" dirty="0">
-                <a:solidFill>
-                  <a:srgbClr val="FFFFFF"/>
-                </a:solidFill>
-                <a:latin typeface="Calibri" pitchFamily="34" charset="0"/>
-                <a:ea typeface="Calibri" pitchFamily="34" charset="-122"/>
-                <a:cs typeface="Calibri" pitchFamily="34" charset="-120"/>
-              </a:rPr>
-              <a:t>3</a:t>
-            </a:r>
-            <a:endParaRPr lang="en-US" sz="1300" dirty="0"/>
-          </a:p>
-        </p:txBody>
-      </p:sp>
-      <p:sp>
-        <p:nvSpPr>
-          <p:cNvPr id="14" name="Text 12"/>
-          <p:cNvSpPr/>
-          <p:nvPr/>
-        </p:nvSpPr>
-        <p:spPr>
-          <a:xfrm>
-            <a:off x="1005840" y="2414016"/>
-            <a:ext cx="7680960" cy="502920"/>
-          </a:xfrm>
-          <a:prstGeom prst="rect">
-            <a:avLst/>
-          </a:prstGeom>
-          <a:noFill/>
-          <a:ln/>
-        </p:spPr>
-        <p:txBody>
-          <a:bodyPr wrap="square" lIns="0" tIns="0" rIns="0" bIns="0" rtlCol="0" anchor="ctr"/>
-          <a:lstStyle/>
-          <a:p>
-            <a:pPr indent="0" marL="0">
-              <a:buNone/>
-            </a:pPr>
-            <a:r>
-              <a:rPr lang="en-US" sz="1350" dirty="0">
-                <a:solidFill>
-                  <a:srgbClr val="2B2B2B"/>
-                </a:solidFill>
-                <a:latin typeface="Calibri" pitchFamily="34" charset="0"/>
-                <a:ea typeface="Calibri" pitchFamily="34" charset="-122"/>
-                <a:cs typeface="Calibri" pitchFamily="34" charset="-120"/>
-              </a:rPr>
-              <a:t>Move the n − 1 disks from B to C  (onto the largest)</a:t>
-            </a:r>
-            <a:endParaRPr lang="en-US" sz="1350" dirty="0"/>
-          </a:p>
-        </p:txBody>
-      </p:sp>
-      <p:sp>
-        <p:nvSpPr>
           <p:cNvPr id="15" name="Shape 13"/>
           <p:cNvSpPr/>
           <p:nvPr/>
         </p:nvSpPr>
         <p:spPr>
           <a:xfrm>
-            <a:off x="457200" y="3063240"/>
-            <a:ext cx="6400800" cy="1691640"/>
+            <a:off x="457200" y="1031887"/>
+            <a:ext cx="6400800" cy="3749040"/>
           </a:xfrm>
           <a:prstGeom prst="roundRect">
             <a:avLst>
@@ -3709,6 +3456,13 @@
             <a:prstDash val="solid"/>
           </a:ln>
         </p:spPr>
+        <p:txBody>
+          <a:bodyPr/>
+          <a:lstStyle/>
+          <a:p>
+            <a:endParaRPr lang="en-IN"/>
+          </a:p>
+        </p:txBody>
       </p:sp>
       <p:sp>
         <p:nvSpPr>
@@ -3718,8 +3472,8 @@
         </p:nvSpPr>
         <p:spPr>
           <a:xfrm>
-            <a:off x="594360" y="3154680"/>
-            <a:ext cx="6126480" cy="1508760"/>
+            <a:off x="608215" y="1243584"/>
+            <a:ext cx="6126480" cy="3511296"/>
           </a:xfrm>
           <a:prstGeom prst="rect">
             <a:avLst/>
@@ -3731,233 +3485,199 @@
           <a:bodyPr wrap="square" lIns="0" tIns="0" rIns="0" bIns="0" rtlCol="0" anchor="t"/>
           <a:lstStyle/>
           <a:p>
-            <a:pPr indent="0" marL="0">
-              <a:lnSpc>
-                <a:spcPct val="100000"/>
-              </a:lnSpc>
-              <a:buNone/>
-            </a:pPr>
             <a:r>
               <a:rPr lang="en-US" sz="1050" dirty="0">
                 <a:solidFill>
-                  <a:srgbClr val="E8F1F2"/>
-                </a:solidFill>
-                <a:latin typeface="Courier New" pitchFamily="34" charset="0"/>
-                <a:ea typeface="Courier New" pitchFamily="34" charset="-122"/>
-                <a:cs typeface="Courier New" pitchFamily="34" charset="-120"/>
-              </a:rPr>
-              <a:t>void hanoi(int n, char from, char to, char via)</a:t>
-            </a:r>
-            <a:endParaRPr lang="en-US" sz="1050" dirty="0"/>
-          </a:p>
-          <a:p>
-            <a:pPr indent="0" marL="0">
-              <a:lnSpc>
-                <a:spcPct val="100000"/>
-              </a:lnSpc>
-              <a:buNone/>
-            </a:pPr>
+                  <a:schemeClr val="bg1"/>
+                </a:solidFill>
+              </a:rPr>
+              <a:t>ALGORITHM Hanoi(n, A, C, B)</a:t>
+            </a:r>
+          </a:p>
+          <a:p>
             <a:r>
               <a:rPr lang="en-US" sz="1050" dirty="0">
                 <a:solidFill>
-                  <a:srgbClr val="E8F1F2"/>
-                </a:solidFill>
-                <a:latin typeface="Courier New" pitchFamily="34" charset="0"/>
-                <a:ea typeface="Courier New" pitchFamily="34" charset="-122"/>
-                <a:cs typeface="Courier New" pitchFamily="34" charset="-120"/>
-              </a:rPr>
-              <a:t>{</a:t>
-            </a:r>
-            <a:endParaRPr lang="en-US" sz="1050" dirty="0"/>
-          </a:p>
-          <a:p>
-            <a:pPr indent="0" marL="0">
-              <a:lnSpc>
-                <a:spcPct val="100000"/>
-              </a:lnSpc>
-              <a:buNone/>
-            </a:pPr>
+                  <a:schemeClr val="bg1"/>
+                </a:solidFill>
+              </a:rPr>
+              <a:t>// Moves n disks from peg A to peg C, using peg B as helper.</a:t>
+            </a:r>
+          </a:p>
+          <a:p>
             <a:r>
               <a:rPr lang="en-US" sz="1050" dirty="0">
                 <a:solidFill>
-                  <a:srgbClr val="E8F1F2"/>
-                </a:solidFill>
-                <a:latin typeface="Courier New" pitchFamily="34" charset="0"/>
-                <a:ea typeface="Courier New" pitchFamily="34" charset="-122"/>
-                <a:cs typeface="Courier New" pitchFamily="34" charset="-120"/>
-              </a:rPr>
-              <a:t>    if (n == 1)</a:t>
-            </a:r>
-            <a:endParaRPr lang="en-US" sz="1050" dirty="0"/>
-          </a:p>
-          <a:p>
-            <a:pPr indent="0" marL="0">
-              <a:lnSpc>
-                <a:spcPct val="100000"/>
-              </a:lnSpc>
-              <a:buNone/>
-            </a:pPr>
+                  <a:schemeClr val="bg1"/>
+                </a:solidFill>
+              </a:rPr>
+              <a:t>// Parameter order: (disks, source, destination, auxiliary)</a:t>
+            </a:r>
+          </a:p>
+          <a:p>
+            <a:endParaRPr lang="en-US" sz="1050" dirty="0">
+              <a:solidFill>
+                <a:schemeClr val="bg1"/>
+              </a:solidFill>
+            </a:endParaRPr>
+          </a:p>
+          <a:p>
             <a:r>
               <a:rPr lang="en-US" sz="1050" dirty="0">
                 <a:solidFill>
-                  <a:srgbClr val="E8F1F2"/>
-                </a:solidFill>
-                <a:latin typeface="Courier New" pitchFamily="34" charset="0"/>
-                <a:ea typeface="Courier New" pitchFamily="34" charset="-122"/>
-                <a:cs typeface="Courier New" pitchFamily="34" charset="-120"/>
-              </a:rPr>
-              <a:t>    {</a:t>
-            </a:r>
-            <a:endParaRPr lang="en-US" sz="1050" dirty="0"/>
-          </a:p>
-          <a:p>
-            <a:pPr indent="0" marL="0">
-              <a:lnSpc>
-                <a:spcPct val="100000"/>
-              </a:lnSpc>
-              <a:buNone/>
-            </a:pPr>
+                  <a:schemeClr val="bg1"/>
+                </a:solidFill>
+              </a:rPr>
+              <a:t>1.  IF n = 1 THEN</a:t>
+            </a:r>
+          </a:p>
+          <a:p>
             <a:r>
               <a:rPr lang="en-US" sz="1050" dirty="0">
                 <a:solidFill>
-                  <a:srgbClr val="E8F1F2"/>
-                </a:solidFill>
-                <a:latin typeface="Courier New" pitchFamily="34" charset="0"/>
-                <a:ea typeface="Courier New" pitchFamily="34" charset="-122"/>
-                <a:cs typeface="Courier New" pitchFamily="34" charset="-120"/>
-              </a:rPr>
-              <a:t>        printf("Move disk 1: %c -&gt; %c\n", from, to);</a:t>
-            </a:r>
-            <a:endParaRPr lang="en-US" sz="1050" dirty="0"/>
-          </a:p>
-          <a:p>
-            <a:pPr indent="0" marL="0">
-              <a:lnSpc>
-                <a:spcPct val="100000"/>
-              </a:lnSpc>
-              <a:buNone/>
-            </a:pPr>
+                  <a:schemeClr val="bg1"/>
+                </a:solidFill>
+              </a:rPr>
+              <a:t>2.      PRINT "Move disk 1 from A to C"</a:t>
+            </a:r>
+          </a:p>
+          <a:p>
             <a:r>
               <a:rPr lang="en-US" sz="1050" dirty="0">
                 <a:solidFill>
-                  <a:srgbClr val="E8F1F2"/>
-                </a:solidFill>
-                <a:latin typeface="Courier New" pitchFamily="34" charset="0"/>
-                <a:ea typeface="Courier New" pitchFamily="34" charset="-122"/>
-                <a:cs typeface="Courier New" pitchFamily="34" charset="-120"/>
-              </a:rPr>
-              <a:t>        return;                     /* base case */</a:t>
-            </a:r>
-            <a:endParaRPr lang="en-US" sz="1050" dirty="0"/>
-          </a:p>
-          <a:p>
-            <a:pPr indent="0" marL="0">
-              <a:lnSpc>
-                <a:spcPct val="100000"/>
-              </a:lnSpc>
-              <a:buNone/>
-            </a:pPr>
+                  <a:schemeClr val="bg1"/>
+                </a:solidFill>
+              </a:rPr>
+              <a:t>3.      RETURN</a:t>
+            </a:r>
+          </a:p>
+          <a:p>
             <a:r>
               <a:rPr lang="en-US" sz="1050" dirty="0">
                 <a:solidFill>
-                  <a:srgbClr val="E8F1F2"/>
-                </a:solidFill>
-                <a:latin typeface="Courier New" pitchFamily="34" charset="0"/>
-                <a:ea typeface="Courier New" pitchFamily="34" charset="-122"/>
-                <a:cs typeface="Courier New" pitchFamily="34" charset="-120"/>
-              </a:rPr>
-              <a:t>    }</a:t>
-            </a:r>
-            <a:endParaRPr lang="en-US" sz="1050" dirty="0"/>
-          </a:p>
-          <a:p>
-            <a:pPr indent="0" marL="0">
-              <a:lnSpc>
-                <a:spcPct val="100000"/>
-              </a:lnSpc>
-              <a:buNone/>
-            </a:pPr>
-            <a:endParaRPr lang="en-US" sz="1050" dirty="0"/>
-          </a:p>
-          <a:p>
-            <a:pPr indent="0" marL="0">
-              <a:lnSpc>
-                <a:spcPct val="100000"/>
-              </a:lnSpc>
-              <a:buNone/>
-            </a:pPr>
+                  <a:schemeClr val="bg1"/>
+                </a:solidFill>
+              </a:rPr>
+              <a:t>4.  END IF</a:t>
+            </a:r>
+          </a:p>
+          <a:p>
+            <a:endParaRPr lang="en-US" sz="1050" dirty="0">
+              <a:solidFill>
+                <a:schemeClr val="bg1"/>
+              </a:solidFill>
+            </a:endParaRPr>
+          </a:p>
+          <a:p>
             <a:r>
               <a:rPr lang="en-US" sz="1050" dirty="0">
                 <a:solidFill>
-                  <a:srgbClr val="E8F1F2"/>
-                </a:solidFill>
-                <a:latin typeface="Courier New" pitchFamily="34" charset="0"/>
-                <a:ea typeface="Courier New" pitchFamily="34" charset="-122"/>
-                <a:cs typeface="Courier New" pitchFamily="34" charset="-120"/>
-              </a:rPr>
-              <a:t>    hanoi(n - 1, from, via, to);    /* step 1 */</a:t>
-            </a:r>
-            <a:endParaRPr lang="en-US" sz="1050" dirty="0"/>
-          </a:p>
-          <a:p>
-            <a:pPr indent="0" marL="0">
-              <a:lnSpc>
-                <a:spcPct val="100000"/>
-              </a:lnSpc>
-              <a:buNone/>
-            </a:pPr>
+                  <a:schemeClr val="bg1"/>
+                </a:solidFill>
+              </a:rPr>
+              <a:t>5.  Hanoi(n - 1, A, B, C)</a:t>
+            </a:r>
+          </a:p>
+          <a:p>
             <a:r>
               <a:rPr lang="en-US" sz="1050" dirty="0">
                 <a:solidFill>
-                  <a:srgbClr val="E8F1F2"/>
-                </a:solidFill>
-                <a:latin typeface="Courier New" pitchFamily="34" charset="0"/>
-                <a:ea typeface="Courier New" pitchFamily="34" charset="-122"/>
-                <a:cs typeface="Courier New" pitchFamily="34" charset="-120"/>
-              </a:rPr>
-              <a:t>    printf("Move disk %d: %c -&gt; %c\n", n, from, to);</a:t>
-            </a:r>
-            <a:endParaRPr lang="en-US" sz="1050" dirty="0"/>
-          </a:p>
-          <a:p>
-            <a:pPr indent="0" marL="0">
-              <a:lnSpc>
-                <a:spcPct val="100000"/>
-              </a:lnSpc>
-              <a:buNone/>
-            </a:pPr>
+                  <a:schemeClr val="bg1"/>
+                </a:solidFill>
+              </a:rPr>
+              <a:t>        // Step 1: move top n-1 disks from A</a:t>
+            </a:r>
+          </a:p>
+          <a:p>
             <a:r>
               <a:rPr lang="en-US" sz="1050" dirty="0">
                 <a:solidFill>
-                  <a:srgbClr val="E8F1F2"/>
-                </a:solidFill>
-                <a:latin typeface="Courier New" pitchFamily="34" charset="0"/>
-                <a:ea typeface="Courier New" pitchFamily="34" charset="-122"/>
-                <a:cs typeface="Courier New" pitchFamily="34" charset="-120"/>
-              </a:rPr>
-              <a:t>    hanoi(n - 1, via, to, from);    /* step 3 */</a:t>
-            </a:r>
-            <a:endParaRPr lang="en-US" sz="1050" dirty="0"/>
-          </a:p>
-          <a:p>
-            <a:pPr indent="0" marL="0">
-              <a:lnSpc>
-                <a:spcPct val="100000"/>
-              </a:lnSpc>
-              <a:buNone/>
-            </a:pPr>
+                  <a:schemeClr val="bg1"/>
+                </a:solidFill>
+              </a:rPr>
+              <a:t>        //         onto the middle peg B (C is the helper now)</a:t>
+            </a:r>
+          </a:p>
+          <a:p>
+            <a:endParaRPr lang="en-US" sz="1050" dirty="0">
+              <a:solidFill>
+                <a:schemeClr val="bg1"/>
+              </a:solidFill>
+            </a:endParaRPr>
+          </a:p>
+          <a:p>
             <a:r>
               <a:rPr lang="en-US" sz="1050" dirty="0">
                 <a:solidFill>
-                  <a:srgbClr val="E8F1F2"/>
-                </a:solidFill>
-                <a:latin typeface="Courier New" pitchFamily="34" charset="0"/>
-                <a:ea typeface="Courier New" pitchFamily="34" charset="-122"/>
-                <a:cs typeface="Courier New" pitchFamily="34" charset="-120"/>
-              </a:rPr>
-              <a:t>}</a:t>
-            </a:r>
-            <a:endParaRPr lang="en-US" sz="1050" dirty="0"/>
+                  <a:schemeClr val="bg1"/>
+                </a:solidFill>
+              </a:rPr>
+              <a:t>6.  PRINT "Move disk n from A to C"</a:t>
+            </a:r>
+          </a:p>
+          <a:p>
+            <a:r>
+              <a:rPr lang="en-US" sz="1050" dirty="0">
+                <a:solidFill>
+                  <a:schemeClr val="bg1"/>
+                </a:solidFill>
+              </a:rPr>
+              <a:t>        // Step 2: the largest disk goes straight home</a:t>
+            </a:r>
+          </a:p>
+          <a:p>
+            <a:endParaRPr lang="en-US" sz="1050" dirty="0">
+              <a:solidFill>
+                <a:schemeClr val="bg1"/>
+              </a:solidFill>
+            </a:endParaRPr>
+          </a:p>
+          <a:p>
+            <a:r>
+              <a:rPr lang="en-US" sz="1050" dirty="0">
+                <a:solidFill>
+                  <a:schemeClr val="bg1"/>
+                </a:solidFill>
+              </a:rPr>
+              <a:t>7.  Hanoi(n - 1, B, C, A)</a:t>
+            </a:r>
+          </a:p>
+          <a:p>
+            <a:r>
+              <a:rPr lang="en-US" sz="1050" dirty="0">
+                <a:solidFill>
+                  <a:schemeClr val="bg1"/>
+                </a:solidFill>
+              </a:rPr>
+              <a:t>        // Step 3: move the n-1 disks from B</a:t>
+            </a:r>
+          </a:p>
+          <a:p>
+            <a:r>
+              <a:rPr lang="en-US" sz="1050" dirty="0">
+                <a:solidFill>
+                  <a:schemeClr val="bg1"/>
+                </a:solidFill>
+              </a:rPr>
+              <a:t>        //         onto C (A is the helper now)</a:t>
+            </a:r>
+          </a:p>
+          <a:p>
+            <a:endParaRPr lang="en-US" sz="1050" dirty="0">
+              <a:solidFill>
+                <a:schemeClr val="bg1"/>
+              </a:solidFill>
+            </a:endParaRPr>
+          </a:p>
+          <a:p>
+            <a:r>
+              <a:rPr lang="en-US" sz="1050" dirty="0">
+                <a:solidFill>
+                  <a:schemeClr val="bg1"/>
+                </a:solidFill>
+              </a:rPr>
+              <a:t>END ALGORITHM</a:t>
+            </a:r>
           </a:p>
         </p:txBody>
       </p:sp>
@@ -3987,6 +3707,13 @@
             <a:prstDash val="solid"/>
           </a:ln>
         </p:spPr>
+        <p:txBody>
+          <a:bodyPr/>
+          <a:lstStyle/>
+          <a:p>
+            <a:endParaRPr lang="en-IN"/>
+          </a:p>
+        </p:txBody>
       </p:sp>
       <p:sp>
         <p:nvSpPr>
@@ -4009,7 +3736,7 @@
           <a:bodyPr wrap="square" lIns="0" tIns="0" rIns="0" bIns="0" rtlCol="0" anchor="ctr"/>
           <a:lstStyle/>
           <a:p>
-            <a:pPr indent="0" marL="0">
+            <a:pPr marL="0" indent="0">
               <a:buNone/>
             </a:pPr>
             <a:r>
@@ -4073,11 +3800,11 @@
           <a:bodyPr wrap="square" lIns="0" tIns="0" rIns="0" bIns="0" rtlCol="0" anchor="ctr"/>
           <a:lstStyle/>
           <a:p>
-            <a:pPr indent="0" marL="0">
-              <a:buNone/>
-            </a:pPr>
-            <a:r>
-              <a:rPr lang="en-US" sz="1100" b="1" spc="200" kern="0" dirty="0">
+            <a:pPr marL="0" indent="0">
+              <a:buNone/>
+            </a:pPr>
+            <a:r>
+              <a:rPr lang="en-US" sz="1100" b="1" kern="0" spc="200" dirty="0">
                 <a:solidFill>
                   <a:srgbClr val="028090"/>
                 </a:solidFill>
@@ -4112,7 +3839,7 @@
           <a:bodyPr wrap="square" lIns="0" tIns="0" rIns="0" bIns="0" rtlCol="0" anchor="ctr"/>
           <a:lstStyle/>
           <a:p>
-            <a:pPr indent="0" marL="0">
+            <a:pPr marL="0" indent="0">
               <a:buNone/>
             </a:pPr>
             <a:r>
@@ -4151,7 +3878,7 @@
           <a:bodyPr wrap="square" lIns="0" tIns="0" rIns="0" bIns="0" rtlCol="0" anchor="ctr"/>
           <a:lstStyle/>
           <a:p>
-            <a:pPr indent="0" marL="0">
+            <a:pPr marL="0" indent="0">
               <a:buNone/>
             </a:pPr>
             <a:r>
@@ -4190,7 +3917,7 @@
           <a:bodyPr wrap="square" lIns="0" tIns="0" rIns="0" bIns="0" rtlCol="0" anchor="ctr"/>
           <a:lstStyle/>
           <a:p>
-            <a:pPr algn="r" indent="0" marL="0">
+            <a:pPr marL="0" indent="0" algn="r">
               <a:buNone/>
             </a:pPr>
             <a:r>
@@ -4231,9 +3958,27 @@
             <a:tbl>
               <a:tblPr/>
               <a:tblGrid>
-                <a:gridCol w="640080"/>
-                <a:gridCol w="3291840"/>
-                <a:gridCol w="4297680"/>
+                <a:gridCol w="640080">
+                  <a:extLst>
+                    <a:ext uri="{9D8B030D-6E8A-4147-A177-3AD203B41FA5}">
+                      <a16:colId xmlns:a16="http://schemas.microsoft.com/office/drawing/2014/main" val="20000"/>
+                    </a:ext>
+                  </a:extLst>
+                </a:gridCol>
+                <a:gridCol w="3291840">
+                  <a:extLst>
+                    <a:ext uri="{9D8B030D-6E8A-4147-A177-3AD203B41FA5}">
+                      <a16:colId xmlns:a16="http://schemas.microsoft.com/office/drawing/2014/main" val="20001"/>
+                    </a:ext>
+                  </a:extLst>
+                </a:gridCol>
+                <a:gridCol w="4297680">
+                  <a:extLst>
+                    <a:ext uri="{9D8B030D-6E8A-4147-A177-3AD203B41FA5}">
+                      <a16:colId xmlns:a16="http://schemas.microsoft.com/office/drawing/2014/main" val="20002"/>
+                    </a:ext>
+                  </a:extLst>
+                </a:gridCol>
               </a:tblGrid>
               <a:tr h="384048">
                 <a:tc>
@@ -4241,7 +3986,7 @@
                     <a:bodyPr/>
                     <a:lstStyle/>
                     <a:p>
-                      <a:pPr algn="ctr" indent="0" marL="0">
+                      <a:pPr marL="0" indent="0" algn="ctr">
                         <a:buNone/>
                       </a:pPr>
                       <a:r>
@@ -4262,7 +4007,7 @@
                       </a:endParaRPr>
                     </a:p>
                   </a:txBody>
-                  <a:tcPr marL="91440" marR="91440" marT="45720" marB="45720" anchor="ctr">
+                  <a:tcPr anchor="ctr">
                     <a:lnL w="9525" cap="flat" cmpd="sng" algn="ctr">
                       <a:solidFill>
                         <a:srgbClr val="D9D9D9"/>
@@ -4309,7 +4054,7 @@
                     <a:bodyPr/>
                     <a:lstStyle/>
                     <a:p>
-                      <a:pPr indent="0" marL="0">
+                      <a:pPr marL="0" indent="0">
                         <a:buNone/>
                       </a:pPr>
                       <a:r>
@@ -4330,7 +4075,7 @@
                       </a:endParaRPr>
                     </a:p>
                   </a:txBody>
-                  <a:tcPr marL="91440" marR="91440" marT="45720" marB="45720" anchor="ctr">
+                  <a:tcPr anchor="ctr">
                     <a:lnL w="9525" cap="flat" cmpd="sng" algn="ctr">
                       <a:solidFill>
                         <a:srgbClr val="D9D9D9"/>
@@ -4377,7 +4122,7 @@
                     <a:bodyPr/>
                     <a:lstStyle/>
                     <a:p>
-                      <a:pPr indent="0" marL="0">
+                      <a:pPr marL="0" indent="0">
                         <a:buNone/>
                       </a:pPr>
                       <a:r>
@@ -4398,7 +4143,7 @@
                       </a:endParaRPr>
                     </a:p>
                   </a:txBody>
-                  <a:tcPr marL="91440" marR="91440" marT="45720" marB="45720" anchor="ctr">
+                  <a:tcPr anchor="ctr">
                     <a:lnL w="9525" cap="flat" cmpd="sng" algn="ctr">
                       <a:solidFill>
                         <a:srgbClr val="D9D9D9"/>
@@ -4440,6 +4185,11 @@
                     </a:solidFill>
                   </a:tcPr>
                 </a:tc>
+                <a:extLst>
+                  <a:ext uri="{0D108BD9-81ED-4DB2-BD59-A6C34878D82A}">
+                    <a16:rowId xmlns:a16="http://schemas.microsoft.com/office/drawing/2014/main" val="10000"/>
+                  </a:ext>
+                </a:extLst>
               </a:tr>
               <a:tr h="384048">
                 <a:tc>
@@ -4447,7 +4197,7 @@
                     <a:bodyPr/>
                     <a:lstStyle/>
                     <a:p>
-                      <a:pPr algn="ctr" indent="0" marL="0">
+                      <a:pPr marL="0" indent="0" algn="ctr">
                         <a:buNone/>
                       </a:pPr>
                       <a:r>
@@ -4468,7 +4218,7 @@
                       </a:endParaRPr>
                     </a:p>
                   </a:txBody>
-                  <a:tcPr marL="91440" marR="91440" marT="45720" marB="45720" anchor="ctr">
+                  <a:tcPr anchor="ctr">
                     <a:lnL w="9525" cap="flat" cmpd="sng" algn="ctr">
                       <a:solidFill>
                         <a:srgbClr val="D9D9D9"/>
@@ -4512,7 +4262,7 @@
                     <a:bodyPr/>
                     <a:lstStyle/>
                     <a:p>
-                      <a:pPr indent="0" marL="0">
+                      <a:pPr marL="0" indent="0">
                         <a:buNone/>
                       </a:pPr>
                       <a:r>
@@ -4533,7 +4283,7 @@
                       </a:endParaRPr>
                     </a:p>
                   </a:txBody>
-                  <a:tcPr marL="91440" marR="91440" marT="45720" marB="45720" anchor="ctr">
+                  <a:tcPr anchor="ctr">
                     <a:lnL w="9525" cap="flat" cmpd="sng" algn="ctr">
                       <a:solidFill>
                         <a:srgbClr val="D9D9D9"/>
@@ -4577,7 +4327,7 @@
                     <a:bodyPr/>
                     <a:lstStyle/>
                     <a:p>
-                      <a:pPr indent="0" marL="0">
+                      <a:pPr marL="0" indent="0">
                         <a:buNone/>
                       </a:pPr>
                       <a:r>
@@ -4598,7 +4348,7 @@
                       </a:endParaRPr>
                     </a:p>
                   </a:txBody>
-                  <a:tcPr marL="91440" marR="91440" marT="45720" marB="45720" anchor="ctr">
+                  <a:tcPr anchor="ctr">
                     <a:lnL w="9525" cap="flat" cmpd="sng" algn="ctr">
                       <a:solidFill>
                         <a:srgbClr val="D9D9D9"/>
@@ -4637,6 +4387,11 @@
                     </a:lnB>
                   </a:tcPr>
                 </a:tc>
+                <a:extLst>
+                  <a:ext uri="{0D108BD9-81ED-4DB2-BD59-A6C34878D82A}">
+                    <a16:rowId xmlns:a16="http://schemas.microsoft.com/office/drawing/2014/main" val="10001"/>
+                  </a:ext>
+                </a:extLst>
               </a:tr>
               <a:tr h="384048">
                 <a:tc>
@@ -4644,7 +4399,7 @@
                     <a:bodyPr/>
                     <a:lstStyle/>
                     <a:p>
-                      <a:pPr algn="ctr" indent="0" marL="0">
+                      <a:pPr marL="0" indent="0" algn="ctr">
                         <a:buNone/>
                       </a:pPr>
                       <a:r>
@@ -4665,7 +4420,7 @@
                       </a:endParaRPr>
                     </a:p>
                   </a:txBody>
-                  <a:tcPr marL="91440" marR="91440" marT="45720" marB="45720" anchor="ctr">
+                  <a:tcPr anchor="ctr">
                     <a:lnL w="9525" cap="flat" cmpd="sng" algn="ctr">
                       <a:solidFill>
                         <a:srgbClr val="D9D9D9"/>
@@ -4709,7 +4464,7 @@
                     <a:bodyPr/>
                     <a:lstStyle/>
                     <a:p>
-                      <a:pPr indent="0" marL="0">
+                      <a:pPr marL="0" indent="0">
                         <a:buNone/>
                       </a:pPr>
                       <a:r>
@@ -4730,7 +4485,7 @@
                       </a:endParaRPr>
                     </a:p>
                   </a:txBody>
-                  <a:tcPr marL="91440" marR="91440" marT="45720" marB="45720" anchor="ctr">
+                  <a:tcPr anchor="ctr">
                     <a:lnL w="9525" cap="flat" cmpd="sng" algn="ctr">
                       <a:solidFill>
                         <a:srgbClr val="D9D9D9"/>
@@ -4774,7 +4529,7 @@
                     <a:bodyPr/>
                     <a:lstStyle/>
                     <a:p>
-                      <a:pPr indent="0" marL="0">
+                      <a:pPr marL="0" indent="0">
                         <a:buNone/>
                       </a:pPr>
                       <a:r>
@@ -4795,7 +4550,7 @@
                       </a:endParaRPr>
                     </a:p>
                   </a:txBody>
-                  <a:tcPr marL="91440" marR="91440" marT="45720" marB="45720" anchor="ctr">
+                  <a:tcPr anchor="ctr">
                     <a:lnL w="9525" cap="flat" cmpd="sng" algn="ctr">
                       <a:solidFill>
                         <a:srgbClr val="D9D9D9"/>
@@ -4834,6 +4589,11 @@
                     </a:lnB>
                   </a:tcPr>
                 </a:tc>
+                <a:extLst>
+                  <a:ext uri="{0D108BD9-81ED-4DB2-BD59-A6C34878D82A}">
+                    <a16:rowId xmlns:a16="http://schemas.microsoft.com/office/drawing/2014/main" val="10002"/>
+                  </a:ext>
+                </a:extLst>
               </a:tr>
               <a:tr h="384048">
                 <a:tc>
@@ -4841,7 +4601,7 @@
                     <a:bodyPr/>
                     <a:lstStyle/>
                     <a:p>
-                      <a:pPr algn="ctr" indent="0" marL="0">
+                      <a:pPr marL="0" indent="0" algn="ctr">
                         <a:buNone/>
                       </a:pPr>
                       <a:r>
@@ -4862,7 +4622,7 @@
                       </a:endParaRPr>
                     </a:p>
                   </a:txBody>
-                  <a:tcPr marL="91440" marR="91440" marT="45720" marB="45720" anchor="ctr">
+                  <a:tcPr anchor="ctr">
                     <a:lnL w="9525" cap="flat" cmpd="sng" algn="ctr">
                       <a:solidFill>
                         <a:srgbClr val="D9D9D9"/>
@@ -4906,7 +4666,7 @@
                     <a:bodyPr/>
                     <a:lstStyle/>
                     <a:p>
-                      <a:pPr indent="0" marL="0">
+                      <a:pPr marL="0" indent="0">
                         <a:buNone/>
                       </a:pPr>
                       <a:r>
@@ -4927,7 +4687,7 @@
                       </a:endParaRPr>
                     </a:p>
                   </a:txBody>
-                  <a:tcPr marL="91440" marR="91440" marT="45720" marB="45720" anchor="ctr">
+                  <a:tcPr anchor="ctr">
                     <a:lnL w="9525" cap="flat" cmpd="sng" algn="ctr">
                       <a:solidFill>
                         <a:srgbClr val="D9D9D9"/>
@@ -4971,7 +4731,7 @@
                     <a:bodyPr/>
                     <a:lstStyle/>
                     <a:p>
-                      <a:pPr indent="0" marL="0">
+                      <a:pPr marL="0" indent="0">
                         <a:buNone/>
                       </a:pPr>
                       <a:r>
@@ -4992,7 +4752,7 @@
                       </a:endParaRPr>
                     </a:p>
                   </a:txBody>
-                  <a:tcPr marL="91440" marR="91440" marT="45720" marB="45720" anchor="ctr">
+                  <a:tcPr anchor="ctr">
                     <a:lnL w="9525" cap="flat" cmpd="sng" algn="ctr">
                       <a:solidFill>
                         <a:srgbClr val="D9D9D9"/>
@@ -5031,6 +4791,11 @@
                     </a:lnB>
                   </a:tcPr>
                 </a:tc>
+                <a:extLst>
+                  <a:ext uri="{0D108BD9-81ED-4DB2-BD59-A6C34878D82A}">
+                    <a16:rowId xmlns:a16="http://schemas.microsoft.com/office/drawing/2014/main" val="10003"/>
+                  </a:ext>
+                </a:extLst>
               </a:tr>
               <a:tr h="384048">
                 <a:tc>
@@ -5038,7 +4803,7 @@
                     <a:bodyPr/>
                     <a:lstStyle/>
                     <a:p>
-                      <a:pPr algn="ctr" indent="0" marL="0">
+                      <a:pPr marL="0" indent="0" algn="ctr">
                         <a:buNone/>
                       </a:pPr>
                       <a:r>
@@ -5059,7 +4824,7 @@
                       </a:endParaRPr>
                     </a:p>
                   </a:txBody>
-                  <a:tcPr marL="91440" marR="91440" marT="45720" marB="45720" anchor="ctr">
+                  <a:tcPr anchor="ctr">
                     <a:lnL w="9525" cap="flat" cmpd="sng" algn="ctr">
                       <a:solidFill>
                         <a:srgbClr val="D9D9D9"/>
@@ -5103,7 +4868,7 @@
                     <a:bodyPr/>
                     <a:lstStyle/>
                     <a:p>
-                      <a:pPr indent="0" marL="0">
+                      <a:pPr marL="0" indent="0">
                         <a:buNone/>
                       </a:pPr>
                       <a:r>
@@ -5124,7 +4889,7 @@
                       </a:endParaRPr>
                     </a:p>
                   </a:txBody>
-                  <a:tcPr marL="91440" marR="91440" marT="45720" marB="45720" anchor="ctr">
+                  <a:tcPr anchor="ctr">
                     <a:lnL w="9525" cap="flat" cmpd="sng" algn="ctr">
                       <a:solidFill>
                         <a:srgbClr val="D9D9D9"/>
@@ -5168,7 +4933,7 @@
                     <a:bodyPr/>
                     <a:lstStyle/>
                     <a:p>
-                      <a:pPr indent="0" marL="0">
+                      <a:pPr marL="0" indent="0">
                         <a:buNone/>
                       </a:pPr>
                       <a:r>
@@ -5189,7 +4954,7 @@
                       </a:endParaRPr>
                     </a:p>
                   </a:txBody>
-                  <a:tcPr marL="91440" marR="91440" marT="45720" marB="45720" anchor="ctr">
+                  <a:tcPr anchor="ctr">
                     <a:lnL w="9525" cap="flat" cmpd="sng" algn="ctr">
                       <a:solidFill>
                         <a:srgbClr val="D9D9D9"/>
@@ -5228,6 +4993,11 @@
                     </a:lnB>
                   </a:tcPr>
                 </a:tc>
+                <a:extLst>
+                  <a:ext uri="{0D108BD9-81ED-4DB2-BD59-A6C34878D82A}">
+                    <a16:rowId xmlns:a16="http://schemas.microsoft.com/office/drawing/2014/main" val="10004"/>
+                  </a:ext>
+                </a:extLst>
               </a:tr>
               <a:tr h="384048">
                 <a:tc>
@@ -5235,7 +5005,7 @@
                     <a:bodyPr/>
                     <a:lstStyle/>
                     <a:p>
-                      <a:pPr algn="ctr" indent="0" marL="0">
+                      <a:pPr marL="0" indent="0" algn="ctr">
                         <a:buNone/>
                       </a:pPr>
                       <a:r>
@@ -5256,7 +5026,7 @@
                       </a:endParaRPr>
                     </a:p>
                   </a:txBody>
-                  <a:tcPr marL="91440" marR="91440" marT="45720" marB="45720" anchor="ctr">
+                  <a:tcPr anchor="ctr">
                     <a:lnL w="9525" cap="flat" cmpd="sng" algn="ctr">
                       <a:solidFill>
                         <a:srgbClr val="D9D9D9"/>
@@ -5300,7 +5070,7 @@
                     <a:bodyPr/>
                     <a:lstStyle/>
                     <a:p>
-                      <a:pPr indent="0" marL="0">
+                      <a:pPr marL="0" indent="0">
                         <a:buNone/>
                       </a:pPr>
                       <a:r>
@@ -5321,7 +5091,7 @@
                       </a:endParaRPr>
                     </a:p>
                   </a:txBody>
-                  <a:tcPr marL="91440" marR="91440" marT="45720" marB="45720" anchor="ctr">
+                  <a:tcPr anchor="ctr">
                     <a:lnL w="9525" cap="flat" cmpd="sng" algn="ctr">
                       <a:solidFill>
                         <a:srgbClr val="D9D9D9"/>
@@ -5365,7 +5135,7 @@
                     <a:bodyPr/>
                     <a:lstStyle/>
                     <a:p>
-                      <a:pPr indent="0" marL="0">
+                      <a:pPr marL="0" indent="0">
                         <a:buNone/>
                       </a:pPr>
                       <a:r>
@@ -5386,7 +5156,7 @@
                       </a:endParaRPr>
                     </a:p>
                   </a:txBody>
-                  <a:tcPr marL="91440" marR="91440" marT="45720" marB="45720" anchor="ctr">
+                  <a:tcPr anchor="ctr">
                     <a:lnL w="9525" cap="flat" cmpd="sng" algn="ctr">
                       <a:solidFill>
                         <a:srgbClr val="D9D9D9"/>
@@ -5425,6 +5195,11 @@
                     </a:lnB>
                   </a:tcPr>
                 </a:tc>
+                <a:extLst>
+                  <a:ext uri="{0D108BD9-81ED-4DB2-BD59-A6C34878D82A}">
+                    <a16:rowId xmlns:a16="http://schemas.microsoft.com/office/drawing/2014/main" val="10005"/>
+                  </a:ext>
+                </a:extLst>
               </a:tr>
               <a:tr h="384048">
                 <a:tc>
@@ -5432,7 +5207,7 @@
                     <a:bodyPr/>
                     <a:lstStyle/>
                     <a:p>
-                      <a:pPr algn="ctr" indent="0" marL="0">
+                      <a:pPr marL="0" indent="0" algn="ctr">
                         <a:buNone/>
                       </a:pPr>
                       <a:r>
@@ -5453,7 +5228,7 @@
                       </a:endParaRPr>
                     </a:p>
                   </a:txBody>
-                  <a:tcPr marL="91440" marR="91440" marT="45720" marB="45720" anchor="ctr">
+                  <a:tcPr anchor="ctr">
                     <a:lnL w="9525" cap="flat" cmpd="sng" algn="ctr">
                       <a:solidFill>
                         <a:srgbClr val="D9D9D9"/>
@@ -5497,7 +5272,7 @@
                     <a:bodyPr/>
                     <a:lstStyle/>
                     <a:p>
-                      <a:pPr indent="0" marL="0">
+                      <a:pPr marL="0" indent="0">
                         <a:buNone/>
                       </a:pPr>
                       <a:r>
@@ -5518,7 +5293,7 @@
                       </a:endParaRPr>
                     </a:p>
                   </a:txBody>
-                  <a:tcPr marL="91440" marR="91440" marT="45720" marB="45720" anchor="ctr">
+                  <a:tcPr anchor="ctr">
                     <a:lnL w="9525" cap="flat" cmpd="sng" algn="ctr">
                       <a:solidFill>
                         <a:srgbClr val="D9D9D9"/>
@@ -5562,7 +5337,7 @@
                     <a:bodyPr/>
                     <a:lstStyle/>
                     <a:p>
-                      <a:pPr indent="0" marL="0">
+                      <a:pPr marL="0" indent="0">
                         <a:buNone/>
                       </a:pPr>
                       <a:r>
@@ -5583,7 +5358,7 @@
                       </a:endParaRPr>
                     </a:p>
                   </a:txBody>
-                  <a:tcPr marL="91440" marR="91440" marT="45720" marB="45720" anchor="ctr">
+                  <a:tcPr anchor="ctr">
                     <a:lnL w="9525" cap="flat" cmpd="sng" algn="ctr">
                       <a:solidFill>
                         <a:srgbClr val="D9D9D9"/>
@@ -5622,6 +5397,11 @@
                     </a:lnB>
                   </a:tcPr>
                 </a:tc>
+                <a:extLst>
+                  <a:ext uri="{0D108BD9-81ED-4DB2-BD59-A6C34878D82A}">
+                    <a16:rowId xmlns:a16="http://schemas.microsoft.com/office/drawing/2014/main" val="10006"/>
+                  </a:ext>
+                </a:extLst>
               </a:tr>
               <a:tr h="384048">
                 <a:tc>
@@ -5629,7 +5409,7 @@
                     <a:bodyPr/>
                     <a:lstStyle/>
                     <a:p>
-                      <a:pPr algn="ctr" indent="0" marL="0">
+                      <a:pPr marL="0" indent="0" algn="ctr">
                         <a:buNone/>
                       </a:pPr>
                       <a:r>
@@ -5650,7 +5430,7 @@
                       </a:endParaRPr>
                     </a:p>
                   </a:txBody>
-                  <a:tcPr marL="91440" marR="91440" marT="45720" marB="45720" anchor="ctr">
+                  <a:tcPr anchor="ctr">
                     <a:lnL w="9525" cap="flat" cmpd="sng" algn="ctr">
                       <a:solidFill>
                         <a:srgbClr val="D9D9D9"/>
@@ -5694,7 +5474,7 @@
                     <a:bodyPr/>
                     <a:lstStyle/>
                     <a:p>
-                      <a:pPr indent="0" marL="0">
+                      <a:pPr marL="0" indent="0">
                         <a:buNone/>
                       </a:pPr>
                       <a:r>
@@ -5715,7 +5495,7 @@
                       </a:endParaRPr>
                     </a:p>
                   </a:txBody>
-                  <a:tcPr marL="91440" marR="91440" marT="45720" marB="45720" anchor="ctr">
+                  <a:tcPr anchor="ctr">
                     <a:lnL w="9525" cap="flat" cmpd="sng" algn="ctr">
                       <a:solidFill>
                         <a:srgbClr val="D9D9D9"/>
@@ -5759,7 +5539,7 @@
                     <a:bodyPr/>
                     <a:lstStyle/>
                     <a:p>
-                      <a:pPr indent="0" marL="0">
+                      <a:pPr marL="0" indent="0">
                         <a:buNone/>
                       </a:pPr>
                       <a:r>
@@ -5780,7 +5560,7 @@
                       </a:endParaRPr>
                     </a:p>
                   </a:txBody>
-                  <a:tcPr marL="91440" marR="91440" marT="45720" marB="45720" anchor="ctr">
+                  <a:tcPr anchor="ctr">
                     <a:lnL w="9525" cap="flat" cmpd="sng" algn="ctr">
                       <a:solidFill>
                         <a:srgbClr val="D9D9D9"/>
@@ -5819,6 +5599,11 @@
                     </a:lnB>
                   </a:tcPr>
                 </a:tc>
+                <a:extLst>
+                  <a:ext uri="{0D108BD9-81ED-4DB2-BD59-A6C34878D82A}">
+                    <a16:rowId xmlns:a16="http://schemas.microsoft.com/office/drawing/2014/main" val="10007"/>
+                  </a:ext>
+                </a:extLst>
               </a:tr>
             </a:tbl>
           </a:graphicData>
@@ -5845,7 +5630,7 @@
           <a:bodyPr wrap="square" lIns="0" tIns="0" rIns="0" bIns="0" rtlCol="0" anchor="ctr"/>
           <a:lstStyle/>
           <a:p>
-            <a:pPr indent="0" marL="0">
+            <a:pPr marL="0" indent="0">
               <a:buNone/>
             </a:pPr>
             <a:r>
@@ -5909,11 +5694,11 @@
           <a:bodyPr wrap="square" lIns="0" tIns="0" rIns="0" bIns="0" rtlCol="0" anchor="ctr"/>
           <a:lstStyle/>
           <a:p>
-            <a:pPr indent="0" marL="0">
-              <a:buNone/>
-            </a:pPr>
-            <a:r>
-              <a:rPr lang="en-US" sz="1100" b="1" spc="200" kern="0" dirty="0">
+            <a:pPr marL="0" indent="0">
+              <a:buNone/>
+            </a:pPr>
+            <a:r>
+              <a:rPr lang="en-US" sz="1100" b="1" kern="0" spc="200" dirty="0">
                 <a:solidFill>
                   <a:srgbClr val="028090"/>
                 </a:solidFill>
@@ -5948,7 +5733,7 @@
           <a:bodyPr wrap="square" lIns="0" tIns="0" rIns="0" bIns="0" rtlCol="0" anchor="ctr"/>
           <a:lstStyle/>
           <a:p>
-            <a:pPr indent="0" marL="0">
+            <a:pPr marL="0" indent="0">
               <a:buNone/>
             </a:pPr>
             <a:r>
@@ -5987,7 +5772,7 @@
           <a:bodyPr wrap="square" lIns="0" tIns="0" rIns="0" bIns="0" rtlCol="0" anchor="ctr"/>
           <a:lstStyle/>
           <a:p>
-            <a:pPr indent="0" marL="0">
+            <a:pPr marL="0" indent="0">
               <a:buNone/>
             </a:pPr>
             <a:r>
@@ -6026,7 +5811,7 @@
           <a:bodyPr wrap="square" lIns="0" tIns="0" rIns="0" bIns="0" rtlCol="0" anchor="ctr"/>
           <a:lstStyle/>
           <a:p>
-            <a:pPr algn="r" indent="0" marL="0">
+            <a:pPr marL="0" indent="0" algn="r">
               <a:buNone/>
             </a:pPr>
             <a:r>
@@ -6070,6 +5855,13 @@
             <a:prstDash val="solid"/>
           </a:ln>
         </p:spPr>
+        <p:txBody>
+          <a:bodyPr/>
+          <a:lstStyle/>
+          <a:p>
+            <a:endParaRPr lang="en-IN"/>
+          </a:p>
+        </p:txBody>
       </p:sp>
       <p:sp>
         <p:nvSpPr>
@@ -6092,7 +5884,7 @@
           <a:bodyPr wrap="square" lIns="0" tIns="0" rIns="0" bIns="0" rtlCol="0" anchor="t"/>
           <a:lstStyle/>
           <a:p>
-            <a:pPr indent="0" marL="0">
+            <a:pPr marL="0" indent="0">
               <a:lnSpc>
                 <a:spcPct val="100000"/>
               </a:lnSpc>
@@ -6112,7 +5904,7 @@
             <a:endParaRPr lang="en-US" sz="1150" dirty="0"/>
           </a:p>
           <a:p>
-            <a:pPr indent="0" marL="0">
+            <a:pPr marL="0" indent="0">
               <a:lnSpc>
                 <a:spcPct val="100000"/>
               </a:lnSpc>
@@ -6132,7 +5924,7 @@
             <a:endParaRPr lang="en-US" sz="1150" dirty="0"/>
           </a:p>
           <a:p>
-            <a:pPr indent="0" marL="0">
+            <a:pPr marL="0" indent="0">
               <a:lnSpc>
                 <a:spcPct val="100000"/>
               </a:lnSpc>
@@ -6152,7 +5944,7 @@
             <a:endParaRPr lang="en-US" sz="1150" dirty="0"/>
           </a:p>
           <a:p>
-            <a:pPr indent="0" marL="0">
+            <a:pPr marL="0" indent="0">
               <a:lnSpc>
                 <a:spcPct val="100000"/>
               </a:lnSpc>
@@ -6172,7 +5964,7 @@
             <a:endParaRPr lang="en-US" sz="1150" dirty="0"/>
           </a:p>
           <a:p>
-            <a:pPr indent="0" marL="0">
+            <a:pPr marL="0" indent="0">
               <a:lnSpc>
                 <a:spcPct val="100000"/>
               </a:lnSpc>
@@ -6192,7 +5984,7 @@
             <a:endParaRPr lang="en-US" sz="1150" dirty="0"/>
           </a:p>
           <a:p>
-            <a:pPr indent="0" marL="0">
+            <a:pPr marL="0" indent="0">
               <a:lnSpc>
                 <a:spcPct val="100000"/>
               </a:lnSpc>
@@ -6239,6 +6031,13 @@
             <a:prstDash val="solid"/>
           </a:ln>
         </p:spPr>
+        <p:txBody>
+          <a:bodyPr/>
+          <a:lstStyle/>
+          <a:p>
+            <a:endParaRPr lang="en-IN"/>
+          </a:p>
+        </p:txBody>
       </p:sp>
       <p:sp>
         <p:nvSpPr>
@@ -6261,7 +6060,7 @@
           <a:bodyPr wrap="square" lIns="0" tIns="0" rIns="0" bIns="0" rtlCol="0" anchor="t"/>
           <a:lstStyle/>
           <a:p>
-            <a:pPr indent="0" marL="0">
+            <a:pPr marL="0" indent="0">
               <a:lnSpc>
                 <a:spcPct val="100000"/>
               </a:lnSpc>
@@ -6281,7 +6080,7 @@
             <a:endParaRPr lang="en-US" sz="1150" dirty="0"/>
           </a:p>
           <a:p>
-            <a:pPr indent="0" marL="0">
+            <a:pPr marL="0" indent="0">
               <a:lnSpc>
                 <a:spcPct val="100000"/>
               </a:lnSpc>
@@ -6301,7 +6100,7 @@
             <a:endParaRPr lang="en-US" sz="1150" dirty="0"/>
           </a:p>
           <a:p>
-            <a:pPr indent="0" marL="0">
+            <a:pPr marL="0" indent="0">
               <a:lnSpc>
                 <a:spcPct val="100000"/>
               </a:lnSpc>
@@ -6321,7 +6120,7 @@
             <a:endParaRPr lang="en-US" sz="1150" dirty="0"/>
           </a:p>
           <a:p>
-            <a:pPr indent="0" marL="0">
+            <a:pPr marL="0" indent="0">
               <a:lnSpc>
                 <a:spcPct val="100000"/>
               </a:lnSpc>
@@ -6341,7 +6140,7 @@
             <a:endParaRPr lang="en-US" sz="1150" dirty="0"/>
           </a:p>
           <a:p>
-            <a:pPr indent="0" marL="0">
+            <a:pPr marL="0" indent="0">
               <a:lnSpc>
                 <a:spcPct val="100000"/>
               </a:lnSpc>
@@ -6361,7 +6160,7 @@
             <a:endParaRPr lang="en-US" sz="1150" dirty="0"/>
           </a:p>
           <a:p>
-            <a:pPr indent="0" marL="0">
+            <a:pPr marL="0" indent="0">
               <a:lnSpc>
                 <a:spcPct val="100000"/>
               </a:lnSpc>
@@ -6381,7 +6180,7 @@
             <a:endParaRPr lang="en-US" sz="1150" dirty="0"/>
           </a:p>
           <a:p>
-            <a:pPr indent="0" marL="0">
+            <a:pPr marL="0" indent="0">
               <a:lnSpc>
                 <a:spcPct val="100000"/>
               </a:lnSpc>
@@ -6513,6 +6312,13 @@
             <a:prstDash val="solid"/>
           </a:ln>
         </p:spPr>
+        <p:txBody>
+          <a:bodyPr/>
+          <a:lstStyle/>
+          <a:p>
+            <a:endParaRPr lang="en-IN"/>
+          </a:p>
+        </p:txBody>
       </p:sp>
       <p:sp>
         <p:nvSpPr>
@@ -6535,7 +6341,7 @@
           <a:bodyPr wrap="square" lIns="0" tIns="0" rIns="0" bIns="0" rtlCol="0" anchor="ctr"/>
           <a:lstStyle/>
           <a:p>
-            <a:pPr indent="0" marL="0">
+            <a:pPr marL="0" indent="0">
               <a:buNone/>
             </a:pPr>
             <a:r>
@@ -6549,9 +6355,6 @@
               </a:rPr>
               <a:t>ASK   </a:t>
             </a:r>
-            <a:pPr indent="0" marL="0">
-              <a:buNone/>
-            </a:pPr>
             <a:r>
               <a:rPr lang="en-US" sz="1250" i="1" dirty="0">
                 <a:solidFill>
@@ -6613,11 +6416,11 @@
           <a:bodyPr wrap="square" lIns="0" tIns="0" rIns="0" bIns="0" rtlCol="0" anchor="ctr"/>
           <a:lstStyle/>
           <a:p>
-            <a:pPr indent="0" marL="0">
-              <a:buNone/>
-            </a:pPr>
-            <a:r>
-              <a:rPr lang="en-US" sz="1100" b="1" spc="200" kern="0" dirty="0">
+            <a:pPr marL="0" indent="0">
+              <a:buNone/>
+            </a:pPr>
+            <a:r>
+              <a:rPr lang="en-US" sz="1100" b="1" kern="0" spc="200" dirty="0">
                 <a:solidFill>
                   <a:srgbClr val="028090"/>
                 </a:solidFill>
@@ -6652,7 +6455,7 @@
           <a:bodyPr wrap="square" lIns="0" tIns="0" rIns="0" bIns="0" rtlCol="0" anchor="ctr"/>
           <a:lstStyle/>
           <a:p>
-            <a:pPr indent="0" marL="0">
+            <a:pPr marL="0" indent="0">
               <a:buNone/>
             </a:pPr>
             <a:r>
@@ -6691,7 +6494,7 @@
           <a:bodyPr wrap="square" lIns="0" tIns="0" rIns="0" bIns="0" rtlCol="0" anchor="ctr"/>
           <a:lstStyle/>
           <a:p>
-            <a:pPr indent="0" marL="0">
+            <a:pPr marL="0" indent="0">
               <a:buNone/>
             </a:pPr>
             <a:r>
@@ -6730,7 +6533,7 @@
           <a:bodyPr wrap="square" lIns="0" tIns="0" rIns="0" bIns="0" rtlCol="0" anchor="ctr"/>
           <a:lstStyle/>
           <a:p>
-            <a:pPr algn="r" indent="0" marL="0">
+            <a:pPr marL="0" indent="0" algn="r">
               <a:buNone/>
             </a:pPr>
             <a:r>
@@ -6774,6 +6577,13 @@
             <a:prstDash val="solid"/>
           </a:ln>
         </p:spPr>
+        <p:txBody>
+          <a:bodyPr/>
+          <a:lstStyle/>
+          <a:p>
+            <a:endParaRPr lang="en-IN"/>
+          </a:p>
+        </p:txBody>
       </p:sp>
       <p:sp>
         <p:nvSpPr>
@@ -6796,7 +6606,7 @@
           <a:bodyPr wrap="square" lIns="0" tIns="0" rIns="0" bIns="0" rtlCol="0" anchor="ctr"/>
           <a:lstStyle/>
           <a:p>
-            <a:pPr indent="0" marL="0">
+            <a:pPr marL="0" indent="0">
               <a:buNone/>
             </a:pPr>
             <a:r>
@@ -6810,9 +6620,6 @@
               </a:rPr>
               <a:t>Lect 8   </a:t>
             </a:r>
-            <a:pPr indent="0" marL="0">
-              <a:buNone/>
-            </a:pPr>
             <a:r>
               <a:rPr lang="en-US" sz="1350" dirty="0">
                 <a:solidFill>
@@ -6854,6 +6661,13 @@
             <a:prstDash val="solid"/>
           </a:ln>
         </p:spPr>
+        <p:txBody>
+          <a:bodyPr/>
+          <a:lstStyle/>
+          <a:p>
+            <a:endParaRPr lang="en-IN"/>
+          </a:p>
+        </p:txBody>
       </p:sp>
       <p:sp>
         <p:nvSpPr>
@@ -6876,7 +6690,7 @@
           <a:bodyPr wrap="square" lIns="0" tIns="0" rIns="0" bIns="0" rtlCol="0" anchor="ctr"/>
           <a:lstStyle/>
           <a:p>
-            <a:pPr indent="0" marL="0">
+            <a:pPr marL="0" indent="0">
               <a:buNone/>
             </a:pPr>
             <a:r>
@@ -6890,9 +6704,6 @@
               </a:rPr>
               <a:t>Lect 9   </a:t>
             </a:r>
-            <a:pPr indent="0" marL="0">
-              <a:buNone/>
-            </a:pPr>
             <a:r>
               <a:rPr lang="en-US" sz="1350" dirty="0">
                 <a:solidFill>
@@ -6934,6 +6745,13 @@
             <a:prstDash val="solid"/>
           </a:ln>
         </p:spPr>
+        <p:txBody>
+          <a:bodyPr/>
+          <a:lstStyle/>
+          <a:p>
+            <a:endParaRPr lang="en-IN"/>
+          </a:p>
+        </p:txBody>
       </p:sp>
       <p:sp>
         <p:nvSpPr>
@@ -6956,7 +6774,7 @@
           <a:bodyPr wrap="square" lIns="0" tIns="0" rIns="0" bIns="0" rtlCol="0" anchor="ctr"/>
           <a:lstStyle/>
           <a:p>
-            <a:pPr indent="0" marL="0">
+            <a:pPr marL="0" indent="0">
               <a:buNone/>
             </a:pPr>
             <a:r>
@@ -6970,9 +6788,6 @@
               </a:rPr>
               <a:t>Lect 10   </a:t>
             </a:r>
-            <a:pPr indent="0" marL="0">
-              <a:buNone/>
-            </a:pPr>
             <a:r>
               <a:rPr lang="en-US" sz="1350" dirty="0">
                 <a:solidFill>
@@ -7009,7 +6824,7 @@
           <a:bodyPr wrap="square" lIns="0" tIns="0" rIns="0" bIns="0" rtlCol="0" anchor="ctr"/>
           <a:lstStyle/>
           <a:p>
-            <a:pPr indent="0" marL="0">
+            <a:pPr marL="0" indent="0">
               <a:buNone/>
             </a:pPr>
             <a:r>
@@ -7043,6 +6858,7 @@
         <a:solidFill>
           <a:srgbClr val="1E2761"/>
         </a:solidFill>
+        <a:effectLst/>
       </p:bgPr>
     </p:bg>
     <p:spTree>
@@ -7080,11 +6896,11 @@
           <a:bodyPr wrap="square" lIns="0" tIns="0" rIns="0" bIns="0" rtlCol="0" anchor="ctr"/>
           <a:lstStyle/>
           <a:p>
-            <a:pPr indent="0" marL="0">
-              <a:buNone/>
-            </a:pPr>
-            <a:r>
-              <a:rPr lang="en-US" sz="1100" b="1" spc="200" kern="0" dirty="0">
+            <a:pPr marL="0" indent="0">
+              <a:buNone/>
+            </a:pPr>
+            <a:r>
+              <a:rPr lang="en-US" sz="1100" b="1" kern="0" spc="200" dirty="0">
                 <a:solidFill>
                   <a:srgbClr val="D4A017"/>
                 </a:solidFill>
@@ -7119,7 +6935,7 @@
           <a:bodyPr wrap="square" lIns="0" tIns="0" rIns="0" bIns="0" rtlCol="0" anchor="ctr"/>
           <a:lstStyle/>
           <a:p>
-            <a:pPr indent="0" marL="0">
+            <a:pPr marL="0" indent="0">
               <a:buNone/>
             </a:pPr>
             <a:r>
@@ -7269,6 +7085,13 @@
             <a:prstDash val="solid"/>
           </a:ln>
         </p:spPr>
+        <p:txBody>
+          <a:bodyPr/>
+          <a:lstStyle/>
+          <a:p>
+            <a:endParaRPr lang="en-IN"/>
+          </a:p>
+        </p:txBody>
       </p:sp>
       <p:sp>
         <p:nvSpPr>
@@ -7291,7 +7114,7 @@
           <a:bodyPr wrap="square" lIns="0" tIns="0" rIns="0" bIns="0" rtlCol="0" anchor="ctr"/>
           <a:lstStyle/>
           <a:p>
-            <a:pPr indent="0" marL="0">
+            <a:pPr marL="0" indent="0">
               <a:buNone/>
             </a:pPr>
             <a:r>
@@ -7305,9 +7128,6 @@
               </a:rPr>
               <a:t>EXIT TICKET   </a:t>
             </a:r>
-            <a:pPr indent="0" marL="0">
-              <a:buNone/>
-            </a:pPr>
             <a:r>
               <a:rPr lang="en-US" sz="1300" dirty="0">
                 <a:solidFill>
@@ -7344,7 +7164,7 @@
           <a:bodyPr wrap="square" lIns="0" tIns="0" rIns="0" bIns="0" rtlCol="0" anchor="ctr"/>
           <a:lstStyle/>
           <a:p>
-            <a:pPr indent="0" marL="0">
+            <a:pPr marL="0" indent="0">
               <a:buNone/>
             </a:pPr>
             <a:r>
@@ -7408,11 +7228,11 @@
           <a:bodyPr wrap="square" lIns="0" tIns="0" rIns="0" bIns="0" rtlCol="0" anchor="ctr"/>
           <a:lstStyle/>
           <a:p>
-            <a:pPr indent="0" marL="0">
-              <a:buNone/>
-            </a:pPr>
-            <a:r>
-              <a:rPr lang="en-US" sz="1100" b="1" spc="200" kern="0" dirty="0">
+            <a:pPr marL="0" indent="0">
+              <a:buNone/>
+            </a:pPr>
+            <a:r>
+              <a:rPr lang="en-US" sz="1100" b="1" kern="0" spc="200" dirty="0">
                 <a:solidFill>
                   <a:srgbClr val="028090"/>
                 </a:solidFill>
@@ -7447,7 +7267,7 @@
           <a:bodyPr wrap="square" lIns="0" tIns="0" rIns="0" bIns="0" rtlCol="0" anchor="ctr"/>
           <a:lstStyle/>
           <a:p>
-            <a:pPr indent="0" marL="0">
+            <a:pPr marL="0" indent="0">
               <a:buNone/>
             </a:pPr>
             <a:r>
@@ -7486,7 +7306,7 @@
           <a:bodyPr wrap="square" lIns="0" tIns="0" rIns="0" bIns="0" rtlCol="0" anchor="ctr"/>
           <a:lstStyle/>
           <a:p>
-            <a:pPr indent="0" marL="0">
+            <a:pPr marL="0" indent="0">
               <a:buNone/>
             </a:pPr>
             <a:r>
@@ -7525,7 +7345,7 @@
           <a:bodyPr wrap="square" lIns="0" tIns="0" rIns="0" bIns="0" rtlCol="0" anchor="ctr"/>
           <a:lstStyle/>
           <a:p>
-            <a:pPr algn="r" indent="0" marL="0">
+            <a:pPr marL="0" indent="0" algn="r">
               <a:buNone/>
             </a:pPr>
             <a:r>
@@ -7569,6 +7389,13 @@
             <a:prstDash val="solid"/>
           </a:ln>
         </p:spPr>
+        <p:txBody>
+          <a:bodyPr/>
+          <a:lstStyle/>
+          <a:p>
+            <a:endParaRPr lang="en-IN"/>
+          </a:p>
+        </p:txBody>
       </p:sp>
       <p:sp>
         <p:nvSpPr>
@@ -7591,7 +7418,7 @@
           <a:bodyPr wrap="square" lIns="0" tIns="0" rIns="0" bIns="0" rtlCol="0" anchor="ctr"/>
           <a:lstStyle/>
           <a:p>
-            <a:pPr indent="0" marL="0">
+            <a:pPr marL="0" indent="0">
               <a:buNone/>
             </a:pPr>
             <a:r>
@@ -7635,6 +7462,13 @@
             <a:prstDash val="solid"/>
           </a:ln>
         </p:spPr>
+        <p:txBody>
+          <a:bodyPr/>
+          <a:lstStyle/>
+          <a:p>
+            <a:endParaRPr lang="en-IN"/>
+          </a:p>
+        </p:txBody>
       </p:sp>
       <p:sp>
         <p:nvSpPr>
@@ -7657,7 +7491,7 @@
           <a:bodyPr wrap="square" lIns="0" tIns="0" rIns="0" bIns="0" rtlCol="0" anchor="ctr"/>
           <a:lstStyle/>
           <a:p>
-            <a:pPr indent="0" marL="0">
+            <a:pPr marL="0" indent="0">
               <a:buNone/>
             </a:pPr>
             <a:r>
@@ -7765,6 +7599,13 @@
             <a:prstDash val="solid"/>
           </a:ln>
         </p:spPr>
+        <p:txBody>
+          <a:bodyPr/>
+          <a:lstStyle/>
+          <a:p>
+            <a:endParaRPr lang="en-IN"/>
+          </a:p>
+        </p:txBody>
       </p:sp>
       <p:sp>
         <p:nvSpPr>
@@ -7787,7 +7628,7 @@
           <a:bodyPr wrap="square" lIns="0" tIns="0" rIns="0" bIns="0" rtlCol="0" anchor="ctr"/>
           <a:lstStyle/>
           <a:p>
-            <a:pPr indent="0" marL="0">
+            <a:pPr marL="0" indent="0">
               <a:buNone/>
             </a:pPr>
             <a:r>
@@ -7801,9 +7642,6 @@
               </a:rPr>
               <a:t>ASK   </a:t>
             </a:r>
-            <a:pPr indent="0" marL="0">
-              <a:buNone/>
-            </a:pPr>
             <a:r>
               <a:rPr lang="en-US" sz="1250" i="1" dirty="0">
                 <a:solidFill>
@@ -7865,11 +7703,11 @@
           <a:bodyPr wrap="square" lIns="0" tIns="0" rIns="0" bIns="0" rtlCol="0" anchor="ctr"/>
           <a:lstStyle/>
           <a:p>
-            <a:pPr indent="0" marL="0">
-              <a:buNone/>
-            </a:pPr>
-            <a:r>
-              <a:rPr lang="en-US" sz="1100" b="1" spc="200" kern="0" dirty="0">
+            <a:pPr marL="0" indent="0">
+              <a:buNone/>
+            </a:pPr>
+            <a:r>
+              <a:rPr lang="en-US" sz="1100" b="1" kern="0" spc="200" dirty="0">
                 <a:solidFill>
                   <a:srgbClr val="028090"/>
                 </a:solidFill>
@@ -7904,7 +7742,7 @@
           <a:bodyPr wrap="square" lIns="0" tIns="0" rIns="0" bIns="0" rtlCol="0" anchor="ctr"/>
           <a:lstStyle/>
           <a:p>
-            <a:pPr indent="0" marL="0">
+            <a:pPr marL="0" indent="0">
               <a:buNone/>
             </a:pPr>
             <a:r>
@@ -7943,7 +7781,7 @@
           <a:bodyPr wrap="square" lIns="0" tIns="0" rIns="0" bIns="0" rtlCol="0" anchor="ctr"/>
           <a:lstStyle/>
           <a:p>
-            <a:pPr indent="0" marL="0">
+            <a:pPr marL="0" indent="0">
               <a:buNone/>
             </a:pPr>
             <a:r>
@@ -7982,7 +7820,7 @@
           <a:bodyPr wrap="square" lIns="0" tIns="0" rIns="0" bIns="0" rtlCol="0" anchor="ctr"/>
           <a:lstStyle/>
           <a:p>
-            <a:pPr algn="r" indent="0" marL="0">
+            <a:pPr marL="0" indent="0" algn="r">
               <a:buNone/>
             </a:pPr>
             <a:r>
@@ -8002,7 +7840,7 @@
       </p:sp>
       <p:sp>
         <p:nvSpPr>
-          <p:cNvPr id="6" name="Shape 4"/>
+          <p:cNvPr id="7" name="Text 5"/>
           <p:cNvSpPr/>
           <p:nvPr/>
         </p:nvSpPr>
@@ -8011,31 +7849,6 @@
             <a:off x="457200" y="1435608"/>
             <a:ext cx="384048" cy="384048"/>
           </a:xfrm>
-          <a:prstGeom prst="ellipse">
-            <a:avLst/>
-          </a:prstGeom>
-          <a:solidFill>
-            <a:srgbClr val="028090"/>
-          </a:solidFill>
-          <a:ln w="12700">
-            <a:solidFill>
-              <a:srgbClr val="1E2761"/>
-            </a:solidFill>
-            <a:prstDash val="solid"/>
-          </a:ln>
-        </p:spPr>
-      </p:sp>
-      <p:sp>
-        <p:nvSpPr>
-          <p:cNvPr id="7" name="Text 5"/>
-          <p:cNvSpPr/>
-          <p:nvPr/>
-        </p:nvSpPr>
-        <p:spPr>
-          <a:xfrm>
-            <a:off x="457200" y="1435608"/>
-            <a:ext cx="384048" cy="384048"/>
-          </a:xfrm>
           <a:prstGeom prst="rect">
             <a:avLst/>
           </a:prstGeom>
@@ -8046,7 +7859,7 @@
           <a:bodyPr wrap="square" lIns="0" tIns="0" rIns="0" bIns="0" rtlCol="0" anchor="ctr"/>
           <a:lstStyle/>
           <a:p>
-            <a:pPr algn="ctr" indent="0" marL="0">
+            <a:pPr marL="0" indent="0" algn="ctr">
               <a:buNone/>
             </a:pPr>
             <a:r>
@@ -8072,8 +7885,8 @@
         </p:nvSpPr>
         <p:spPr>
           <a:xfrm>
-            <a:off x="1005840" y="1325880"/>
-            <a:ext cx="7680960" cy="731520"/>
+            <a:off x="457200" y="979793"/>
+            <a:ext cx="8229600" cy="3506724"/>
           </a:xfrm>
           <a:prstGeom prst="rect">
             <a:avLst/>
@@ -8085,333 +7898,190 @@
           <a:bodyPr wrap="square" lIns="0" tIns="0" rIns="0" bIns="0" rtlCol="0" anchor="ctr"/>
           <a:lstStyle/>
           <a:p>
-            <a:pPr indent="0" marL="0">
-              <a:buNone/>
-            </a:pPr>
-            <a:r>
-              <a:rPr lang="en-US" sz="1400" b="1" dirty="0">
-                <a:solidFill>
-                  <a:srgbClr val="1E2761"/>
+            <a:r>
+              <a:rPr lang="en-IN" sz="1400" b="1" dirty="0"/>
+              <a:t>Algorithm: Infix to Postfix</a:t>
+            </a:r>
+            <a:r>
+              <a:rPr lang="en-IN" sz="1400" dirty="0"/>
+              <a:t> </a:t>
+            </a:r>
+          </a:p>
+          <a:p>
+            <a:endParaRPr lang="en-IN" sz="1400" dirty="0"/>
+          </a:p>
+          <a:p>
+            <a:pPr marL="342900" lvl="0" indent="-342900">
+              <a:buFont typeface="+mj-lt"/>
+              <a:buAutoNum type="arabicPeriod"/>
+            </a:pPr>
+            <a:r>
+              <a:rPr lang="en-IN" sz="1400" dirty="0"/>
+              <a:t>Start with an empty stack and empty output.</a:t>
+            </a:r>
+          </a:p>
+          <a:p>
+            <a:pPr marL="342900" lvl="0" indent="-342900">
+              <a:buFont typeface="+mj-lt"/>
+              <a:buAutoNum type="arabicPeriod"/>
+            </a:pPr>
+            <a:r>
+              <a:rPr lang="en-IN" sz="1400" dirty="0"/>
+              <a:t>Read the infix expression left to right, one symbol at a time.</a:t>
+            </a:r>
+          </a:p>
+          <a:p>
+            <a:pPr marL="342900" lvl="0" indent="-342900">
+              <a:buFont typeface="+mj-lt"/>
+              <a:buAutoNum type="arabicPeriod"/>
+            </a:pPr>
+            <a:r>
+              <a:rPr lang="en-IN" sz="1400" dirty="0"/>
+              <a:t>If the symbol is an </a:t>
+            </a:r>
+            <a:r>
+              <a:rPr lang="en-IN" sz="1400" b="1" dirty="0"/>
+              <a:t>operand</a:t>
+            </a:r>
+            <a:r>
+              <a:rPr lang="en-IN" sz="1400" dirty="0"/>
+              <a:t> → add it to the output.</a:t>
+            </a:r>
+          </a:p>
+          <a:p>
+            <a:pPr marL="342900" lvl="0" indent="-342900">
+              <a:buFont typeface="+mj-lt"/>
+              <a:buAutoNum type="arabicPeriod"/>
+            </a:pPr>
+            <a:r>
+              <a:rPr lang="en-IN" sz="1400" dirty="0"/>
+              <a:t>If the symbol is </a:t>
+            </a:r>
+            <a:r>
+              <a:rPr lang="en-IN" b="1" dirty="0"/>
+              <a:t>(</a:t>
+            </a:r>
+            <a:r>
+              <a:rPr lang="en-IN" sz="1400" dirty="0"/>
+              <a:t> → push it onto the stack.</a:t>
+            </a:r>
+          </a:p>
+          <a:p>
+            <a:pPr marL="342900" lvl="0" indent="-342900">
+              <a:buFont typeface="+mj-lt"/>
+              <a:buAutoNum type="arabicPeriod"/>
+            </a:pPr>
+            <a:r>
+              <a:rPr lang="en-IN" sz="1400" dirty="0"/>
+              <a:t>If the symbol is an </a:t>
+            </a:r>
+            <a:r>
+              <a:rPr lang="en-IN" sz="1400" b="1" dirty="0"/>
+              <a:t>operator</a:t>
+            </a:r>
+            <a:r>
+              <a:rPr lang="en-IN" sz="1400" dirty="0"/>
+              <a:t> → pop to output while the stack top has </a:t>
+            </a:r>
+            <a:r>
+              <a:rPr lang="en-IN" sz="1400" b="1" dirty="0"/>
+              <a:t>higher or equal</a:t>
+            </a:r>
+            <a:r>
+              <a:rPr lang="en-IN" sz="1400" dirty="0"/>
+              <a:t> precedence (for </a:t>
+            </a:r>
+            <a:r>
+              <a:rPr lang="en-IN" dirty="0"/>
+              <a:t>^</a:t>
+            </a:r>
+            <a:r>
+              <a:rPr lang="en-IN" sz="1400" dirty="0"/>
+              <a:t>, only higher); then push the operator.</a:t>
+            </a:r>
+          </a:p>
+          <a:p>
+            <a:pPr marL="342900" lvl="0" indent="-342900">
+              <a:buFont typeface="+mj-lt"/>
+              <a:buAutoNum type="arabicPeriod"/>
+            </a:pPr>
+            <a:r>
+              <a:rPr lang="en-IN" sz="1400" dirty="0"/>
+              <a:t>If the symbol is </a:t>
+            </a:r>
+            <a:r>
+              <a:rPr lang="en-IN" b="1" dirty="0"/>
+              <a:t>)</a:t>
+            </a:r>
+            <a:r>
+              <a:rPr lang="en-IN" sz="1400" dirty="0"/>
+              <a:t> → pop to output until </a:t>
+            </a:r>
+            <a:r>
+              <a:rPr lang="en-IN" dirty="0"/>
+              <a:t>(</a:t>
+            </a:r>
+            <a:r>
+              <a:rPr lang="en-IN" sz="1400" dirty="0"/>
+              <a:t> is found; discard both parentheses.</a:t>
+            </a:r>
+          </a:p>
+          <a:p>
+            <a:pPr marL="342900" lvl="0" indent="-342900">
+              <a:buFont typeface="+mj-lt"/>
+              <a:buAutoNum type="arabicPeriod"/>
+            </a:pPr>
+            <a:r>
+              <a:rPr lang="en-IN" sz="1400" dirty="0"/>
+              <a:t>After the last symbol → pop all remaining operators to the output.</a:t>
+            </a:r>
+          </a:p>
+          <a:p>
+            <a:pPr marL="342900" lvl="0" indent="-342900">
+              <a:buFont typeface="+mj-lt"/>
+              <a:buAutoNum type="arabicPeriod"/>
+            </a:pPr>
+            <a:r>
+              <a:rPr lang="en-IN" sz="1400" dirty="0"/>
+              <a:t>The output is the postfix expression. Stop.</a:t>
+            </a:r>
+          </a:p>
+        </p:txBody>
+      </p:sp>
+      <p:sp>
+        <p:nvSpPr>
+          <p:cNvPr id="13" name="Text 11"/>
+          <p:cNvSpPr/>
+          <p:nvPr/>
+        </p:nvSpPr>
+        <p:spPr>
+          <a:xfrm>
+            <a:off x="457200" y="3172968"/>
+            <a:ext cx="384048" cy="384048"/>
+          </a:xfrm>
+          <a:prstGeom prst="rect">
+            <a:avLst/>
+          </a:prstGeom>
+          <a:noFill/>
+          <a:ln/>
+        </p:spPr>
+        <p:txBody>
+          <a:bodyPr wrap="square" lIns="0" tIns="0" rIns="0" bIns="0" rtlCol="0" anchor="ctr"/>
+          <a:lstStyle/>
+          <a:p>
+            <a:pPr marL="0" indent="0" algn="ctr">
+              <a:buNone/>
+            </a:pPr>
+            <a:r>
+              <a:rPr lang="en-US" sz="1300" b="1" dirty="0">
+                <a:solidFill>
+                  <a:srgbClr val="FFFFFF"/>
                 </a:solidFill>
                 <a:latin typeface="Calibri" pitchFamily="34" charset="0"/>
                 <a:ea typeface="Calibri" pitchFamily="34" charset="-122"/>
                 <a:cs typeface="Calibri" pitchFamily="34" charset="-120"/>
               </a:rPr>
-              <a:t>See a number   </a:t>
-            </a:r>
-            <a:pPr indent="0" marL="0">
-              <a:buNone/>
-            </a:pPr>
-            <a:r>
-              <a:rPr lang="en-US" sz="1350" dirty="0">
-                <a:solidFill>
-                  <a:srgbClr val="2B2B2B"/>
-                </a:solidFill>
-                <a:latin typeface="Calibri" pitchFamily="34" charset="0"/>
-                <a:ea typeface="Calibri" pitchFamily="34" charset="-122"/>
-                <a:cs typeface="Calibri" pitchFamily="34" charset="-120"/>
-              </a:rPr>
-              <a:t>Push it on the stack.</a:t>
-            </a:r>
-            <a:endParaRPr lang="en-US" sz="1400" dirty="0"/>
-          </a:p>
-        </p:txBody>
-      </p:sp>
-      <p:sp>
-        <p:nvSpPr>
-          <p:cNvPr id="9" name="Shape 7"/>
-          <p:cNvSpPr/>
-          <p:nvPr/>
-        </p:nvSpPr>
-        <p:spPr>
-          <a:xfrm>
-            <a:off x="457200" y="2304288"/>
-            <a:ext cx="384048" cy="384048"/>
-          </a:xfrm>
-          <a:prstGeom prst="ellipse">
-            <a:avLst/>
-          </a:prstGeom>
-          <a:solidFill>
-            <a:srgbClr val="D4A017"/>
-          </a:solidFill>
-          <a:ln w="12700">
-            <a:solidFill>
-              <a:srgbClr val="1E2761"/>
-            </a:solidFill>
-            <a:prstDash val="solid"/>
-          </a:ln>
-        </p:spPr>
-      </p:sp>
-      <p:sp>
-        <p:nvSpPr>
-          <p:cNvPr id="10" name="Text 8"/>
-          <p:cNvSpPr/>
-          <p:nvPr/>
-        </p:nvSpPr>
-        <p:spPr>
-          <a:xfrm>
-            <a:off x="457200" y="2304288"/>
-            <a:ext cx="384048" cy="384048"/>
-          </a:xfrm>
-          <a:prstGeom prst="rect">
-            <a:avLst/>
-          </a:prstGeom>
-          <a:noFill/>
-          <a:ln/>
-        </p:spPr>
-        <p:txBody>
-          <a:bodyPr wrap="square" lIns="0" tIns="0" rIns="0" bIns="0" rtlCol="0" anchor="ctr"/>
-          <a:lstStyle/>
-          <a:p>
-            <a:pPr algn="ctr" indent="0" marL="0">
-              <a:buNone/>
-            </a:pPr>
-            <a:r>
-              <a:rPr lang="en-US" sz="1300" b="1" dirty="0">
-                <a:solidFill>
-                  <a:srgbClr val="1E2761"/>
-                </a:solidFill>
-                <a:latin typeface="Calibri" pitchFamily="34" charset="0"/>
-                <a:ea typeface="Calibri" pitchFamily="34" charset="-122"/>
-                <a:cs typeface="Calibri" pitchFamily="34" charset="-120"/>
-              </a:rPr>
-              <a:t>2</a:t>
-            </a:r>
-            <a:endParaRPr lang="en-US" sz="1300" dirty="0"/>
-          </a:p>
-        </p:txBody>
-      </p:sp>
-      <p:sp>
-        <p:nvSpPr>
-          <p:cNvPr id="11" name="Text 9"/>
-          <p:cNvSpPr/>
-          <p:nvPr/>
-        </p:nvSpPr>
-        <p:spPr>
-          <a:xfrm>
-            <a:off x="1005840" y="2194560"/>
-            <a:ext cx="7680960" cy="731520"/>
-          </a:xfrm>
-          <a:prstGeom prst="rect">
-            <a:avLst/>
-          </a:prstGeom>
-          <a:noFill/>
-          <a:ln/>
-        </p:spPr>
-        <p:txBody>
-          <a:bodyPr wrap="square" lIns="0" tIns="0" rIns="0" bIns="0" rtlCol="0" anchor="ctr"/>
-          <a:lstStyle/>
-          <a:p>
-            <a:pPr indent="0" marL="0">
-              <a:buNone/>
-            </a:pPr>
-            <a:r>
-              <a:rPr lang="en-US" sz="1400" b="1" dirty="0">
-                <a:solidFill>
-                  <a:srgbClr val="1E2761"/>
-                </a:solidFill>
-                <a:latin typeface="Calibri" pitchFamily="34" charset="0"/>
-                <a:ea typeface="Calibri" pitchFamily="34" charset="-122"/>
-                <a:cs typeface="Calibri" pitchFamily="34" charset="-120"/>
-              </a:rPr>
-              <a:t>See an operator   </a:t>
-            </a:r>
-            <a:pPr indent="0" marL="0">
-              <a:buNone/>
-            </a:pPr>
-            <a:r>
-              <a:rPr lang="en-US" sz="1350" dirty="0">
-                <a:solidFill>
-                  <a:srgbClr val="2B2B2B"/>
-                </a:solidFill>
-                <a:latin typeface="Calibri" pitchFamily="34" charset="0"/>
-                <a:ea typeface="Calibri" pitchFamily="34" charset="-122"/>
-                <a:cs typeface="Calibri" pitchFamily="34" charset="-120"/>
-              </a:rPr>
-              <a:t>Pop two numbers, apply the operator, push the result back.</a:t>
-            </a:r>
-            <a:endParaRPr lang="en-US" sz="1400" dirty="0"/>
-          </a:p>
-        </p:txBody>
-      </p:sp>
-      <p:sp>
-        <p:nvSpPr>
-          <p:cNvPr id="12" name="Shape 10"/>
-          <p:cNvSpPr/>
-          <p:nvPr/>
-        </p:nvSpPr>
-        <p:spPr>
-          <a:xfrm>
-            <a:off x="457200" y="3172968"/>
-            <a:ext cx="384048" cy="384048"/>
-          </a:xfrm>
-          <a:prstGeom prst="ellipse">
-            <a:avLst/>
-          </a:prstGeom>
-          <a:solidFill>
-            <a:srgbClr val="028090"/>
-          </a:solidFill>
-          <a:ln w="12700">
-            <a:solidFill>
-              <a:srgbClr val="1E2761"/>
-            </a:solidFill>
-            <a:prstDash val="solid"/>
-          </a:ln>
-        </p:spPr>
-      </p:sp>
-      <p:sp>
-        <p:nvSpPr>
-          <p:cNvPr id="13" name="Text 11"/>
-          <p:cNvSpPr/>
-          <p:nvPr/>
-        </p:nvSpPr>
-        <p:spPr>
-          <a:xfrm>
-            <a:off x="457200" y="3172968"/>
-            <a:ext cx="384048" cy="384048"/>
-          </a:xfrm>
-          <a:prstGeom prst="rect">
-            <a:avLst/>
-          </a:prstGeom>
-          <a:noFill/>
-          <a:ln/>
-        </p:spPr>
-        <p:txBody>
-          <a:bodyPr wrap="square" lIns="0" tIns="0" rIns="0" bIns="0" rtlCol="0" anchor="ctr"/>
-          <a:lstStyle/>
-          <a:p>
-            <a:pPr algn="ctr" indent="0" marL="0">
-              <a:buNone/>
-            </a:pPr>
-            <a:r>
-              <a:rPr lang="en-US" sz="1300" b="1" dirty="0">
-                <a:solidFill>
-                  <a:srgbClr val="FFFFFF"/>
-                </a:solidFill>
-                <a:latin typeface="Calibri" pitchFamily="34" charset="0"/>
-                <a:ea typeface="Calibri" pitchFamily="34" charset="-122"/>
-                <a:cs typeface="Calibri" pitchFamily="34" charset="-120"/>
-              </a:rPr>
               <a:t>3</a:t>
-            </a:r>
-            <a:endParaRPr lang="en-US" sz="1300" dirty="0"/>
-          </a:p>
-        </p:txBody>
-      </p:sp>
-      <p:sp>
-        <p:nvSpPr>
-          <p:cNvPr id="14" name="Text 12"/>
-          <p:cNvSpPr/>
-          <p:nvPr/>
-        </p:nvSpPr>
-        <p:spPr>
-          <a:xfrm>
-            <a:off x="1005840" y="3063240"/>
-            <a:ext cx="7680960" cy="731520"/>
-          </a:xfrm>
-          <a:prstGeom prst="rect">
-            <a:avLst/>
-          </a:prstGeom>
-          <a:noFill/>
-          <a:ln/>
-        </p:spPr>
-        <p:txBody>
-          <a:bodyPr wrap="square" lIns="0" tIns="0" rIns="0" bIns="0" rtlCol="0" anchor="ctr"/>
-          <a:lstStyle/>
-          <a:p>
-            <a:pPr indent="0" marL="0">
-              <a:buNone/>
-            </a:pPr>
-            <a:r>
-              <a:rPr lang="en-US" sz="1400" b="1" dirty="0">
-                <a:solidFill>
-                  <a:srgbClr val="1E2761"/>
-                </a:solidFill>
-                <a:latin typeface="Calibri" pitchFamily="34" charset="0"/>
-                <a:ea typeface="Calibri" pitchFamily="34" charset="-122"/>
-                <a:cs typeface="Calibri" pitchFamily="34" charset="-120"/>
-              </a:rPr>
-              <a:t>End of input   </a:t>
-            </a:r>
-            <a:pPr indent="0" marL="0">
-              <a:buNone/>
-            </a:pPr>
-            <a:r>
-              <a:rPr lang="en-US" sz="1350" dirty="0">
-                <a:solidFill>
-                  <a:srgbClr val="2B2B2B"/>
-                </a:solidFill>
-                <a:latin typeface="Calibri" pitchFamily="34" charset="0"/>
-                <a:ea typeface="Calibri" pitchFamily="34" charset="-122"/>
-                <a:cs typeface="Calibri" pitchFamily="34" charset="-120"/>
-              </a:rPr>
-              <a:t>The single number left on the stack is the answer.</a:t>
-            </a:r>
-            <a:endParaRPr lang="en-US" sz="1400" dirty="0"/>
-          </a:p>
-        </p:txBody>
-      </p:sp>
-      <p:sp>
-        <p:nvSpPr>
-          <p:cNvPr id="15" name="Shape 13"/>
-          <p:cNvSpPr/>
-          <p:nvPr/>
-        </p:nvSpPr>
-        <p:spPr>
-          <a:xfrm>
-            <a:off x="457200" y="3977640"/>
-            <a:ext cx="8229600" cy="731520"/>
-          </a:xfrm>
-          <a:prstGeom prst="roundRect">
-            <a:avLst>
-              <a:gd name="adj" fmla="val 8750"/>
-            </a:avLst>
-          </a:prstGeom>
-          <a:solidFill>
-            <a:srgbClr val="F0F7F7"/>
-          </a:solidFill>
-          <a:ln w="12700">
-            <a:solidFill>
-              <a:srgbClr val="028090"/>
-            </a:solidFill>
-            <a:prstDash val="solid"/>
-          </a:ln>
-        </p:spPr>
-      </p:sp>
-      <p:sp>
-        <p:nvSpPr>
-          <p:cNvPr id="16" name="Text 14"/>
-          <p:cNvSpPr/>
-          <p:nvPr/>
-        </p:nvSpPr>
-        <p:spPr>
-          <a:xfrm>
-            <a:off x="621792" y="4050792"/>
-            <a:ext cx="7900416" cy="585216"/>
-          </a:xfrm>
-          <a:prstGeom prst="rect">
-            <a:avLst/>
-          </a:prstGeom>
-          <a:noFill/>
-          <a:ln/>
-        </p:spPr>
-        <p:txBody>
-          <a:bodyPr wrap="square" lIns="0" tIns="0" rIns="0" bIns="0" rtlCol="0" anchor="ctr"/>
-          <a:lstStyle/>
-          <a:p>
-            <a:pPr indent="0" marL="0">
-              <a:buNone/>
-            </a:pPr>
-            <a:r>
-              <a:rPr lang="en-US" sz="1300" dirty="0">
-                <a:solidFill>
-                  <a:srgbClr val="2B2B2B"/>
-                </a:solidFill>
-                <a:latin typeface="Calibri" pitchFamily="34" charset="0"/>
-                <a:ea typeface="Calibri" pitchFamily="34" charset="-122"/>
-                <a:cs typeface="Calibri" pitchFamily="34" charset="-120"/>
-              </a:rPr>
-              <a:t>No precedence table, no parentheses, one left-to-right scan — this is why compilers and calculators evaluate postfix internally.</a:t>
             </a:r>
             <a:endParaRPr lang="en-US" sz="1300" dirty="0"/>
           </a:p>
@@ -8463,11 +8133,11 @@
           <a:bodyPr wrap="square" lIns="0" tIns="0" rIns="0" bIns="0" rtlCol="0" anchor="ctr"/>
           <a:lstStyle/>
           <a:p>
-            <a:pPr indent="0" marL="0">
-              <a:buNone/>
-            </a:pPr>
-            <a:r>
-              <a:rPr lang="en-US" sz="1100" b="1" spc="200" kern="0" dirty="0">
+            <a:pPr marL="0" indent="0">
+              <a:buNone/>
+            </a:pPr>
+            <a:r>
+              <a:rPr lang="en-US" sz="1100" b="1" kern="0" spc="200" dirty="0">
                 <a:solidFill>
                   <a:srgbClr val="028090"/>
                 </a:solidFill>
@@ -8502,7 +8172,7 @@
           <a:bodyPr wrap="square" lIns="0" tIns="0" rIns="0" bIns="0" rtlCol="0" anchor="ctr"/>
           <a:lstStyle/>
           <a:p>
-            <a:pPr indent="0" marL="0">
+            <a:pPr marL="0" indent="0">
               <a:buNone/>
             </a:pPr>
             <a:r>
@@ -8541,7 +8211,7 @@
           <a:bodyPr wrap="square" lIns="0" tIns="0" rIns="0" bIns="0" rtlCol="0" anchor="ctr"/>
           <a:lstStyle/>
           <a:p>
-            <a:pPr indent="0" marL="0">
+            <a:pPr marL="0" indent="0">
               <a:buNone/>
             </a:pPr>
             <a:r>
@@ -8580,7 +8250,7 @@
           <a:bodyPr wrap="square" lIns="0" tIns="0" rIns="0" bIns="0" rtlCol="0" anchor="ctr"/>
           <a:lstStyle/>
           <a:p>
-            <a:pPr algn="r" indent="0" marL="0">
+            <a:pPr marL="0" indent="0" algn="r">
               <a:buNone/>
             </a:pPr>
             <a:r>
@@ -8600,7 +8270,7 @@
       </p:sp>
       <p:graphicFrame>
         <p:nvGraphicFramePr>
-          <p:cNvPr id="5" name="Table 0"/>
+          <p:cNvPr id="6" name="Table 0"/>
           <p:cNvGraphicFramePr>
             <a:graphicFrameLocks noGrp="1"/>
           </p:cNvGraphicFramePr>
@@ -8614,16 +8284,34 @@
         </p:nvGraphicFramePr>
         <p:xfrm>
           <a:off x="457200" y="1188720"/>
-          <a:ext cx="8229600" cy="914400"/>
+          <a:ext cx="8229600" cy="3291840"/>
         </p:xfrm>
         <a:graphic>
           <a:graphicData uri="http://schemas.openxmlformats.org/drawingml/2006/table">
             <a:tbl>
               <a:tblPr/>
               <a:tblGrid>
-                <a:gridCol w="914400"/>
-                <a:gridCol w="4754880"/>
-                <a:gridCol w="2560320"/>
+                <a:gridCol w="914400">
+                  <a:extLst>
+                    <a:ext uri="{9D8B030D-6E8A-4147-A177-3AD203B41FA5}">
+                      <a16:colId xmlns:a16="http://schemas.microsoft.com/office/drawing/2014/main" val="20000"/>
+                    </a:ext>
+                  </a:extLst>
+                </a:gridCol>
+                <a:gridCol w="4754880">
+                  <a:extLst>
+                    <a:ext uri="{9D8B030D-6E8A-4147-A177-3AD203B41FA5}">
+                      <a16:colId xmlns:a16="http://schemas.microsoft.com/office/drawing/2014/main" val="20001"/>
+                    </a:ext>
+                  </a:extLst>
+                </a:gridCol>
+                <a:gridCol w="2560320">
+                  <a:extLst>
+                    <a:ext uri="{9D8B030D-6E8A-4147-A177-3AD203B41FA5}">
+                      <a16:colId xmlns:a16="http://schemas.microsoft.com/office/drawing/2014/main" val="20002"/>
+                    </a:ext>
+                  </a:extLst>
+                </a:gridCol>
               </a:tblGrid>
               <a:tr h="365760">
                 <a:tc>
@@ -8631,7 +8319,7 @@
                     <a:bodyPr/>
                     <a:lstStyle/>
                     <a:p>
-                      <a:pPr algn="ctr" indent="0" marL="0">
+                      <a:pPr marL="0" indent="0" algn="ctr">
                         <a:buNone/>
                       </a:pPr>
                       <a:r>
@@ -8652,7 +8340,7 @@
                       </a:endParaRPr>
                     </a:p>
                   </a:txBody>
-                  <a:tcPr marL="91440" marR="91440" marT="45720" marB="45720" anchor="ctr">
+                  <a:tcPr anchor="ctr">
                     <a:lnL w="9525" cap="flat" cmpd="sng" algn="ctr">
                       <a:solidFill>
                         <a:srgbClr val="D9D9D9"/>
@@ -8699,7 +8387,7 @@
                     <a:bodyPr/>
                     <a:lstStyle/>
                     <a:p>
-                      <a:pPr algn="ctr" indent="0" marL="0">
+                      <a:pPr marL="0" indent="0" algn="ctr">
                         <a:buNone/>
                       </a:pPr>
                       <a:r>
@@ -8720,7 +8408,7 @@
                       </a:endParaRPr>
                     </a:p>
                   </a:txBody>
-                  <a:tcPr marL="91440" marR="91440" marT="45720" marB="45720" anchor="ctr">
+                  <a:tcPr anchor="ctr">
                     <a:lnL w="9525" cap="flat" cmpd="sng" algn="ctr">
                       <a:solidFill>
                         <a:srgbClr val="D9D9D9"/>
@@ -8767,7 +8455,7 @@
                     <a:bodyPr/>
                     <a:lstStyle/>
                     <a:p>
-                      <a:pPr algn="ctr" indent="0" marL="0">
+                      <a:pPr marL="0" indent="0" algn="ctr">
                         <a:buNone/>
                       </a:pPr>
                       <a:r>
@@ -8788,7 +8476,7 @@
                       </a:endParaRPr>
                     </a:p>
                   </a:txBody>
-                  <a:tcPr marL="91440" marR="91440" marT="45720" marB="45720" anchor="ctr">
+                  <a:tcPr anchor="ctr">
                     <a:lnL w="9525" cap="flat" cmpd="sng" algn="ctr">
                       <a:solidFill>
                         <a:srgbClr val="D9D9D9"/>
@@ -8830,6 +8518,11 @@
                     </a:solidFill>
                   </a:tcPr>
                 </a:tc>
+                <a:extLst>
+                  <a:ext uri="{0D108BD9-81ED-4DB2-BD59-A6C34878D82A}">
+                    <a16:rowId xmlns:a16="http://schemas.microsoft.com/office/drawing/2014/main" val="10000"/>
+                  </a:ext>
+                </a:extLst>
               </a:tr>
               <a:tr h="365760">
                 <a:tc>
@@ -8837,7 +8530,7 @@
                     <a:bodyPr/>
                     <a:lstStyle/>
                     <a:p>
-                      <a:pPr algn="ctr" indent="0" marL="0">
+                      <a:pPr marL="0" indent="0" algn="ctr">
                         <a:buNone/>
                       </a:pPr>
                       <a:r>
@@ -8858,7 +8551,7 @@
                       </a:endParaRPr>
                     </a:p>
                   </a:txBody>
-                  <a:tcPr marL="91440" marR="91440" marT="45720" marB="45720" anchor="ctr">
+                  <a:tcPr anchor="ctr">
                     <a:lnL w="9525" cap="flat" cmpd="sng" algn="ctr">
                       <a:solidFill>
                         <a:srgbClr val="D9D9D9"/>
@@ -8902,7 +8595,7 @@
                     <a:bodyPr/>
                     <a:lstStyle/>
                     <a:p>
-                      <a:pPr algn="l" indent="0" marL="0">
+                      <a:pPr marL="0" indent="0" algn="l">
                         <a:buNone/>
                       </a:pPr>
                       <a:r>
@@ -8923,7 +8616,7 @@
                       </a:endParaRPr>
                     </a:p>
                   </a:txBody>
-                  <a:tcPr marL="91440" marR="91440" marT="45720" marB="45720" anchor="ctr">
+                  <a:tcPr anchor="ctr">
                     <a:lnL w="9525" cap="flat" cmpd="sng" algn="ctr">
                       <a:solidFill>
                         <a:srgbClr val="D9D9D9"/>
@@ -8967,7 +8660,7 @@
                     <a:bodyPr/>
                     <a:lstStyle/>
                     <a:p>
-                      <a:pPr algn="ctr" indent="0" marL="0">
+                      <a:pPr marL="0" indent="0" algn="ctr">
                         <a:buNone/>
                       </a:pPr>
                       <a:r>
@@ -8988,7 +8681,7 @@
                       </a:endParaRPr>
                     </a:p>
                   </a:txBody>
-                  <a:tcPr marL="91440" marR="91440" marT="45720" marB="45720" anchor="ctr">
+                  <a:tcPr anchor="ctr">
                     <a:lnL w="9525" cap="flat" cmpd="sng" algn="ctr">
                       <a:solidFill>
                         <a:srgbClr val="D9D9D9"/>
@@ -9027,6 +8720,11 @@
                     </a:lnB>
                   </a:tcPr>
                 </a:tc>
+                <a:extLst>
+                  <a:ext uri="{0D108BD9-81ED-4DB2-BD59-A6C34878D82A}">
+                    <a16:rowId xmlns:a16="http://schemas.microsoft.com/office/drawing/2014/main" val="10001"/>
+                  </a:ext>
+                </a:extLst>
               </a:tr>
               <a:tr h="365760">
                 <a:tc>
@@ -9034,7 +8732,7 @@
                     <a:bodyPr/>
                     <a:lstStyle/>
                     <a:p>
-                      <a:pPr algn="ctr" indent="0" marL="0">
+                      <a:pPr marL="0" indent="0" algn="ctr">
                         <a:buNone/>
                       </a:pPr>
                       <a:r>
@@ -9055,7 +8753,7 @@
                       </a:endParaRPr>
                     </a:p>
                   </a:txBody>
-                  <a:tcPr marL="91440" marR="91440" marT="45720" marB="45720" anchor="ctr">
+                  <a:tcPr anchor="ctr">
                     <a:lnL w="9525" cap="flat" cmpd="sng" algn="ctr">
                       <a:solidFill>
                         <a:srgbClr val="D9D9D9"/>
@@ -9099,7 +8797,7 @@
                     <a:bodyPr/>
                     <a:lstStyle/>
                     <a:p>
-                      <a:pPr algn="l" indent="0" marL="0">
+                      <a:pPr marL="0" indent="0" algn="l">
                         <a:buNone/>
                       </a:pPr>
                       <a:r>
@@ -9120,7 +8818,7 @@
                       </a:endParaRPr>
                     </a:p>
                   </a:txBody>
-                  <a:tcPr marL="91440" marR="91440" marT="45720" marB="45720" anchor="ctr">
+                  <a:tcPr anchor="ctr">
                     <a:lnL w="9525" cap="flat" cmpd="sng" algn="ctr">
                       <a:solidFill>
                         <a:srgbClr val="D9D9D9"/>
@@ -9164,7 +8862,7 @@
                     <a:bodyPr/>
                     <a:lstStyle/>
                     <a:p>
-                      <a:pPr algn="ctr" indent="0" marL="0">
+                      <a:pPr marL="0" indent="0" algn="ctr">
                         <a:buNone/>
                       </a:pPr>
                       <a:r>
@@ -9185,7 +8883,7 @@
                       </a:endParaRPr>
                     </a:p>
                   </a:txBody>
-                  <a:tcPr marL="91440" marR="91440" marT="45720" marB="45720" anchor="ctr">
+                  <a:tcPr anchor="ctr">
                     <a:lnL w="9525" cap="flat" cmpd="sng" algn="ctr">
                       <a:solidFill>
                         <a:srgbClr val="D9D9D9"/>
@@ -9224,6 +8922,11 @@
                     </a:lnB>
                   </a:tcPr>
                 </a:tc>
+                <a:extLst>
+                  <a:ext uri="{0D108BD9-81ED-4DB2-BD59-A6C34878D82A}">
+                    <a16:rowId xmlns:a16="http://schemas.microsoft.com/office/drawing/2014/main" val="10002"/>
+                  </a:ext>
+                </a:extLst>
               </a:tr>
               <a:tr h="365760">
                 <a:tc>
@@ -9231,7 +8934,7 @@
                     <a:bodyPr/>
                     <a:lstStyle/>
                     <a:p>
-                      <a:pPr algn="ctr" indent="0" marL="0">
+                      <a:pPr marL="0" indent="0" algn="ctr">
                         <a:buNone/>
                       </a:pPr>
                       <a:r>
@@ -9252,7 +8955,7 @@
                       </a:endParaRPr>
                     </a:p>
                   </a:txBody>
-                  <a:tcPr marL="91440" marR="91440" marT="45720" marB="45720" anchor="ctr">
+                  <a:tcPr anchor="ctr">
                     <a:lnL w="9525" cap="flat" cmpd="sng" algn="ctr">
                       <a:solidFill>
                         <a:srgbClr val="D9D9D9"/>
@@ -9296,7 +8999,7 @@
                     <a:bodyPr/>
                     <a:lstStyle/>
                     <a:p>
-                      <a:pPr algn="l" indent="0" marL="0">
+                      <a:pPr marL="0" indent="0" algn="l">
                         <a:buNone/>
                       </a:pPr>
                       <a:r>
@@ -9317,7 +9020,7 @@
                       </a:endParaRPr>
                     </a:p>
                   </a:txBody>
-                  <a:tcPr marL="91440" marR="91440" marT="45720" marB="45720" anchor="ctr">
+                  <a:tcPr anchor="ctr">
                     <a:lnL w="9525" cap="flat" cmpd="sng" algn="ctr">
                       <a:solidFill>
                         <a:srgbClr val="D9D9D9"/>
@@ -9361,7 +9064,7 @@
                     <a:bodyPr/>
                     <a:lstStyle/>
                     <a:p>
-                      <a:pPr algn="ctr" indent="0" marL="0">
+                      <a:pPr marL="0" indent="0" algn="ctr">
                         <a:buNone/>
                       </a:pPr>
                       <a:r>
@@ -9382,7 +9085,7 @@
                       </a:endParaRPr>
                     </a:p>
                   </a:txBody>
-                  <a:tcPr marL="91440" marR="91440" marT="45720" marB="45720" anchor="ctr">
+                  <a:tcPr anchor="ctr">
                     <a:lnL w="9525" cap="flat" cmpd="sng" algn="ctr">
                       <a:solidFill>
                         <a:srgbClr val="D9D9D9"/>
@@ -9421,6 +9124,11 @@
                     </a:lnB>
                   </a:tcPr>
                 </a:tc>
+                <a:extLst>
+                  <a:ext uri="{0D108BD9-81ED-4DB2-BD59-A6C34878D82A}">
+                    <a16:rowId xmlns:a16="http://schemas.microsoft.com/office/drawing/2014/main" val="10003"/>
+                  </a:ext>
+                </a:extLst>
               </a:tr>
               <a:tr h="365760">
                 <a:tc>
@@ -9428,7 +9136,7 @@
                     <a:bodyPr/>
                     <a:lstStyle/>
                     <a:p>
-                      <a:pPr algn="ctr" indent="0" marL="0">
+                      <a:pPr marL="0" indent="0" algn="ctr">
                         <a:buNone/>
                       </a:pPr>
                       <a:r>
@@ -9449,7 +9157,7 @@
                       </a:endParaRPr>
                     </a:p>
                   </a:txBody>
-                  <a:tcPr marL="91440" marR="91440" marT="45720" marB="45720" anchor="ctr">
+                  <a:tcPr anchor="ctr">
                     <a:lnL w="9525" cap="flat" cmpd="sng" algn="ctr">
                       <a:solidFill>
                         <a:srgbClr val="D9D9D9"/>
@@ -9493,7 +9201,7 @@
                     <a:bodyPr/>
                     <a:lstStyle/>
                     <a:p>
-                      <a:pPr algn="l" indent="0" marL="0">
+                      <a:pPr marL="0" indent="0" algn="l">
                         <a:buNone/>
                       </a:pPr>
                       <a:r>
@@ -9514,7 +9222,7 @@
                       </a:endParaRPr>
                     </a:p>
                   </a:txBody>
-                  <a:tcPr marL="91440" marR="91440" marT="45720" marB="45720" anchor="ctr">
+                  <a:tcPr anchor="ctr">
                     <a:lnL w="9525" cap="flat" cmpd="sng" algn="ctr">
                       <a:solidFill>
                         <a:srgbClr val="D9D9D9"/>
@@ -9558,7 +9266,7 @@
                     <a:bodyPr/>
                     <a:lstStyle/>
                     <a:p>
-                      <a:pPr algn="ctr" indent="0" marL="0">
+                      <a:pPr marL="0" indent="0" algn="ctr">
                         <a:buNone/>
                       </a:pPr>
                       <a:r>
@@ -9579,7 +9287,7 @@
                       </a:endParaRPr>
                     </a:p>
                   </a:txBody>
-                  <a:tcPr marL="91440" marR="91440" marT="45720" marB="45720" anchor="ctr">
+                  <a:tcPr anchor="ctr">
                     <a:lnL w="9525" cap="flat" cmpd="sng" algn="ctr">
                       <a:solidFill>
                         <a:srgbClr val="D9D9D9"/>
@@ -9618,6 +9326,11 @@
                     </a:lnB>
                   </a:tcPr>
                 </a:tc>
+                <a:extLst>
+                  <a:ext uri="{0D108BD9-81ED-4DB2-BD59-A6C34878D82A}">
+                    <a16:rowId xmlns:a16="http://schemas.microsoft.com/office/drawing/2014/main" val="10004"/>
+                  </a:ext>
+                </a:extLst>
               </a:tr>
               <a:tr h="365760">
                 <a:tc>
@@ -9625,7 +9338,7 @@
                     <a:bodyPr/>
                     <a:lstStyle/>
                     <a:p>
-                      <a:pPr algn="ctr" indent="0" marL="0">
+                      <a:pPr marL="0" indent="0" algn="ctr">
                         <a:buNone/>
                       </a:pPr>
                       <a:r>
@@ -9646,7 +9359,7 @@
                       </a:endParaRPr>
                     </a:p>
                   </a:txBody>
-                  <a:tcPr marL="91440" marR="91440" marT="45720" marB="45720" anchor="ctr">
+                  <a:tcPr anchor="ctr">
                     <a:lnL w="9525" cap="flat" cmpd="sng" algn="ctr">
                       <a:solidFill>
                         <a:srgbClr val="D9D9D9"/>
@@ -9690,7 +9403,7 @@
                     <a:bodyPr/>
                     <a:lstStyle/>
                     <a:p>
-                      <a:pPr algn="l" indent="0" marL="0">
+                      <a:pPr marL="0" indent="0" algn="l">
                         <a:buNone/>
                       </a:pPr>
                       <a:r>
@@ -9711,7 +9424,7 @@
                       </a:endParaRPr>
                     </a:p>
                   </a:txBody>
-                  <a:tcPr marL="91440" marR="91440" marT="45720" marB="45720" anchor="ctr">
+                  <a:tcPr anchor="ctr">
                     <a:lnL w="9525" cap="flat" cmpd="sng" algn="ctr">
                       <a:solidFill>
                         <a:srgbClr val="D9D9D9"/>
@@ -9755,7 +9468,7 @@
                     <a:bodyPr/>
                     <a:lstStyle/>
                     <a:p>
-                      <a:pPr algn="ctr" indent="0" marL="0">
+                      <a:pPr marL="0" indent="0" algn="ctr">
                         <a:buNone/>
                       </a:pPr>
                       <a:r>
@@ -9776,7 +9489,7 @@
                       </a:endParaRPr>
                     </a:p>
                   </a:txBody>
-                  <a:tcPr marL="91440" marR="91440" marT="45720" marB="45720" anchor="ctr">
+                  <a:tcPr anchor="ctr">
                     <a:lnL w="9525" cap="flat" cmpd="sng" algn="ctr">
                       <a:solidFill>
                         <a:srgbClr val="D9D9D9"/>
@@ -9815,6 +9528,11 @@
                     </a:lnB>
                   </a:tcPr>
                 </a:tc>
+                <a:extLst>
+                  <a:ext uri="{0D108BD9-81ED-4DB2-BD59-A6C34878D82A}">
+                    <a16:rowId xmlns:a16="http://schemas.microsoft.com/office/drawing/2014/main" val="10005"/>
+                  </a:ext>
+                </a:extLst>
               </a:tr>
               <a:tr h="365760">
                 <a:tc>
@@ -9822,7 +9540,7 @@
                     <a:bodyPr/>
                     <a:lstStyle/>
                     <a:p>
-                      <a:pPr algn="ctr" indent="0" marL="0">
+                      <a:pPr marL="0" indent="0" algn="ctr">
                         <a:buNone/>
                       </a:pPr>
                       <a:r>
@@ -9843,7 +9561,7 @@
                       </a:endParaRPr>
                     </a:p>
                   </a:txBody>
-                  <a:tcPr marL="91440" marR="91440" marT="45720" marB="45720" anchor="ctr">
+                  <a:tcPr anchor="ctr">
                     <a:lnL w="9525" cap="flat" cmpd="sng" algn="ctr">
                       <a:solidFill>
                         <a:srgbClr val="D9D9D9"/>
@@ -9887,7 +9605,7 @@
                     <a:bodyPr/>
                     <a:lstStyle/>
                     <a:p>
-                      <a:pPr algn="l" indent="0" marL="0">
+                      <a:pPr marL="0" indent="0" algn="l">
                         <a:buNone/>
                       </a:pPr>
                       <a:r>
@@ -9908,7 +9626,7 @@
                       </a:endParaRPr>
                     </a:p>
                   </a:txBody>
-                  <a:tcPr marL="91440" marR="91440" marT="45720" marB="45720" anchor="ctr">
+                  <a:tcPr anchor="ctr">
                     <a:lnL w="9525" cap="flat" cmpd="sng" algn="ctr">
                       <a:solidFill>
                         <a:srgbClr val="D9D9D9"/>
@@ -9952,7 +9670,7 @@
                     <a:bodyPr/>
                     <a:lstStyle/>
                     <a:p>
-                      <a:pPr algn="ctr" indent="0" marL="0">
+                      <a:pPr marL="0" indent="0" algn="ctr">
                         <a:buNone/>
                       </a:pPr>
                       <a:r>
@@ -9973,7 +9691,7 @@
                       </a:endParaRPr>
                     </a:p>
                   </a:txBody>
-                  <a:tcPr marL="91440" marR="91440" marT="45720" marB="45720" anchor="ctr">
+                  <a:tcPr anchor="ctr">
                     <a:lnL w="9525" cap="flat" cmpd="sng" algn="ctr">
                       <a:solidFill>
                         <a:srgbClr val="D9D9D9"/>
@@ -10012,6 +9730,11 @@
                     </a:lnB>
                   </a:tcPr>
                 </a:tc>
+                <a:extLst>
+                  <a:ext uri="{0D108BD9-81ED-4DB2-BD59-A6C34878D82A}">
+                    <a16:rowId xmlns:a16="http://schemas.microsoft.com/office/drawing/2014/main" val="10006"/>
+                  </a:ext>
+                </a:extLst>
               </a:tr>
               <a:tr h="365760">
                 <a:tc>
@@ -10019,7 +9742,7 @@
                     <a:bodyPr/>
                     <a:lstStyle/>
                     <a:p>
-                      <a:pPr algn="ctr" indent="0" marL="0">
+                      <a:pPr marL="0" indent="0" algn="ctr">
                         <a:buNone/>
                       </a:pPr>
                       <a:r>
@@ -10040,7 +9763,7 @@
                       </a:endParaRPr>
                     </a:p>
                   </a:txBody>
-                  <a:tcPr marL="91440" marR="91440" marT="45720" marB="45720" anchor="ctr">
+                  <a:tcPr anchor="ctr">
                     <a:lnL w="9525" cap="flat" cmpd="sng" algn="ctr">
                       <a:solidFill>
                         <a:srgbClr val="D9D9D9"/>
@@ -10084,7 +9807,7 @@
                     <a:bodyPr/>
                     <a:lstStyle/>
                     <a:p>
-                      <a:pPr algn="l" indent="0" marL="0">
+                      <a:pPr marL="0" indent="0" algn="l">
                         <a:buNone/>
                       </a:pPr>
                       <a:r>
@@ -10105,7 +9828,7 @@
                       </a:endParaRPr>
                     </a:p>
                   </a:txBody>
-                  <a:tcPr marL="91440" marR="91440" marT="45720" marB="45720" anchor="ctr">
+                  <a:tcPr anchor="ctr">
                     <a:lnL w="9525" cap="flat" cmpd="sng" algn="ctr">
                       <a:solidFill>
                         <a:srgbClr val="D9D9D9"/>
@@ -10149,7 +9872,7 @@
                     <a:bodyPr/>
                     <a:lstStyle/>
                     <a:p>
-                      <a:pPr algn="ctr" indent="0" marL="0">
+                      <a:pPr marL="0" indent="0" algn="ctr">
                         <a:buNone/>
                       </a:pPr>
                       <a:r>
@@ -10170,7 +9893,7 @@
                       </a:endParaRPr>
                     </a:p>
                   </a:txBody>
-                  <a:tcPr marL="91440" marR="91440" marT="45720" marB="45720" anchor="ctr">
+                  <a:tcPr anchor="ctr">
                     <a:lnL w="9525" cap="flat" cmpd="sng" algn="ctr">
                       <a:solidFill>
                         <a:srgbClr val="D9D9D9"/>
@@ -10209,6 +9932,11 @@
                     </a:lnB>
                   </a:tcPr>
                 </a:tc>
+                <a:extLst>
+                  <a:ext uri="{0D108BD9-81ED-4DB2-BD59-A6C34878D82A}">
+                    <a16:rowId xmlns:a16="http://schemas.microsoft.com/office/drawing/2014/main" val="10007"/>
+                  </a:ext>
+                </a:extLst>
               </a:tr>
               <a:tr h="365760">
                 <a:tc>
@@ -10216,7 +9944,7 @@
                     <a:bodyPr/>
                     <a:lstStyle/>
                     <a:p>
-                      <a:pPr algn="ctr" indent="0" marL="0">
+                      <a:pPr marL="0" indent="0" algn="ctr">
                         <a:buNone/>
                       </a:pPr>
                       <a:r>
@@ -10237,7 +9965,7 @@
                       </a:endParaRPr>
                     </a:p>
                   </a:txBody>
-                  <a:tcPr marL="91440" marR="91440" marT="45720" marB="45720" anchor="ctr">
+                  <a:tcPr anchor="ctr">
                     <a:lnL w="9525" cap="flat" cmpd="sng" algn="ctr">
                       <a:solidFill>
                         <a:srgbClr val="D9D9D9"/>
@@ -10281,7 +10009,7 @@
                     <a:bodyPr/>
                     <a:lstStyle/>
                     <a:p>
-                      <a:pPr algn="l" indent="0" marL="0">
+                      <a:pPr marL="0" indent="0" algn="l">
                         <a:buNone/>
                       </a:pPr>
                       <a:r>
@@ -10302,7 +10030,7 @@
                       </a:endParaRPr>
                     </a:p>
                   </a:txBody>
-                  <a:tcPr marL="91440" marR="91440" marT="45720" marB="45720" anchor="ctr">
+                  <a:tcPr anchor="ctr">
                     <a:lnL w="9525" cap="flat" cmpd="sng" algn="ctr">
                       <a:solidFill>
                         <a:srgbClr val="D9D9D9"/>
@@ -10346,7 +10074,7 @@
                     <a:bodyPr/>
                     <a:lstStyle/>
                     <a:p>
-                      <a:pPr algn="ctr" indent="0" marL="0">
+                      <a:pPr marL="0" indent="0" algn="ctr">
                         <a:buNone/>
                       </a:pPr>
                       <a:r>
@@ -10367,7 +10095,7 @@
                       </a:endParaRPr>
                     </a:p>
                   </a:txBody>
-                  <a:tcPr marL="91440" marR="91440" marT="45720" marB="45720" anchor="ctr">
+                  <a:tcPr anchor="ctr">
                     <a:lnL w="9525" cap="flat" cmpd="sng" algn="ctr">
                       <a:solidFill>
                         <a:srgbClr val="D9D9D9"/>
@@ -10406,6 +10134,11 @@
                     </a:lnB>
                   </a:tcPr>
                 </a:tc>
+                <a:extLst>
+                  <a:ext uri="{0D108BD9-81ED-4DB2-BD59-A6C34878D82A}">
+                    <a16:rowId xmlns:a16="http://schemas.microsoft.com/office/drawing/2014/main" val="10008"/>
+                  </a:ext>
+                </a:extLst>
               </a:tr>
             </a:tbl>
           </a:graphicData>
@@ -10457,11 +10190,11 @@
           <a:bodyPr wrap="square" lIns="0" tIns="0" rIns="0" bIns="0" rtlCol="0" anchor="ctr"/>
           <a:lstStyle/>
           <a:p>
-            <a:pPr indent="0" marL="0">
-              <a:buNone/>
-            </a:pPr>
-            <a:r>
-              <a:rPr lang="en-US" sz="1100" b="1" spc="200" kern="0" dirty="0">
+            <a:pPr marL="0" indent="0">
+              <a:buNone/>
+            </a:pPr>
+            <a:r>
+              <a:rPr lang="en-US" sz="1100" b="1" kern="0" spc="200" dirty="0">
                 <a:solidFill>
                   <a:srgbClr val="028090"/>
                 </a:solidFill>
@@ -10496,7 +10229,7 @@
           <a:bodyPr wrap="square" lIns="0" tIns="0" rIns="0" bIns="0" rtlCol="0" anchor="ctr"/>
           <a:lstStyle/>
           <a:p>
-            <a:pPr indent="0" marL="0">
+            <a:pPr marL="0" indent="0">
               <a:buNone/>
             </a:pPr>
             <a:r>
@@ -10535,7 +10268,7 @@
           <a:bodyPr wrap="square" lIns="0" tIns="0" rIns="0" bIns="0" rtlCol="0" anchor="ctr"/>
           <a:lstStyle/>
           <a:p>
-            <a:pPr indent="0" marL="0">
+            <a:pPr marL="0" indent="0">
               <a:buNone/>
             </a:pPr>
             <a:r>
@@ -10574,7 +10307,7 @@
           <a:bodyPr wrap="square" lIns="0" tIns="0" rIns="0" bIns="0" rtlCol="0" anchor="ctr"/>
           <a:lstStyle/>
           <a:p>
-            <a:pPr algn="r" indent="0" marL="0">
+            <a:pPr marL="0" indent="0" algn="r">
               <a:buNone/>
             </a:pPr>
             <a:r>
@@ -10618,6 +10351,13 @@
             <a:prstDash val="solid"/>
           </a:ln>
         </p:spPr>
+        <p:txBody>
+          <a:bodyPr/>
+          <a:lstStyle/>
+          <a:p>
+            <a:endParaRPr lang="en-IN"/>
+          </a:p>
+        </p:txBody>
       </p:sp>
       <p:sp>
         <p:nvSpPr>
@@ -10640,7 +10380,7 @@
           <a:bodyPr wrap="square" lIns="0" tIns="0" rIns="0" bIns="0" rtlCol="0" anchor="t"/>
           <a:lstStyle/>
           <a:p>
-            <a:pPr indent="0" marL="0">
+            <a:pPr marL="0" indent="0">
               <a:lnSpc>
                 <a:spcPct val="100000"/>
               </a:lnSpc>
@@ -10660,7 +10400,7 @@
             <a:endParaRPr lang="en-US" sz="1250" dirty="0"/>
           </a:p>
           <a:p>
-            <a:pPr indent="0" marL="0">
+            <a:pPr marL="0" indent="0">
               <a:lnSpc>
                 <a:spcPct val="100000"/>
               </a:lnSpc>
@@ -10680,7 +10420,7 @@
             <a:endParaRPr lang="en-US" sz="1250" dirty="0"/>
           </a:p>
           <a:p>
-            <a:pPr indent="0" marL="0">
+            <a:pPr marL="0" indent="0">
               <a:lnSpc>
                 <a:spcPct val="100000"/>
               </a:lnSpc>
@@ -10689,7 +10429,7 @@
             <a:endParaRPr lang="en-US" sz="1250" dirty="0"/>
           </a:p>
           <a:p>
-            <a:pPr indent="0" marL="0">
+            <a:pPr marL="0" indent="0">
               <a:lnSpc>
                 <a:spcPct val="100000"/>
               </a:lnSpc>
@@ -10709,7 +10449,7 @@
             <a:endParaRPr lang="en-US" sz="1250" dirty="0"/>
           </a:p>
           <a:p>
-            <a:pPr indent="0" marL="0">
+            <a:pPr marL="0" indent="0">
               <a:lnSpc>
                 <a:spcPct val="100000"/>
               </a:lnSpc>
@@ -10729,7 +10469,7 @@
             <a:endParaRPr lang="en-US" sz="1250" dirty="0"/>
           </a:p>
           <a:p>
-            <a:pPr indent="0" marL="0">
+            <a:pPr marL="0" indent="0">
               <a:lnSpc>
                 <a:spcPct val="100000"/>
               </a:lnSpc>
@@ -10749,7 +10489,7 @@
             <a:endParaRPr lang="en-US" sz="1250" dirty="0"/>
           </a:p>
           <a:p>
-            <a:pPr indent="0" marL="0">
+            <a:pPr marL="0" indent="0">
               <a:lnSpc>
                 <a:spcPct val="100000"/>
               </a:lnSpc>
@@ -10769,7 +10509,7 @@
             <a:endParaRPr lang="en-US" sz="1250" dirty="0"/>
           </a:p>
           <a:p>
-            <a:pPr indent="0" marL="0">
+            <a:pPr marL="0" indent="0">
               <a:lnSpc>
                 <a:spcPct val="100000"/>
               </a:lnSpc>
@@ -10789,7 +10529,7 @@
             <a:endParaRPr lang="en-US" sz="1250" dirty="0"/>
           </a:p>
           <a:p>
-            <a:pPr indent="0" marL="0">
+            <a:pPr marL="0" indent="0">
               <a:lnSpc>
                 <a:spcPct val="100000"/>
               </a:lnSpc>
@@ -10798,7 +10538,7 @@
             <a:endParaRPr lang="en-US" sz="1250" dirty="0"/>
           </a:p>
           <a:p>
-            <a:pPr indent="0" marL="0">
+            <a:pPr marL="0" indent="0">
               <a:lnSpc>
                 <a:spcPct val="100000"/>
               </a:lnSpc>
@@ -10818,7 +10558,7 @@
             <a:endParaRPr lang="en-US" sz="1250" dirty="0"/>
           </a:p>
           <a:p>
-            <a:pPr indent="0" marL="0">
+            <a:pPr marL="0" indent="0">
               <a:lnSpc>
                 <a:spcPct val="100000"/>
               </a:lnSpc>
@@ -10838,7 +10578,7 @@
             <a:endParaRPr lang="en-US" sz="1250" dirty="0"/>
           </a:p>
           <a:p>
-            <a:pPr indent="0" marL="0">
+            <a:pPr marL="0" indent="0">
               <a:lnSpc>
                 <a:spcPct val="100000"/>
               </a:lnSpc>
@@ -10858,7 +10598,7 @@
             <a:endParaRPr lang="en-US" sz="1250" dirty="0"/>
           </a:p>
           <a:p>
-            <a:pPr indent="0" marL="0">
+            <a:pPr marL="0" indent="0">
               <a:lnSpc>
                 <a:spcPct val="100000"/>
               </a:lnSpc>
@@ -10878,7 +10618,7 @@
             <a:endParaRPr lang="en-US" sz="1250" dirty="0"/>
           </a:p>
           <a:p>
-            <a:pPr indent="0" marL="0">
+            <a:pPr marL="0" indent="0">
               <a:lnSpc>
                 <a:spcPct val="100000"/>
               </a:lnSpc>
@@ -10898,7 +10638,7 @@
             <a:endParaRPr lang="en-US" sz="1250" dirty="0"/>
           </a:p>
           <a:p>
-            <a:pPr indent="0" marL="0">
+            <a:pPr marL="0" indent="0">
               <a:lnSpc>
                 <a:spcPct val="100000"/>
               </a:lnSpc>
@@ -11030,6 +10770,13 @@
             <a:prstDash val="solid"/>
           </a:ln>
         </p:spPr>
+        <p:txBody>
+          <a:bodyPr/>
+          <a:lstStyle/>
+          <a:p>
+            <a:endParaRPr lang="en-IN"/>
+          </a:p>
+        </p:txBody>
       </p:sp>
       <p:sp>
         <p:nvSpPr>
@@ -11052,7 +10799,7 @@
           <a:bodyPr wrap="square" lIns="0" tIns="0" rIns="0" bIns="0" rtlCol="0" anchor="ctr"/>
           <a:lstStyle/>
           <a:p>
-            <a:pPr indent="0" marL="0">
+            <a:pPr marL="0" indent="0">
               <a:buNone/>
             </a:pPr>
             <a:r>
@@ -11066,9 +10813,6 @@
               </a:rPr>
               <a:t>ASK   </a:t>
             </a:r>
-            <a:pPr indent="0" marL="0">
-              <a:buNone/>
-            </a:pPr>
             <a:r>
               <a:rPr lang="en-US" sz="1250" i="1" dirty="0">
                 <a:solidFill>
@@ -11130,11 +10874,11 @@
           <a:bodyPr wrap="square" lIns="0" tIns="0" rIns="0" bIns="0" rtlCol="0" anchor="ctr"/>
           <a:lstStyle/>
           <a:p>
-            <a:pPr indent="0" marL="0">
-              <a:buNone/>
-            </a:pPr>
-            <a:r>
-              <a:rPr lang="en-US" sz="1100" b="1" spc="200" kern="0" dirty="0">
+            <a:pPr marL="0" indent="0">
+              <a:buNone/>
+            </a:pPr>
+            <a:r>
+              <a:rPr lang="en-US" sz="1100" b="1" kern="0" spc="200" dirty="0">
                 <a:solidFill>
                   <a:srgbClr val="028090"/>
                 </a:solidFill>
@@ -11169,7 +10913,7 @@
           <a:bodyPr wrap="square" lIns="0" tIns="0" rIns="0" bIns="0" rtlCol="0" anchor="ctr"/>
           <a:lstStyle/>
           <a:p>
-            <a:pPr indent="0" marL="0">
+            <a:pPr marL="0" indent="0">
               <a:buNone/>
             </a:pPr>
             <a:r>
@@ -11208,7 +10952,7 @@
           <a:bodyPr wrap="square" lIns="0" tIns="0" rIns="0" bIns="0" rtlCol="0" anchor="ctr"/>
           <a:lstStyle/>
           <a:p>
-            <a:pPr indent="0" marL="0">
+            <a:pPr marL="0" indent="0">
               <a:buNone/>
             </a:pPr>
             <a:r>
@@ -11247,7 +10991,7 @@
           <a:bodyPr wrap="square" lIns="0" tIns="0" rIns="0" bIns="0" rtlCol="0" anchor="ctr"/>
           <a:lstStyle/>
           <a:p>
-            <a:pPr algn="r" indent="0" marL="0">
+            <a:pPr marL="0" indent="0" algn="r">
               <a:buNone/>
             </a:pPr>
             <a:r>
@@ -11291,6 +11035,13 @@
             <a:prstDash val="solid"/>
           </a:ln>
         </p:spPr>
+        <p:txBody>
+          <a:bodyPr/>
+          <a:lstStyle/>
+          <a:p>
+            <a:endParaRPr lang="en-IN"/>
+          </a:p>
+        </p:txBody>
       </p:sp>
       <p:sp>
         <p:nvSpPr>
@@ -11313,7 +11064,7 @@
           <a:bodyPr wrap="square" lIns="0" tIns="0" rIns="0" bIns="0" rtlCol="0" anchor="t"/>
           <a:lstStyle/>
           <a:p>
-            <a:pPr indent="0" marL="0">
+            <a:pPr marL="0" indent="0">
               <a:lnSpc>
                 <a:spcPct val="100000"/>
               </a:lnSpc>
@@ -11333,7 +11084,7 @@
             <a:endParaRPr lang="en-US" sz="1050" dirty="0"/>
           </a:p>
           <a:p>
-            <a:pPr indent="0" marL="0">
+            <a:pPr marL="0" indent="0">
               <a:lnSpc>
                 <a:spcPct val="100000"/>
               </a:lnSpc>
@@ -11353,7 +11104,7 @@
             <a:endParaRPr lang="en-US" sz="1050" dirty="0"/>
           </a:p>
           <a:p>
-            <a:pPr indent="0" marL="0">
+            <a:pPr marL="0" indent="0">
               <a:lnSpc>
                 <a:spcPct val="100000"/>
               </a:lnSpc>
@@ -11373,7 +11124,7 @@
             <a:endParaRPr lang="en-US" sz="1050" dirty="0"/>
           </a:p>
           <a:p>
-            <a:pPr indent="0" marL="0">
+            <a:pPr marL="0" indent="0">
               <a:lnSpc>
                 <a:spcPct val="100000"/>
               </a:lnSpc>
@@ -11393,7 +11144,7 @@
             <a:endParaRPr lang="en-US" sz="1050" dirty="0"/>
           </a:p>
           <a:p>
-            <a:pPr indent="0" marL="0">
+            <a:pPr marL="0" indent="0">
               <a:lnSpc>
                 <a:spcPct val="100000"/>
               </a:lnSpc>
@@ -11413,7 +11164,7 @@
             <a:endParaRPr lang="en-US" sz="1050" dirty="0"/>
           </a:p>
           <a:p>
-            <a:pPr indent="0" marL="0">
+            <a:pPr marL="0" indent="0">
               <a:lnSpc>
                 <a:spcPct val="100000"/>
               </a:lnSpc>
@@ -11422,7 +11173,7 @@
             <a:endParaRPr lang="en-US" sz="1050" dirty="0"/>
           </a:p>
           <a:p>
-            <a:pPr indent="0" marL="0">
+            <a:pPr marL="0" indent="0">
               <a:lnSpc>
                 <a:spcPct val="100000"/>
               </a:lnSpc>
@@ -11442,7 +11193,7 @@
             <a:endParaRPr lang="en-US" sz="1050" dirty="0"/>
           </a:p>
           <a:p>
-            <a:pPr indent="0" marL="0">
+            <a:pPr marL="0" indent="0">
               <a:lnSpc>
                 <a:spcPct val="100000"/>
               </a:lnSpc>
@@ -11462,7 +11213,7 @@
             <a:endParaRPr lang="en-US" sz="1050" dirty="0"/>
           </a:p>
           <a:p>
-            <a:pPr indent="0" marL="0">
+            <a:pPr marL="0" indent="0">
               <a:lnSpc>
                 <a:spcPct val="100000"/>
               </a:lnSpc>
@@ -11471,7 +11222,7 @@
             <a:endParaRPr lang="en-US" sz="1050" dirty="0"/>
           </a:p>
           <a:p>
-            <a:pPr indent="0" marL="0">
+            <a:pPr marL="0" indent="0">
               <a:lnSpc>
                 <a:spcPct val="100000"/>
               </a:lnSpc>
@@ -11491,7 +11242,7 @@
             <a:endParaRPr lang="en-US" sz="1050" dirty="0"/>
           </a:p>
           <a:p>
-            <a:pPr indent="0" marL="0">
+            <a:pPr marL="0" indent="0">
               <a:lnSpc>
                 <a:spcPct val="100000"/>
               </a:lnSpc>
@@ -11511,7 +11262,7 @@
             <a:endParaRPr lang="en-US" sz="1050" dirty="0"/>
           </a:p>
           <a:p>
-            <a:pPr indent="0" marL="0">
+            <a:pPr marL="0" indent="0">
               <a:lnSpc>
                 <a:spcPct val="100000"/>
               </a:lnSpc>
@@ -11531,7 +11282,7 @@
             <a:endParaRPr lang="en-US" sz="1050" dirty="0"/>
           </a:p>
           <a:p>
-            <a:pPr indent="0" marL="0">
+            <a:pPr marL="0" indent="0">
               <a:lnSpc>
                 <a:spcPct val="100000"/>
               </a:lnSpc>
@@ -11551,7 +11302,7 @@
             <a:endParaRPr lang="en-US" sz="1050" dirty="0"/>
           </a:p>
           <a:p>
-            <a:pPr indent="0" marL="0">
+            <a:pPr marL="0" indent="0">
               <a:lnSpc>
                 <a:spcPct val="100000"/>
               </a:lnSpc>
@@ -11571,7 +11322,7 @@
             <a:endParaRPr lang="en-US" sz="1050" dirty="0"/>
           </a:p>
           <a:p>
-            <a:pPr indent="0" marL="0">
+            <a:pPr marL="0" indent="0">
               <a:lnSpc>
                 <a:spcPct val="100000"/>
               </a:lnSpc>
@@ -11591,7 +11342,7 @@
             <a:endParaRPr lang="en-US" sz="1050" dirty="0"/>
           </a:p>
           <a:p>
-            <a:pPr indent="0" marL="0">
+            <a:pPr marL="0" indent="0">
               <a:lnSpc>
                 <a:spcPct val="100000"/>
               </a:lnSpc>
@@ -11600,7 +11351,7 @@
             <a:endParaRPr lang="en-US" sz="1050" dirty="0"/>
           </a:p>
           <a:p>
-            <a:pPr indent="0" marL="0">
+            <a:pPr marL="0" indent="0">
               <a:lnSpc>
                 <a:spcPct val="100000"/>
               </a:lnSpc>
@@ -11620,7 +11371,7 @@
             <a:endParaRPr lang="en-US" sz="1050" dirty="0"/>
           </a:p>
           <a:p>
-            <a:pPr indent="0" marL="0">
+            <a:pPr marL="0" indent="0">
               <a:lnSpc>
                 <a:spcPct val="100000"/>
               </a:lnSpc>
@@ -11640,7 +11391,7 @@
             <a:endParaRPr lang="en-US" sz="1050" dirty="0"/>
           </a:p>
           <a:p>
-            <a:pPr indent="0" marL="0">
+            <a:pPr marL="0" indent="0">
               <a:lnSpc>
                 <a:spcPct val="100000"/>
               </a:lnSpc>
@@ -11660,7 +11411,7 @@
             <a:endParaRPr lang="en-US" sz="1050" dirty="0"/>
           </a:p>
           <a:p>
-            <a:pPr indent="0" marL="0">
+            <a:pPr marL="0" indent="0">
               <a:lnSpc>
                 <a:spcPct val="100000"/>
               </a:lnSpc>
@@ -11680,7 +11431,7 @@
             <a:endParaRPr lang="en-US" sz="1050" dirty="0"/>
           </a:p>
           <a:p>
-            <a:pPr indent="0" marL="0">
+            <a:pPr marL="0" indent="0">
               <a:lnSpc>
                 <a:spcPct val="100000"/>
               </a:lnSpc>
@@ -11700,7 +11451,7 @@
             <a:endParaRPr lang="en-US" sz="1050" dirty="0"/>
           </a:p>
           <a:p>
-            <a:pPr indent="0" marL="0">
+            <a:pPr marL="0" indent="0">
               <a:lnSpc>
                 <a:spcPct val="100000"/>
               </a:lnSpc>
@@ -11720,7 +11471,7 @@
             <a:endParaRPr lang="en-US" sz="1050" dirty="0"/>
           </a:p>
           <a:p>
-            <a:pPr indent="0" marL="0">
+            <a:pPr marL="0" indent="0">
               <a:lnSpc>
                 <a:spcPct val="100000"/>
               </a:lnSpc>
@@ -11740,7 +11491,7 @@
             <a:endParaRPr lang="en-US" sz="1050" dirty="0"/>
           </a:p>
           <a:p>
-            <a:pPr indent="0" marL="0">
+            <a:pPr marL="0" indent="0">
               <a:lnSpc>
                 <a:spcPct val="100000"/>
               </a:lnSpc>
@@ -11913,11 +11664,11 @@
           <a:bodyPr wrap="square" lIns="0" tIns="0" rIns="0" bIns="0" rtlCol="0" anchor="ctr"/>
           <a:lstStyle/>
           <a:p>
-            <a:pPr indent="0" marL="0">
-              <a:buNone/>
-            </a:pPr>
-            <a:r>
-              <a:rPr lang="en-US" sz="1100" b="1" spc="200" kern="0" dirty="0">
+            <a:pPr marL="0" indent="0">
+              <a:buNone/>
+            </a:pPr>
+            <a:r>
+              <a:rPr lang="en-US" sz="1100" b="1" kern="0" spc="200" dirty="0">
                 <a:solidFill>
                   <a:srgbClr val="028090"/>
                 </a:solidFill>
@@ -11952,7 +11703,7 @@
           <a:bodyPr wrap="square" lIns="0" tIns="0" rIns="0" bIns="0" rtlCol="0" anchor="ctr"/>
           <a:lstStyle/>
           <a:p>
-            <a:pPr indent="0" marL="0">
+            <a:pPr marL="0" indent="0">
               <a:buNone/>
             </a:pPr>
             <a:r>
@@ -11991,7 +11742,7 @@
           <a:bodyPr wrap="square" lIns="0" tIns="0" rIns="0" bIns="0" rtlCol="0" anchor="ctr"/>
           <a:lstStyle/>
           <a:p>
-            <a:pPr indent="0" marL="0">
+            <a:pPr marL="0" indent="0">
               <a:buNone/>
             </a:pPr>
             <a:r>
@@ -12030,7 +11781,7 @@
           <a:bodyPr wrap="square" lIns="0" tIns="0" rIns="0" bIns="0" rtlCol="0" anchor="ctr"/>
           <a:lstStyle/>
           <a:p>
-            <a:pPr algn="r" indent="0" marL="0">
+            <a:pPr marL="0" indent="0" algn="r">
               <a:buNone/>
             </a:pPr>
             <a:r>
@@ -12074,6 +11825,13 @@
             <a:prstDash val="solid"/>
           </a:ln>
         </p:spPr>
+        <p:txBody>
+          <a:bodyPr/>
+          <a:lstStyle/>
+          <a:p>
+            <a:endParaRPr lang="en-IN"/>
+          </a:p>
+        </p:txBody>
       </p:sp>
       <p:sp>
         <p:nvSpPr>
@@ -12096,7 +11854,7 @@
           <a:bodyPr wrap="square" lIns="0" tIns="0" rIns="0" bIns="0" rtlCol="0" anchor="t"/>
           <a:lstStyle/>
           <a:p>
-            <a:pPr indent="0" marL="0">
+            <a:pPr marL="0" indent="0">
               <a:lnSpc>
                 <a:spcPct val="100000"/>
               </a:lnSpc>
@@ -12116,7 +11874,7 @@
             <a:endParaRPr lang="en-US" sz="1300" dirty="0"/>
           </a:p>
           <a:p>
-            <a:pPr indent="0" marL="0">
+            <a:pPr marL="0" indent="0">
               <a:lnSpc>
                 <a:spcPct val="100000"/>
               </a:lnSpc>
@@ -12136,7 +11894,7 @@
             <a:endParaRPr lang="en-US" sz="1300" dirty="0"/>
           </a:p>
           <a:p>
-            <a:pPr indent="0" marL="0">
+            <a:pPr marL="0" indent="0">
               <a:lnSpc>
                 <a:spcPct val="100000"/>
               </a:lnSpc>
@@ -12145,7 +11903,7 @@
             <a:endParaRPr lang="en-US" sz="1300" dirty="0"/>
           </a:p>
           <a:p>
-            <a:pPr indent="0" marL="0">
+            <a:pPr marL="0" indent="0">
               <a:lnSpc>
                 <a:spcPct val="100000"/>
               </a:lnSpc>
@@ -12192,6 +11950,13 @@
             <a:prstDash val="solid"/>
           </a:ln>
         </p:spPr>
+        <p:txBody>
+          <a:bodyPr/>
+          <a:lstStyle/>
+          <a:p>
+            <a:endParaRPr lang="en-IN"/>
+          </a:p>
+        </p:txBody>
       </p:sp>
       <p:sp>
         <p:nvSpPr>
@@ -12214,7 +11979,7 @@
           <a:bodyPr wrap="square" lIns="0" tIns="0" rIns="0" bIns="0" rtlCol="0" anchor="ctr"/>
           <a:lstStyle/>
           <a:p>
-            <a:pPr indent="0" marL="0">
+            <a:pPr marL="0" indent="0">
               <a:buNone/>
             </a:pPr>
             <a:r>
@@ -12229,9 +11994,6 @@
               <a:t>Try  6 2 /
 </a:t>
             </a:r>
-            <a:pPr indent="0" marL="0">
-              <a:buNone/>
-            </a:pPr>
             <a:r>
               <a:rPr lang="en-US" sz="1250" dirty="0">
                 <a:solidFill>
@@ -12246,7 +12008,7 @@
             <a:endParaRPr lang="en-US" sz="1250" dirty="0"/>
           </a:p>
           <a:p>
-            <a:pPr indent="0" marL="0">
+            <a:pPr marL="0" indent="0">
               <a:buNone/>
             </a:pPr>
             <a:r>
@@ -12263,7 +12025,7 @@
             <a:endParaRPr lang="en-US" sz="1250" dirty="0"/>
           </a:p>
           <a:p>
-            <a:pPr indent="0" marL="0">
+            <a:pPr marL="0" indent="0">
               <a:buNone/>
             </a:pPr>
             <a:r>
@@ -12412,11 +12174,11 @@
           <a:bodyPr wrap="square" lIns="0" tIns="0" rIns="0" bIns="0" rtlCol="0" anchor="ctr"/>
           <a:lstStyle/>
           <a:p>
-            <a:pPr indent="0" marL="0">
-              <a:buNone/>
-            </a:pPr>
-            <a:r>
-              <a:rPr lang="en-US" sz="1100" b="1" spc="200" kern="0" dirty="0">
+            <a:pPr marL="0" indent="0">
+              <a:buNone/>
+            </a:pPr>
+            <a:r>
+              <a:rPr lang="en-US" sz="1100" b="1" kern="0" spc="200" dirty="0">
                 <a:solidFill>
                   <a:srgbClr val="028090"/>
                 </a:solidFill>
@@ -12451,7 +12213,7 @@
           <a:bodyPr wrap="square" lIns="0" tIns="0" rIns="0" bIns="0" rtlCol="0" anchor="ctr"/>
           <a:lstStyle/>
           <a:p>
-            <a:pPr indent="0" marL="0">
+            <a:pPr marL="0" indent="0">
               <a:buNone/>
             </a:pPr>
             <a:r>
@@ -12490,7 +12252,7 @@
           <a:bodyPr wrap="square" lIns="0" tIns="0" rIns="0" bIns="0" rtlCol="0" anchor="ctr"/>
           <a:lstStyle/>
           <a:p>
-            <a:pPr indent="0" marL="0">
+            <a:pPr marL="0" indent="0">
               <a:buNone/>
             </a:pPr>
             <a:r>
@@ -12529,7 +12291,7 @@
           <a:bodyPr wrap="square" lIns="0" tIns="0" rIns="0" bIns="0" rtlCol="0" anchor="ctr"/>
           <a:lstStyle/>
           <a:p>
-            <a:pPr algn="r" indent="0" marL="0">
+            <a:pPr marL="0" indent="0" algn="r">
               <a:buNone/>
             </a:pPr>
             <a:r>
@@ -12573,6 +12335,13 @@
             <a:prstDash val="solid"/>
           </a:ln>
         </p:spPr>
+        <p:txBody>
+          <a:bodyPr/>
+          <a:lstStyle/>
+          <a:p>
+            <a:endParaRPr lang="en-IN"/>
+          </a:p>
+        </p:txBody>
       </p:sp>
       <p:sp>
         <p:nvSpPr>
@@ -12595,7 +12364,7 @@
           <a:bodyPr wrap="square" lIns="0" tIns="0" rIns="0" bIns="0" rtlCol="0" anchor="t"/>
           <a:lstStyle/>
           <a:p>
-            <a:pPr indent="0" marL="0">
+            <a:pPr marL="0" indent="0">
               <a:lnSpc>
                 <a:spcPct val="100000"/>
               </a:lnSpc>
@@ -12615,7 +12384,7 @@
             <a:endParaRPr lang="en-US" sz="1250" dirty="0"/>
           </a:p>
           <a:p>
-            <a:pPr indent="0" marL="0">
+            <a:pPr marL="0" indent="0">
               <a:lnSpc>
                 <a:spcPct val="100000"/>
               </a:lnSpc>
@@ -12635,7 +12404,7 @@
             <a:endParaRPr lang="en-US" sz="1250" dirty="0"/>
           </a:p>
           <a:p>
-            <a:pPr indent="0" marL="0">
+            <a:pPr marL="0" indent="0">
               <a:lnSpc>
                 <a:spcPct val="100000"/>
               </a:lnSpc>
@@ -12655,7 +12424,7 @@
             <a:endParaRPr lang="en-US" sz="1250" dirty="0"/>
           </a:p>
           <a:p>
-            <a:pPr indent="0" marL="0">
+            <a:pPr marL="0" indent="0">
               <a:lnSpc>
                 <a:spcPct val="100000"/>
               </a:lnSpc>
@@ -12675,7 +12444,7 @@
             <a:endParaRPr lang="en-US" sz="1250" dirty="0"/>
           </a:p>
           <a:p>
-            <a:pPr indent="0" marL="0">
+            <a:pPr marL="0" indent="0">
               <a:lnSpc>
                 <a:spcPct val="100000"/>
               </a:lnSpc>
@@ -12684,7 +12453,7 @@
             <a:endParaRPr lang="en-US" sz="1250" dirty="0"/>
           </a:p>
           <a:p>
-            <a:pPr indent="0" marL="0">
+            <a:pPr marL="0" indent="0">
               <a:lnSpc>
                 <a:spcPct val="100000"/>
               </a:lnSpc>
@@ -12704,7 +12473,7 @@
             <a:endParaRPr lang="en-US" sz="1250" dirty="0"/>
           </a:p>
           <a:p>
-            <a:pPr indent="0" marL="0">
+            <a:pPr marL="0" indent="0">
               <a:lnSpc>
                 <a:spcPct val="100000"/>
               </a:lnSpc>
@@ -12724,7 +12493,7 @@
             <a:endParaRPr lang="en-US" sz="1250" dirty="0"/>
           </a:p>
           <a:p>
-            <a:pPr indent="0" marL="0">
+            <a:pPr marL="0" indent="0">
               <a:lnSpc>
                 <a:spcPct val="100000"/>
               </a:lnSpc>
@@ -12856,6 +12625,13 @@
             <a:prstDash val="solid"/>
           </a:ln>
         </p:spPr>
+        <p:txBody>
+          <a:bodyPr/>
+          <a:lstStyle/>
+          <a:p>
+            <a:endParaRPr lang="en-IN"/>
+          </a:p>
+        </p:txBody>
       </p:sp>
       <p:sp>
         <p:nvSpPr>
@@ -12878,7 +12654,7 @@
           <a:bodyPr wrap="square" lIns="0" tIns="0" rIns="0" bIns="0" rtlCol="0" anchor="ctr"/>
           <a:lstStyle/>
           <a:p>
-            <a:pPr indent="0" marL="0">
+            <a:pPr marL="0" indent="0">
               <a:buNone/>
             </a:pPr>
             <a:r>
@@ -12893,9 +12669,6 @@
               <a:t>Read it as mathematics
 </a:t>
             </a:r>
-            <a:pPr indent="0" marL="0">
-              <a:buNone/>
-            </a:pPr>
             <a:r>
               <a:rPr lang="en-US" sz="1250" dirty="0">
                 <a:solidFill>
@@ -12957,11 +12730,11 @@
           <a:bodyPr wrap="square" lIns="0" tIns="0" rIns="0" bIns="0" rtlCol="0" anchor="ctr"/>
           <a:lstStyle/>
           <a:p>
-            <a:pPr indent="0" marL="0">
-              <a:buNone/>
-            </a:pPr>
-            <a:r>
-              <a:rPr lang="en-US" sz="1100" b="1" spc="200" kern="0" dirty="0">
+            <a:pPr marL="0" indent="0">
+              <a:buNone/>
+            </a:pPr>
+            <a:r>
+              <a:rPr lang="en-US" sz="1100" b="1" kern="0" spc="200" dirty="0">
                 <a:solidFill>
                   <a:srgbClr val="028090"/>
                 </a:solidFill>
@@ -12996,7 +12769,7 @@
           <a:bodyPr wrap="square" lIns="0" tIns="0" rIns="0" bIns="0" rtlCol="0" anchor="ctr"/>
           <a:lstStyle/>
           <a:p>
-            <a:pPr indent="0" marL="0">
+            <a:pPr marL="0" indent="0">
               <a:buNone/>
             </a:pPr>
             <a:r>
@@ -13035,7 +12808,7 @@
           <a:bodyPr wrap="square" lIns="0" tIns="0" rIns="0" bIns="0" rtlCol="0" anchor="ctr"/>
           <a:lstStyle/>
           <a:p>
-            <a:pPr indent="0" marL="0">
+            <a:pPr marL="0" indent="0">
               <a:buNone/>
             </a:pPr>
             <a:r>
@@ -13074,7 +12847,7 @@
           <a:bodyPr wrap="square" lIns="0" tIns="0" rIns="0" bIns="0" rtlCol="0" anchor="ctr"/>
           <a:lstStyle/>
           <a:p>
-            <a:pPr algn="r" indent="0" marL="0">
+            <a:pPr marL="0" indent="0" algn="r">
               <a:buNone/>
             </a:pPr>
             <a:r>
@@ -13116,6 +12889,13 @@
             <a:prstDash val="solid"/>
           </a:ln>
         </p:spPr>
+        <p:txBody>
+          <a:bodyPr/>
+          <a:lstStyle/>
+          <a:p>
+            <a:endParaRPr lang="en-IN"/>
+          </a:p>
+        </p:txBody>
       </p:sp>
       <p:sp>
         <p:nvSpPr>
@@ -13138,7 +12918,7 @@
           <a:bodyPr wrap="square" lIns="0" tIns="0" rIns="0" bIns="0" rtlCol="0" anchor="ctr"/>
           <a:lstStyle/>
           <a:p>
-            <a:pPr indent="0" marL="0">
+            <a:pPr marL="0" indent="0">
               <a:buNone/>
             </a:pPr>
             <a:r>
@@ -13180,6 +12960,13 @@
             <a:prstDash val="solid"/>
           </a:ln>
         </p:spPr>
+        <p:txBody>
+          <a:bodyPr/>
+          <a:lstStyle/>
+          <a:p>
+            <a:endParaRPr lang="en-IN"/>
+          </a:p>
+        </p:txBody>
       </p:sp>
       <p:sp>
         <p:nvSpPr>
@@ -13202,7 +12989,7 @@
           <a:bodyPr wrap="square" lIns="0" tIns="0" rIns="0" bIns="0" rtlCol="0" anchor="ctr"/>
           <a:lstStyle/>
           <a:p>
-            <a:pPr indent="0" marL="0">
+            <a:pPr marL="0" indent="0">
               <a:buNone/>
             </a:pPr>
             <a:r>
@@ -13244,6 +13031,13 @@
             <a:prstDash val="solid"/>
           </a:ln>
         </p:spPr>
+        <p:txBody>
+          <a:bodyPr/>
+          <a:lstStyle/>
+          <a:p>
+            <a:endParaRPr lang="en-IN"/>
+          </a:p>
+        </p:txBody>
       </p:sp>
       <p:sp>
         <p:nvSpPr>
@@ -13266,7 +13060,7 @@
           <a:bodyPr wrap="square" lIns="0" tIns="0" rIns="0" bIns="0" rtlCol="0" anchor="ctr"/>
           <a:lstStyle/>
           <a:p>
-            <a:pPr indent="0" marL="0">
+            <a:pPr marL="0" indent="0">
               <a:buNone/>
             </a:pPr>
             <a:r>
@@ -13308,6 +13102,13 @@
             <a:prstDash val="solid"/>
           </a:ln>
         </p:spPr>
+        <p:txBody>
+          <a:bodyPr/>
+          <a:lstStyle/>
+          <a:p>
+            <a:endParaRPr lang="en-IN"/>
+          </a:p>
+        </p:txBody>
       </p:sp>
       <p:sp>
         <p:nvSpPr>
@@ -13330,7 +13131,7 @@
           <a:bodyPr wrap="square" lIns="0" tIns="0" rIns="0" bIns="0" rtlCol="0" anchor="ctr"/>
           <a:lstStyle/>
           <a:p>
-            <a:pPr indent="0" marL="0">
+            <a:pPr marL="0" indent="0">
               <a:buNone/>
             </a:pPr>
             <a:r>
@@ -13372,6 +13173,13 @@
             <a:prstDash val="solid"/>
           </a:ln>
         </p:spPr>
+        <p:txBody>
+          <a:bodyPr/>
+          <a:lstStyle/>
+          <a:p>
+            <a:endParaRPr lang="en-IN"/>
+          </a:p>
+        </p:txBody>
       </p:sp>
       <p:sp>
         <p:nvSpPr>
@@ -13394,7 +13202,7 @@
           <a:bodyPr wrap="square" lIns="0" tIns="0" rIns="0" bIns="0" rtlCol="0" anchor="ctr"/>
           <a:lstStyle/>
           <a:p>
-            <a:pPr indent="0" marL="0">
+            <a:pPr marL="0" indent="0">
               <a:buNone/>
             </a:pPr>
             <a:r>
@@ -13433,7 +13241,7 @@
           <a:bodyPr wrap="square" lIns="0" tIns="0" rIns="0" bIns="0" rtlCol="0" anchor="ctr"/>
           <a:lstStyle/>
           <a:p>
-            <a:pPr indent="0" marL="0">
+            <a:pPr marL="0" indent="0">
               <a:buNone/>
             </a:pPr>
             <a:r>
@@ -13583,6 +13391,13 @@
             <a:prstDash val="solid"/>
           </a:ln>
         </p:spPr>
+        <p:txBody>
+          <a:bodyPr/>
+          <a:lstStyle/>
+          <a:p>
+            <a:endParaRPr lang="en-IN"/>
+          </a:p>
+        </p:txBody>
       </p:sp>
       <p:sp>
         <p:nvSpPr>
@@ -13605,7 +13420,7 @@
           <a:bodyPr wrap="square" lIns="0" tIns="0" rIns="0" bIns="0" rtlCol="0" anchor="ctr"/>
           <a:lstStyle/>
           <a:p>
-            <a:pPr indent="0" marL="0">
+            <a:pPr marL="0" indent="0">
               <a:buNone/>
             </a:pPr>
             <a:r>
@@ -13619,9 +13434,6 @@
               </a:rPr>
               <a:t>ASK   </a:t>
             </a:r>
-            <a:pPr indent="0" marL="0">
-              <a:buNone/>
-            </a:pPr>
             <a:r>
               <a:rPr lang="en-US" sz="1250" i="1" dirty="0">
                 <a:solidFill>
@@ -13938,4 +13750,319 @@
     </a:ext>
   </a:extLst>
 </a:theme>
+</file>
+
+<file path=ppt/theme/theme2.xml><?xml version="1.0" encoding="utf-8"?>
+<a:theme xmlns:a="http://schemas.openxmlformats.org/drawingml/2006/main" name="Office Theme">
+  <a:themeElements>
+    <a:clrScheme name="Office">
+      <a:dk1>
+        <a:sysClr val="windowText" lastClr="000000"/>
+      </a:dk1>
+      <a:lt1>
+        <a:sysClr val="window" lastClr="FFFFFF"/>
+      </a:lt1>
+      <a:dk2>
+        <a:srgbClr val="0E2841"/>
+      </a:dk2>
+      <a:lt2>
+        <a:srgbClr val="E8E8E8"/>
+      </a:lt2>
+      <a:accent1>
+        <a:srgbClr val="156082"/>
+      </a:accent1>
+      <a:accent2>
+        <a:srgbClr val="E97132"/>
+      </a:accent2>
+      <a:accent3>
+        <a:srgbClr val="196B24"/>
+      </a:accent3>
+      <a:accent4>
+        <a:srgbClr val="0F9ED5"/>
+      </a:accent4>
+      <a:accent5>
+        <a:srgbClr val="A02B93"/>
+      </a:accent5>
+      <a:accent6>
+        <a:srgbClr val="4EA72E"/>
+      </a:accent6>
+      <a:hlink>
+        <a:srgbClr val="467886"/>
+      </a:hlink>
+      <a:folHlink>
+        <a:srgbClr val="96607D"/>
+      </a:folHlink>
+    </a:clrScheme>
+    <a:fontScheme name="Office">
+      <a:majorFont>
+        <a:latin typeface="Aptos Display" panose="02110004020202020204"/>
+        <a:ea typeface=""/>
+        <a:cs typeface=""/>
+        <a:font script="Jpan" typeface="游ゴシック Light"/>
+        <a:font script="Hang" typeface="맑은 고딕"/>
+        <a:font script="Hans" typeface="等线 Light"/>
+        <a:font script="Hant" typeface="新細明體"/>
+        <a:font script="Arab" typeface="Times New Roman"/>
+        <a:font script="Hebr" typeface="Times New Roman"/>
+        <a:font script="Thai" typeface="Angsana New"/>
+        <a:font script="Ethi" typeface="Nyala"/>
+        <a:font script="Beng" typeface="Vrinda"/>
+        <a:font script="Gujr" typeface="Shruti"/>
+        <a:font script="Khmr" typeface="MoolBoran"/>
+        <a:font script="Knda" typeface="Tunga"/>
+        <a:font script="Guru" typeface="Raavi"/>
+        <a:font script="Cans" typeface="Euphemia"/>
+        <a:font script="Cher" typeface="Plantagenet Cherokee"/>
+        <a:font script="Yiii" typeface="Microsoft Yi Baiti"/>
+        <a:font script="Tibt" typeface="Microsoft Himalaya"/>
+        <a:font script="Thaa" typeface="MV Boli"/>
+        <a:font script="Deva" typeface="Mangal"/>
+        <a:font script="Telu" typeface="Gautami"/>
+        <a:font script="Taml" typeface="Latha"/>
+        <a:font script="Syrc" typeface="Estrangelo Edessa"/>
+        <a:font script="Orya" typeface="Kalinga"/>
+        <a:font script="Mlym" typeface="Kartika"/>
+        <a:font script="Laoo" typeface="DokChampa"/>
+        <a:font script="Sinh" typeface="Iskoola Pota"/>
+        <a:font script="Mong" typeface="Mongolian Baiti"/>
+        <a:font script="Viet" typeface="Times New Roman"/>
+        <a:font script="Uigh" typeface="Microsoft Uighur"/>
+        <a:font script="Geor" typeface="Sylfaen"/>
+        <a:font script="Armn" typeface="Arial"/>
+        <a:font script="Bugi" typeface="Leelawadee UI"/>
+        <a:font script="Bopo" typeface="Microsoft JhengHei"/>
+        <a:font script="Java" typeface="Javanese Text"/>
+        <a:font script="Lisu" typeface="Segoe UI"/>
+        <a:font script="Mymr" typeface="Myanmar Text"/>
+        <a:font script="Nkoo" typeface="Ebrima"/>
+        <a:font script="Olck" typeface="Nirmala UI"/>
+        <a:font script="Osma" typeface="Ebrima"/>
+        <a:font script="Phag" typeface="Phagspa"/>
+        <a:font script="Syrn" typeface="Estrangelo Edessa"/>
+        <a:font script="Syrj" typeface="Estrangelo Edessa"/>
+        <a:font script="Syre" typeface="Estrangelo Edessa"/>
+        <a:font script="Sora" typeface="Nirmala UI"/>
+        <a:font script="Tale" typeface="Microsoft Tai Le"/>
+        <a:font script="Talu" typeface="Microsoft New Tai Lue"/>
+        <a:font script="Tfng" typeface="Ebrima"/>
+      </a:majorFont>
+      <a:minorFont>
+        <a:latin typeface="Aptos" panose="02110004020202020204"/>
+        <a:ea typeface=""/>
+        <a:cs typeface=""/>
+        <a:font script="Jpan" typeface="游ゴシック"/>
+        <a:font script="Hang" typeface="맑은 고딕"/>
+        <a:font script="Hans" typeface="等线"/>
+        <a:font script="Hant" typeface="新細明體"/>
+        <a:font script="Arab" typeface="Arial"/>
+        <a:font script="Hebr" typeface="Arial"/>
+        <a:font script="Thai" typeface="Cordia New"/>
+        <a:font script="Ethi" typeface="Nyala"/>
+        <a:font script="Beng" typeface="Vrinda"/>
+        <a:font script="Gujr" typeface="Shruti"/>
+        <a:font script="Khmr" typeface="DaunPenh"/>
+        <a:font script="Knda" typeface="Tunga"/>
+        <a:font script="Guru" typeface="Raavi"/>
+        <a:font script="Cans" typeface="Euphemia"/>
+        <a:font script="Cher" typeface="Plantagenet Cherokee"/>
+        <a:font script="Yiii" typeface="Microsoft Yi Baiti"/>
+        <a:font script="Tibt" typeface="Microsoft Himalaya"/>
+        <a:font script="Thaa" typeface="MV Boli"/>
+        <a:font script="Deva" typeface="Mangal"/>
+        <a:font script="Telu" typeface="Gautami"/>
+        <a:font script="Taml" typeface="Latha"/>
+        <a:font script="Syrc" typeface="Estrangelo Edessa"/>
+        <a:font script="Orya" typeface="Kalinga"/>
+        <a:font script="Mlym" typeface="Kartika"/>
+        <a:font script="Laoo" typeface="DokChampa"/>
+        <a:font script="Sinh" typeface="Iskoola Pota"/>
+        <a:font script="Mong" typeface="Mongolian Baiti"/>
+        <a:font script="Viet" typeface="Arial"/>
+        <a:font script="Uigh" typeface="Microsoft Uighur"/>
+        <a:font script="Geor" typeface="Sylfaen"/>
+        <a:font script="Armn" typeface="Arial"/>
+        <a:font script="Bugi" typeface="Leelawadee UI"/>
+        <a:font script="Bopo" typeface="Microsoft JhengHei"/>
+        <a:font script="Java" typeface="Javanese Text"/>
+        <a:font script="Lisu" typeface="Segoe UI"/>
+        <a:font script="Mymr" typeface="Myanmar Text"/>
+        <a:font script="Nkoo" typeface="Ebrima"/>
+        <a:font script="Olck" typeface="Nirmala UI"/>
+        <a:font script="Osma" typeface="Ebrima"/>
+        <a:font script="Phag" typeface="Phagspa"/>
+        <a:font script="Syrn" typeface="Estrangelo Edessa"/>
+        <a:font script="Syrj" typeface="Estrangelo Edessa"/>
+        <a:font script="Syre" typeface="Estrangelo Edessa"/>
+        <a:font script="Sora" typeface="Nirmala UI"/>
+        <a:font script="Tale" typeface="Microsoft Tai Le"/>
+        <a:font script="Talu" typeface="Microsoft New Tai Lue"/>
+        <a:font script="Tfng" typeface="Ebrima"/>
+      </a:minorFont>
+    </a:fontScheme>
+    <a:fmtScheme name="Office">
+      <a:fillStyleLst>
+        <a:solidFill>
+          <a:schemeClr val="phClr"/>
+        </a:solidFill>
+        <a:gradFill rotWithShape="1">
+          <a:gsLst>
+            <a:gs pos="0">
+              <a:schemeClr val="phClr">
+                <a:lumMod val="110000"/>
+                <a:satMod val="105000"/>
+                <a:tint val="67000"/>
+              </a:schemeClr>
+            </a:gs>
+            <a:gs pos="50000">
+              <a:schemeClr val="phClr">
+                <a:lumMod val="105000"/>
+                <a:satMod val="103000"/>
+                <a:tint val="73000"/>
+              </a:schemeClr>
+            </a:gs>
+            <a:gs pos="100000">
+              <a:schemeClr val="phClr">
+                <a:lumMod val="105000"/>
+                <a:satMod val="109000"/>
+                <a:tint val="81000"/>
+              </a:schemeClr>
+            </a:gs>
+          </a:gsLst>
+          <a:lin ang="5400000" scaled="0"/>
+        </a:gradFill>
+        <a:gradFill rotWithShape="1">
+          <a:gsLst>
+            <a:gs pos="0">
+              <a:schemeClr val="phClr">
+                <a:satMod val="103000"/>
+                <a:lumMod val="102000"/>
+                <a:tint val="94000"/>
+              </a:schemeClr>
+            </a:gs>
+            <a:gs pos="50000">
+              <a:schemeClr val="phClr">
+                <a:satMod val="110000"/>
+                <a:lumMod val="100000"/>
+                <a:shade val="100000"/>
+              </a:schemeClr>
+            </a:gs>
+            <a:gs pos="100000">
+              <a:schemeClr val="phClr">
+                <a:lumMod val="99000"/>
+                <a:satMod val="120000"/>
+                <a:shade val="78000"/>
+              </a:schemeClr>
+            </a:gs>
+          </a:gsLst>
+          <a:lin ang="5400000" scaled="0"/>
+        </a:gradFill>
+      </a:fillStyleLst>
+      <a:lnStyleLst>
+        <a:ln w="12700" cap="flat" cmpd="sng" algn="ctr">
+          <a:solidFill>
+            <a:schemeClr val="phClr"/>
+          </a:solidFill>
+          <a:prstDash val="solid"/>
+          <a:miter lim="800000"/>
+        </a:ln>
+        <a:ln w="19050" cap="flat" cmpd="sng" algn="ctr">
+          <a:solidFill>
+            <a:schemeClr val="phClr"/>
+          </a:solidFill>
+          <a:prstDash val="solid"/>
+          <a:miter lim="800000"/>
+        </a:ln>
+        <a:ln w="25400" cap="flat" cmpd="sng" algn="ctr">
+          <a:solidFill>
+            <a:schemeClr val="phClr"/>
+          </a:solidFill>
+          <a:prstDash val="solid"/>
+          <a:miter lim="800000"/>
+        </a:ln>
+      </a:lnStyleLst>
+      <a:effectStyleLst>
+        <a:effectStyle>
+          <a:effectLst/>
+        </a:effectStyle>
+        <a:effectStyle>
+          <a:effectLst/>
+        </a:effectStyle>
+        <a:effectStyle>
+          <a:effectLst>
+            <a:outerShdw blurRad="57150" dist="19050" dir="5400000" algn="ctr" rotWithShape="0">
+              <a:srgbClr val="000000">
+                <a:alpha val="63000"/>
+              </a:srgbClr>
+            </a:outerShdw>
+          </a:effectLst>
+        </a:effectStyle>
+      </a:effectStyleLst>
+      <a:bgFillStyleLst>
+        <a:solidFill>
+          <a:schemeClr val="phClr"/>
+        </a:solidFill>
+        <a:solidFill>
+          <a:schemeClr val="phClr">
+            <a:tint val="95000"/>
+            <a:satMod val="170000"/>
+          </a:schemeClr>
+        </a:solidFill>
+        <a:gradFill rotWithShape="1">
+          <a:gsLst>
+            <a:gs pos="0">
+              <a:schemeClr val="phClr">
+                <a:tint val="93000"/>
+                <a:satMod val="150000"/>
+                <a:shade val="98000"/>
+                <a:lumMod val="102000"/>
+              </a:schemeClr>
+            </a:gs>
+            <a:gs pos="50000">
+              <a:schemeClr val="phClr">
+                <a:tint val="98000"/>
+                <a:satMod val="130000"/>
+                <a:shade val="90000"/>
+                <a:lumMod val="103000"/>
+              </a:schemeClr>
+            </a:gs>
+            <a:gs pos="100000">
+              <a:schemeClr val="phClr">
+                <a:shade val="63000"/>
+                <a:satMod val="120000"/>
+              </a:schemeClr>
+            </a:gs>
+          </a:gsLst>
+          <a:lin ang="5400000" scaled="0"/>
+        </a:gradFill>
+      </a:bgFillStyleLst>
+    </a:fmtScheme>
+  </a:themeElements>
+  <a:objectDefaults>
+    <a:lnDef>
+      <a:spPr/>
+      <a:bodyPr/>
+      <a:lstStyle/>
+      <a:style>
+        <a:lnRef idx="2">
+          <a:schemeClr val="accent1"/>
+        </a:lnRef>
+        <a:fillRef idx="0">
+          <a:schemeClr val="accent1"/>
+        </a:fillRef>
+        <a:effectRef idx="1">
+          <a:schemeClr val="accent1"/>
+        </a:effectRef>
+        <a:fontRef idx="minor">
+          <a:schemeClr val="tx1"/>
+        </a:fontRef>
+      </a:style>
+    </a:lnDef>
+  </a:objectDefaults>
+  <a:extraClrSchemeLst/>
+  <a:extLst>
+    <a:ext uri="{05A4C25C-085E-4340-85A3-A5531E510DB2}">
+      <thm15:themeFamily xmlns:thm15="http://schemas.microsoft.com/office/thememl/2012/main" name="Office Theme" id="{2E142A2C-CD16-42D6-873A-C26D2A0506FA}" vid="{1BDDFF52-6CD6-40A5-AB3C-68EB2F1E4D0A}"/>
+    </a:ext>
+  </a:extLst>
+</a:theme>
 </file>